--- a/docs/presentation/AI_NLP_Financial_Risk_Engine_Hackathon_Deck.pptx
+++ b/docs/presentation/AI_NLP_Financial_Risk_Engine_Hackathon_Deck.pptx
@@ -113,6 +113,11 @@
       </a:defRPr>
     </a:lvl9pPr>
   </p:defaultTextStyle>
+  <p:extLst>
+    <p:ext uri="{EFAFB233-063F-42B5-8137-9DF3F51BA10A}">
+      <p15:sldGuideLst xmlns:p15="http://schemas.microsoft.com/office/powerpoint/2012/main"/>
+    </p:ext>
+  </p:extLst>
 </p:presentation>
 </file>
 
@@ -9416,244 +9421,6 @@
           <a:chExt cx="0" cy="0"/>
         </a:xfrm>
       </p:grpSpPr>
-      <p:cxnSp>
-        <p:nvCxnSpPr>
-          <p:cNvPr id="32" name="Straight Arrow Connector 31">
-            <a:extLst>
-              <a:ext uri="{FF2B5EF4-FFF2-40B4-BE49-F238E27FC236}">
-                <a16:creationId xmlns:a16="http://schemas.microsoft.com/office/drawing/2014/main" id="{875832C6-B9F4-4E59-8D9D-62A559ADA95D}"/>
-              </a:ext>
-            </a:extLst>
-          </p:cNvPr>
-          <p:cNvCxnSpPr>
-            <a:stCxn id="20" idx="3"/>
-            <a:endCxn id="23" idx="1"/>
-          </p:cNvCxnSpPr>
-          <p:nvPr/>
-        </p:nvCxnSpPr>
-        <p:spPr>
-          <a:xfrm>
-            <a:off x="9315450" y="3819525"/>
-            <a:ext cx="609600" cy="0"/>
-          </a:xfrm>
-          <a:prstGeom prst="straightConnector1">
-            <a:avLst/>
-          </a:prstGeom>
-          <a:ln w="19050">
-            <a:solidFill>
-              <a:srgbClr val="0F8D9B"/>
-            </a:solidFill>
-            <a:prstDash val="solid"/>
-            <a:headEnd type="arrow" w="sm" len="sm"/>
-          </a:ln>
-        </p:spPr>
-      </p:cxnSp>
-      <p:cxnSp>
-        <p:nvCxnSpPr>
-          <p:cNvPr id="31" name="Connector: Elbow 30">
-            <a:extLst>
-              <a:ext uri="{FF2B5EF4-FFF2-40B4-BE49-F238E27FC236}">
-                <a16:creationId xmlns:a16="http://schemas.microsoft.com/office/drawing/2014/main" id="{F561D762-8881-4DA4-A92E-0F610564D208}"/>
-              </a:ext>
-            </a:extLst>
-          </p:cNvPr>
-          <p:cNvCxnSpPr>
-            <a:stCxn id="15" idx="3"/>
-            <a:endCxn id="20" idx="1"/>
-          </p:cNvCxnSpPr>
-          <p:nvPr/>
-        </p:nvCxnSpPr>
-        <p:spPr>
-          <a:xfrm flipV="1">
-            <a:off x="7048500" y="3819525"/>
-            <a:ext cx="609600" cy="771525"/>
-          </a:xfrm>
-          <a:prstGeom prst="bentConnector3">
-            <a:avLst>
-              <a:gd name="adj1" fmla="val 50000"/>
-            </a:avLst>
-          </a:prstGeom>
-          <a:ln w="19050">
-            <a:solidFill>
-              <a:srgbClr val="0F8D9B"/>
-            </a:solidFill>
-            <a:prstDash val="solid"/>
-            <a:headEnd type="arrow" w="sm" len="sm"/>
-          </a:ln>
-        </p:spPr>
-      </p:cxnSp>
-      <p:cxnSp>
-        <p:nvCxnSpPr>
-          <p:cNvPr id="30" name="Connector: Elbow 29">
-            <a:extLst>
-              <a:ext uri="{FF2B5EF4-FFF2-40B4-BE49-F238E27FC236}">
-                <a16:creationId xmlns:a16="http://schemas.microsoft.com/office/drawing/2014/main" id="{67AC80F0-BA43-4E56-A66F-3B702383BEC1}"/>
-              </a:ext>
-            </a:extLst>
-          </p:cNvPr>
-          <p:cNvCxnSpPr>
-            <a:stCxn id="14" idx="3"/>
-            <a:endCxn id="20" idx="1"/>
-          </p:cNvCxnSpPr>
-          <p:nvPr/>
-        </p:nvCxnSpPr>
-        <p:spPr>
-          <a:xfrm>
-            <a:off x="7048500" y="3009900"/>
-            <a:ext cx="609600" cy="809625"/>
-          </a:xfrm>
-          <a:prstGeom prst="bentConnector3">
-            <a:avLst>
-              <a:gd name="adj1" fmla="val 50000"/>
-            </a:avLst>
-          </a:prstGeom>
-          <a:ln w="19050">
-            <a:solidFill>
-              <a:srgbClr val="0F8D9B"/>
-            </a:solidFill>
-            <a:prstDash val="solid"/>
-            <a:headEnd type="arrow" w="sm" len="sm"/>
-          </a:ln>
-        </p:spPr>
-      </p:cxnSp>
-      <p:cxnSp>
-        <p:nvCxnSpPr>
-          <p:cNvPr id="29" name="Connector: Elbow 28">
-            <a:extLst>
-              <a:ext uri="{FF2B5EF4-FFF2-40B4-BE49-F238E27FC236}">
-                <a16:creationId xmlns:a16="http://schemas.microsoft.com/office/drawing/2014/main" id="{9B50D994-F69A-4A18-B1D1-9102AB278C41}"/>
-              </a:ext>
-            </a:extLst>
-          </p:cNvPr>
-          <p:cNvCxnSpPr>
-            <a:stCxn id="11" idx="3"/>
-            <a:endCxn id="15" idx="1"/>
-          </p:cNvCxnSpPr>
-          <p:nvPr/>
-        </p:nvCxnSpPr>
-        <p:spPr>
-          <a:xfrm>
-            <a:off x="4724400" y="3819525"/>
-            <a:ext cx="666750" cy="771525"/>
-          </a:xfrm>
-          <a:prstGeom prst="bentConnector3">
-            <a:avLst>
-              <a:gd name="adj1" fmla="val 50000"/>
-            </a:avLst>
-          </a:prstGeom>
-          <a:ln w="19050">
-            <a:solidFill>
-              <a:srgbClr val="0F8D9B"/>
-            </a:solidFill>
-            <a:prstDash val="solid"/>
-            <a:headEnd type="arrow" w="sm" len="sm"/>
-          </a:ln>
-        </p:spPr>
-      </p:cxnSp>
-      <p:cxnSp>
-        <p:nvCxnSpPr>
-          <p:cNvPr id="28" name="Connector: Elbow 27">
-            <a:extLst>
-              <a:ext uri="{FF2B5EF4-FFF2-40B4-BE49-F238E27FC236}">
-                <a16:creationId xmlns:a16="http://schemas.microsoft.com/office/drawing/2014/main" id="{F9C466E4-FD82-4C36-B312-5E3FF0110294}"/>
-              </a:ext>
-            </a:extLst>
-          </p:cNvPr>
-          <p:cNvCxnSpPr>
-            <a:stCxn id="11" idx="3"/>
-            <a:endCxn id="14" idx="1"/>
-          </p:cNvCxnSpPr>
-          <p:nvPr/>
-        </p:nvCxnSpPr>
-        <p:spPr>
-          <a:xfrm flipV="1">
-            <a:off x="4724400" y="3009900"/>
-            <a:ext cx="666750" cy="809625"/>
-          </a:xfrm>
-          <a:prstGeom prst="bentConnector3">
-            <a:avLst>
-              <a:gd name="adj1" fmla="val 50000"/>
-            </a:avLst>
-          </a:prstGeom>
-          <a:ln w="19050">
-            <a:solidFill>
-              <a:srgbClr val="0F8D9B"/>
-            </a:solidFill>
-            <a:prstDash val="solid"/>
-            <a:headEnd type="arrow" w="sm" len="sm"/>
-          </a:ln>
-        </p:spPr>
-      </p:cxnSp>
-      <p:cxnSp>
-        <p:nvCxnSpPr>
-          <p:cNvPr id="27" name="Connector: Elbow 26">
-            <a:extLst>
-              <a:ext uri="{FF2B5EF4-FFF2-40B4-BE49-F238E27FC236}">
-                <a16:creationId xmlns:a16="http://schemas.microsoft.com/office/drawing/2014/main" id="{64961BF2-CEF1-4F37-9146-16D4D0B27171}"/>
-              </a:ext>
-            </a:extLst>
-          </p:cNvPr>
-          <p:cNvCxnSpPr>
-            <a:cxnSpLocks/>
-            <a:stCxn id="6" idx="3"/>
-            <a:endCxn id="11" idx="1"/>
-          </p:cNvCxnSpPr>
-          <p:nvPr/>
-        </p:nvCxnSpPr>
-        <p:spPr>
-          <a:xfrm flipV="1">
-            <a:off x="2419350" y="3819525"/>
-            <a:ext cx="685800" cy="676275"/>
-          </a:xfrm>
-          <a:prstGeom prst="bentConnector3">
-            <a:avLst>
-              <a:gd name="adj1" fmla="val 50000"/>
-            </a:avLst>
-          </a:prstGeom>
-          <a:ln w="19050">
-            <a:solidFill>
-              <a:srgbClr val="0F8D9B"/>
-            </a:solidFill>
-            <a:prstDash val="solid"/>
-            <a:headEnd type="arrow" w="sm" len="sm"/>
-          </a:ln>
-        </p:spPr>
-      </p:cxnSp>
-      <p:cxnSp>
-        <p:nvCxnSpPr>
-          <p:cNvPr id="26" name="Connector: Elbow 25">
-            <a:extLst>
-              <a:ext uri="{FF2B5EF4-FFF2-40B4-BE49-F238E27FC236}">
-                <a16:creationId xmlns:a16="http://schemas.microsoft.com/office/drawing/2014/main" id="{E36F2A64-72E4-442E-98B5-9A8BDEA7D311}"/>
-              </a:ext>
-            </a:extLst>
-          </p:cNvPr>
-          <p:cNvCxnSpPr>
-            <a:cxnSpLocks/>
-            <a:stCxn id="5" idx="3"/>
-            <a:endCxn id="11" idx="1"/>
-          </p:cNvCxnSpPr>
-          <p:nvPr/>
-        </p:nvCxnSpPr>
-        <p:spPr>
-          <a:xfrm>
-            <a:off x="2419350" y="3124200"/>
-            <a:ext cx="685800" cy="695325"/>
-          </a:xfrm>
-          <a:prstGeom prst="bentConnector3">
-            <a:avLst>
-              <a:gd name="adj1" fmla="val 50000"/>
-            </a:avLst>
-          </a:prstGeom>
-          <a:ln w="19050">
-            <a:solidFill>
-              <a:srgbClr val="0F8D9B"/>
-            </a:solidFill>
-            <a:prstDash val="solid"/>
-            <a:headEnd type="arrow" w="sm" len="sm"/>
-          </a:ln>
-        </p:spPr>
-      </p:cxnSp>
       <p:sp>
         <p:nvSpPr>
           <p:cNvPr id="37" name="section">
@@ -10178,2717 +9945,6 @@
           <a:lstStyle/>
           <a:p>
             <a:endParaRPr lang="en-IN"/>
-          </a:p>
-        </p:txBody>
-      </p:sp>
-      <p:sp>
-        <p:nvSpPr>
-          <p:cNvPr id="5" name="newsapi">
-            <a:extLst>
-              <a:ext uri="{FF2B5EF4-FFF2-40B4-BE49-F238E27FC236}">
-                <a16:creationId xmlns:a16="http://schemas.microsoft.com/office/drawing/2014/main" id="{5CA25428-50E6-47CA-8E24-2F7C09AB2043}"/>
-              </a:ext>
-            </a:extLst>
-          </p:cNvPr>
-          <p:cNvSpPr>
-            <a:spLocks noGrp="1"/>
-          </p:cNvSpPr>
-          <p:nvPr/>
-        </p:nvSpPr>
-        <p:spPr>
-          <a:xfrm>
-            <a:off x="723900" y="2667000"/>
-            <a:ext cx="1695450" cy="914400"/>
-          </a:xfrm>
-          <a:prstGeom prst="roundRect">
-            <a:avLst>
-              <a:gd name="adj" fmla="val 14583"/>
-            </a:avLst>
-          </a:prstGeom>
-          <a:solidFill>
-            <a:srgbClr val="FFFFFF"/>
-          </a:solidFill>
-          <a:ln w="9525">
-            <a:solidFill>
-              <a:srgbClr val="C9D5E4"/>
-            </a:solidFill>
-            <a:prstDash val="solid"/>
-          </a:ln>
-        </p:spPr>
-        <p:txBody>
-          <a:bodyPr/>
-          <a:lstStyle/>
-          <a:p>
-            <a:endParaRPr lang="en-IN"/>
-          </a:p>
-        </p:txBody>
-      </p:sp>
-      <p:sp>
-        <p:nvSpPr>
-          <p:cNvPr id="6" name="socialcsv">
-            <a:extLst>
-              <a:ext uri="{FF2B5EF4-FFF2-40B4-BE49-F238E27FC236}">
-                <a16:creationId xmlns:a16="http://schemas.microsoft.com/office/drawing/2014/main" id="{542B9EEA-926F-4F29-AD15-ED0355A2BCFA}"/>
-              </a:ext>
-            </a:extLst>
-          </p:cNvPr>
-          <p:cNvSpPr>
-            <a:spLocks noGrp="1"/>
-          </p:cNvSpPr>
-          <p:nvPr/>
-        </p:nvSpPr>
-        <p:spPr>
-          <a:xfrm>
-            <a:off x="723900" y="4038600"/>
-            <a:ext cx="1695450" cy="914400"/>
-          </a:xfrm>
-          <a:prstGeom prst="roundRect">
-            <a:avLst>
-              <a:gd name="adj" fmla="val 14583"/>
-            </a:avLst>
-          </a:prstGeom>
-          <a:solidFill>
-            <a:srgbClr val="FFFFFF"/>
-          </a:solidFill>
-          <a:ln w="9525">
-            <a:solidFill>
-              <a:srgbClr val="C9D5E4"/>
-            </a:solidFill>
-            <a:prstDash val="solid"/>
-          </a:ln>
-        </p:spPr>
-        <p:txBody>
-          <a:bodyPr/>
-          <a:lstStyle/>
-          <a:p>
-            <a:endParaRPr lang="en-IN"/>
-          </a:p>
-        </p:txBody>
-      </p:sp>
-      <p:sp>
-        <p:nvSpPr>
-          <p:cNvPr id="7" name="Rectangle 6">
-            <a:extLst>
-              <a:ext uri="{FF2B5EF4-FFF2-40B4-BE49-F238E27FC236}">
-                <a16:creationId xmlns:a16="http://schemas.microsoft.com/office/drawing/2014/main" id="{D646426D-3832-49C2-979B-824871727CE2}"/>
-              </a:ext>
-            </a:extLst>
-          </p:cNvPr>
-          <p:cNvSpPr>
-            <a:spLocks noGrp="1"/>
-          </p:cNvSpPr>
-          <p:nvPr/>
-        </p:nvSpPr>
-        <p:spPr>
-          <a:xfrm>
-            <a:off x="895350" y="2857500"/>
-            <a:ext cx="1314450" cy="228600"/>
-          </a:xfrm>
-          <a:prstGeom prst="rect">
-            <a:avLst/>
-          </a:prstGeom>
-          <a:noFill/>
-          <a:ln w="0">
-            <a:noFill/>
-            <a:prstDash val="solid"/>
-          </a:ln>
-        </p:spPr>
-        <p:txBody>
-          <a:bodyPr wrap="square" lIns="0" tIns="0" rIns="0" bIns="0" anchor="t">
-            <a:normAutofit fontScale="98203" lnSpcReduction="10000"/>
-          </a:bodyPr>
-          <a:lstStyle>
-            <a:defPPr algn="ctr">
-              <a:defRPr sz="1575" b="1">
-                <a:solidFill>
-                  <a:srgbClr val="071A33"/>
-                </a:solidFill>
-                <a:latin typeface="Aptos"/>
-                <a:ea typeface="Aptos"/>
-                <a:cs typeface="Aptos"/>
-              </a:defRPr>
-            </a:defPPr>
-            <a:lvl1pPr algn="ctr">
-              <a:defRPr sz="1575" b="1">
-                <a:solidFill>
-                  <a:srgbClr val="071A33"/>
-                </a:solidFill>
-                <a:latin typeface="Aptos"/>
-                <a:ea typeface="Aptos"/>
-                <a:cs typeface="Aptos"/>
-              </a:defRPr>
-            </a:lvl1pPr>
-            <a:lvl2pPr algn="ctr">
-              <a:defRPr sz="1575" b="1">
-                <a:solidFill>
-                  <a:srgbClr val="071A33"/>
-                </a:solidFill>
-                <a:latin typeface="Aptos"/>
-                <a:ea typeface="Aptos"/>
-                <a:cs typeface="Aptos"/>
-              </a:defRPr>
-            </a:lvl2pPr>
-            <a:lvl3pPr algn="ctr">
-              <a:defRPr sz="1575" b="1">
-                <a:solidFill>
-                  <a:srgbClr val="071A33"/>
-                </a:solidFill>
-                <a:latin typeface="Aptos"/>
-                <a:ea typeface="Aptos"/>
-                <a:cs typeface="Aptos"/>
-              </a:defRPr>
-            </a:lvl3pPr>
-            <a:lvl4pPr algn="ctr">
-              <a:defRPr sz="1575" b="1">
-                <a:solidFill>
-                  <a:srgbClr val="071A33"/>
-                </a:solidFill>
-                <a:latin typeface="Aptos"/>
-                <a:ea typeface="Aptos"/>
-                <a:cs typeface="Aptos"/>
-              </a:defRPr>
-            </a:lvl4pPr>
-            <a:lvl5pPr algn="ctr">
-              <a:defRPr sz="1575" b="1">
-                <a:solidFill>
-                  <a:srgbClr val="071A33"/>
-                </a:solidFill>
-                <a:latin typeface="Aptos"/>
-                <a:ea typeface="Aptos"/>
-                <a:cs typeface="Aptos"/>
-              </a:defRPr>
-            </a:lvl5pPr>
-            <a:lvl6pPr algn="ctr">
-              <a:defRPr sz="1575" b="1">
-                <a:solidFill>
-                  <a:srgbClr val="071A33"/>
-                </a:solidFill>
-                <a:latin typeface="Aptos"/>
-                <a:ea typeface="Aptos"/>
-                <a:cs typeface="Aptos"/>
-              </a:defRPr>
-            </a:lvl6pPr>
-            <a:lvl7pPr algn="ctr">
-              <a:defRPr sz="1575" b="1">
-                <a:solidFill>
-                  <a:srgbClr val="071A33"/>
-                </a:solidFill>
-                <a:latin typeface="Aptos"/>
-                <a:ea typeface="Aptos"/>
-                <a:cs typeface="Aptos"/>
-              </a:defRPr>
-            </a:lvl7pPr>
-            <a:lvl8pPr algn="ctr">
-              <a:defRPr sz="1575" b="1">
-                <a:solidFill>
-                  <a:srgbClr val="071A33"/>
-                </a:solidFill>
-                <a:latin typeface="Aptos"/>
-                <a:ea typeface="Aptos"/>
-                <a:cs typeface="Aptos"/>
-              </a:defRPr>
-            </a:lvl8pPr>
-            <a:lvl9pPr algn="ctr">
-              <a:defRPr sz="1575" b="1">
-                <a:solidFill>
-                  <a:srgbClr val="071A33"/>
-                </a:solidFill>
-                <a:latin typeface="Aptos"/>
-                <a:ea typeface="Aptos"/>
-                <a:cs typeface="Aptos"/>
-              </a:defRPr>
-            </a:lvl9pPr>
-          </a:lstStyle>
-          <a:p>
-            <a:pPr algn="ctr">
-              <a:lnSpc>
-                <a:spcPct val="105000"/>
-              </a:lnSpc>
-              <a:buNone/>
-              <a:defRPr sz="1575" b="1">
-                <a:solidFill>
-                  <a:srgbClr val="071A33"/>
-                </a:solidFill>
-                <a:latin typeface="Aptos"/>
-                <a:ea typeface="Aptos"/>
-                <a:cs typeface="Aptos"/>
-              </a:defRPr>
-            </a:pPr>
-            <a:r>
-              <a:rPr sz="1575" b="1">
-                <a:solidFill>
-                  <a:srgbClr val="071A33"/>
-                </a:solidFill>
-                <a:latin typeface="Aptos"/>
-                <a:ea typeface="Aptos"/>
-                <a:cs typeface="Aptos"/>
-              </a:rPr>
-              <a:t>NewsAPI</a:t>
-            </a:r>
-          </a:p>
-        </p:txBody>
-      </p:sp>
-      <p:sp>
-        <p:nvSpPr>
-          <p:cNvPr id="8" name="Rectangle 7">
-            <a:extLst>
-              <a:ext uri="{FF2B5EF4-FFF2-40B4-BE49-F238E27FC236}">
-                <a16:creationId xmlns:a16="http://schemas.microsoft.com/office/drawing/2014/main" id="{C8420276-E43D-492F-93F5-1A084D034BD2}"/>
-              </a:ext>
-            </a:extLst>
-          </p:cNvPr>
-          <p:cNvSpPr>
-            <a:spLocks noGrp="1"/>
-          </p:cNvSpPr>
-          <p:nvPr/>
-        </p:nvSpPr>
-        <p:spPr>
-          <a:xfrm>
-            <a:off x="895350" y="3171825"/>
-            <a:ext cx="1314450" cy="190500"/>
-          </a:xfrm>
-          <a:prstGeom prst="rect">
-            <a:avLst/>
-          </a:prstGeom>
-          <a:noFill/>
-          <a:ln w="0">
-            <a:noFill/>
-            <a:prstDash val="solid"/>
-          </a:ln>
-        </p:spPr>
-        <p:txBody>
-          <a:bodyPr wrap="square" lIns="0" tIns="0" rIns="0" bIns="0" anchor="t">
-            <a:normAutofit/>
-          </a:bodyPr>
-          <a:lstStyle>
-            <a:defPPr algn="ctr">
-              <a:defRPr sz="1050" b="0">
-                <a:solidFill>
-                  <a:srgbClr val="53657A"/>
-                </a:solidFill>
-                <a:latin typeface="Aptos"/>
-                <a:ea typeface="Aptos"/>
-                <a:cs typeface="Aptos"/>
-              </a:defRPr>
-            </a:defPPr>
-            <a:lvl1pPr algn="ctr">
-              <a:defRPr sz="1050" b="0">
-                <a:solidFill>
-                  <a:srgbClr val="53657A"/>
-                </a:solidFill>
-                <a:latin typeface="Aptos"/>
-                <a:ea typeface="Aptos"/>
-                <a:cs typeface="Aptos"/>
-              </a:defRPr>
-            </a:lvl1pPr>
-            <a:lvl2pPr algn="ctr">
-              <a:defRPr sz="1050" b="0">
-                <a:solidFill>
-                  <a:srgbClr val="53657A"/>
-                </a:solidFill>
-                <a:latin typeface="Aptos"/>
-                <a:ea typeface="Aptos"/>
-                <a:cs typeface="Aptos"/>
-              </a:defRPr>
-            </a:lvl2pPr>
-            <a:lvl3pPr algn="ctr">
-              <a:defRPr sz="1050" b="0">
-                <a:solidFill>
-                  <a:srgbClr val="53657A"/>
-                </a:solidFill>
-                <a:latin typeface="Aptos"/>
-                <a:ea typeface="Aptos"/>
-                <a:cs typeface="Aptos"/>
-              </a:defRPr>
-            </a:lvl3pPr>
-            <a:lvl4pPr algn="ctr">
-              <a:defRPr sz="1050" b="0">
-                <a:solidFill>
-                  <a:srgbClr val="53657A"/>
-                </a:solidFill>
-                <a:latin typeface="Aptos"/>
-                <a:ea typeface="Aptos"/>
-                <a:cs typeface="Aptos"/>
-              </a:defRPr>
-            </a:lvl4pPr>
-            <a:lvl5pPr algn="ctr">
-              <a:defRPr sz="1050" b="0">
-                <a:solidFill>
-                  <a:srgbClr val="53657A"/>
-                </a:solidFill>
-                <a:latin typeface="Aptos"/>
-                <a:ea typeface="Aptos"/>
-                <a:cs typeface="Aptos"/>
-              </a:defRPr>
-            </a:lvl5pPr>
-            <a:lvl6pPr algn="ctr">
-              <a:defRPr sz="1050" b="0">
-                <a:solidFill>
-                  <a:srgbClr val="53657A"/>
-                </a:solidFill>
-                <a:latin typeface="Aptos"/>
-                <a:ea typeface="Aptos"/>
-                <a:cs typeface="Aptos"/>
-              </a:defRPr>
-            </a:lvl6pPr>
-            <a:lvl7pPr algn="ctr">
-              <a:defRPr sz="1050" b="0">
-                <a:solidFill>
-                  <a:srgbClr val="53657A"/>
-                </a:solidFill>
-                <a:latin typeface="Aptos"/>
-                <a:ea typeface="Aptos"/>
-                <a:cs typeface="Aptos"/>
-              </a:defRPr>
-            </a:lvl7pPr>
-            <a:lvl8pPr algn="ctr">
-              <a:defRPr sz="1050" b="0">
-                <a:solidFill>
-                  <a:srgbClr val="53657A"/>
-                </a:solidFill>
-                <a:latin typeface="Aptos"/>
-                <a:ea typeface="Aptos"/>
-                <a:cs typeface="Aptos"/>
-              </a:defRPr>
-            </a:lvl8pPr>
-            <a:lvl9pPr algn="ctr">
-              <a:defRPr sz="1050" b="0">
-                <a:solidFill>
-                  <a:srgbClr val="53657A"/>
-                </a:solidFill>
-                <a:latin typeface="Aptos"/>
-                <a:ea typeface="Aptos"/>
-                <a:cs typeface="Aptos"/>
-              </a:defRPr>
-            </a:lvl9pPr>
-          </a:lstStyle>
-          <a:p>
-            <a:pPr algn="ctr">
-              <a:lnSpc>
-                <a:spcPct val="105000"/>
-              </a:lnSpc>
-              <a:buNone/>
-              <a:defRPr sz="1050" b="0">
-                <a:solidFill>
-                  <a:srgbClr val="53657A"/>
-                </a:solidFill>
-                <a:latin typeface="Aptos"/>
-                <a:ea typeface="Aptos"/>
-                <a:cs typeface="Aptos"/>
-              </a:defRPr>
-            </a:pPr>
-            <a:r>
-              <a:rPr sz="1050" b="0">
-                <a:solidFill>
-                  <a:srgbClr val="53657A"/>
-                </a:solidFill>
-                <a:latin typeface="Aptos"/>
-                <a:ea typeface="Aptos"/>
-                <a:cs typeface="Aptos"/>
-              </a:rPr>
-              <a:t>Live company news</a:t>
-            </a:r>
-          </a:p>
-        </p:txBody>
-      </p:sp>
-      <p:sp>
-        <p:nvSpPr>
-          <p:cNvPr id="9" name="Rectangle 8">
-            <a:extLst>
-              <a:ext uri="{FF2B5EF4-FFF2-40B4-BE49-F238E27FC236}">
-                <a16:creationId xmlns:a16="http://schemas.microsoft.com/office/drawing/2014/main" id="{AB192677-AC8A-4C55-A5F7-7228A187A1BF}"/>
-              </a:ext>
-            </a:extLst>
-          </p:cNvPr>
-          <p:cNvSpPr>
-            <a:spLocks noGrp="1"/>
-          </p:cNvSpPr>
-          <p:nvPr/>
-        </p:nvSpPr>
-        <p:spPr>
-          <a:xfrm>
-            <a:off x="895350" y="4229100"/>
-            <a:ext cx="1314450" cy="228600"/>
-          </a:xfrm>
-          <a:prstGeom prst="rect">
-            <a:avLst/>
-          </a:prstGeom>
-          <a:noFill/>
-          <a:ln w="0">
-            <a:noFill/>
-            <a:prstDash val="solid"/>
-          </a:ln>
-        </p:spPr>
-        <p:txBody>
-          <a:bodyPr wrap="square" lIns="0" tIns="0" rIns="0" bIns="0" anchor="t">
-            <a:normAutofit fontScale="98203" lnSpcReduction="10000"/>
-          </a:bodyPr>
-          <a:lstStyle>
-            <a:defPPr algn="ctr">
-              <a:defRPr sz="1575" b="1">
-                <a:solidFill>
-                  <a:srgbClr val="071A33"/>
-                </a:solidFill>
-                <a:latin typeface="Aptos"/>
-                <a:ea typeface="Aptos"/>
-                <a:cs typeface="Aptos"/>
-              </a:defRPr>
-            </a:defPPr>
-            <a:lvl1pPr algn="ctr">
-              <a:defRPr sz="1575" b="1">
-                <a:solidFill>
-                  <a:srgbClr val="071A33"/>
-                </a:solidFill>
-                <a:latin typeface="Aptos"/>
-                <a:ea typeface="Aptos"/>
-                <a:cs typeface="Aptos"/>
-              </a:defRPr>
-            </a:lvl1pPr>
-            <a:lvl2pPr algn="ctr">
-              <a:defRPr sz="1575" b="1">
-                <a:solidFill>
-                  <a:srgbClr val="071A33"/>
-                </a:solidFill>
-                <a:latin typeface="Aptos"/>
-                <a:ea typeface="Aptos"/>
-                <a:cs typeface="Aptos"/>
-              </a:defRPr>
-            </a:lvl2pPr>
-            <a:lvl3pPr algn="ctr">
-              <a:defRPr sz="1575" b="1">
-                <a:solidFill>
-                  <a:srgbClr val="071A33"/>
-                </a:solidFill>
-                <a:latin typeface="Aptos"/>
-                <a:ea typeface="Aptos"/>
-                <a:cs typeface="Aptos"/>
-              </a:defRPr>
-            </a:lvl3pPr>
-            <a:lvl4pPr algn="ctr">
-              <a:defRPr sz="1575" b="1">
-                <a:solidFill>
-                  <a:srgbClr val="071A33"/>
-                </a:solidFill>
-                <a:latin typeface="Aptos"/>
-                <a:ea typeface="Aptos"/>
-                <a:cs typeface="Aptos"/>
-              </a:defRPr>
-            </a:lvl4pPr>
-            <a:lvl5pPr algn="ctr">
-              <a:defRPr sz="1575" b="1">
-                <a:solidFill>
-                  <a:srgbClr val="071A33"/>
-                </a:solidFill>
-                <a:latin typeface="Aptos"/>
-                <a:ea typeface="Aptos"/>
-                <a:cs typeface="Aptos"/>
-              </a:defRPr>
-            </a:lvl5pPr>
-            <a:lvl6pPr algn="ctr">
-              <a:defRPr sz="1575" b="1">
-                <a:solidFill>
-                  <a:srgbClr val="071A33"/>
-                </a:solidFill>
-                <a:latin typeface="Aptos"/>
-                <a:ea typeface="Aptos"/>
-                <a:cs typeface="Aptos"/>
-              </a:defRPr>
-            </a:lvl6pPr>
-            <a:lvl7pPr algn="ctr">
-              <a:defRPr sz="1575" b="1">
-                <a:solidFill>
-                  <a:srgbClr val="071A33"/>
-                </a:solidFill>
-                <a:latin typeface="Aptos"/>
-                <a:ea typeface="Aptos"/>
-                <a:cs typeface="Aptos"/>
-              </a:defRPr>
-            </a:lvl7pPr>
-            <a:lvl8pPr algn="ctr">
-              <a:defRPr sz="1575" b="1">
-                <a:solidFill>
-                  <a:srgbClr val="071A33"/>
-                </a:solidFill>
-                <a:latin typeface="Aptos"/>
-                <a:ea typeface="Aptos"/>
-                <a:cs typeface="Aptos"/>
-              </a:defRPr>
-            </a:lvl8pPr>
-            <a:lvl9pPr algn="ctr">
-              <a:defRPr sz="1575" b="1">
-                <a:solidFill>
-                  <a:srgbClr val="071A33"/>
-                </a:solidFill>
-                <a:latin typeface="Aptos"/>
-                <a:ea typeface="Aptos"/>
-                <a:cs typeface="Aptos"/>
-              </a:defRPr>
-            </a:lvl9pPr>
-          </a:lstStyle>
-          <a:p>
-            <a:pPr algn="ctr">
-              <a:lnSpc>
-                <a:spcPct val="105000"/>
-              </a:lnSpc>
-              <a:buNone/>
-              <a:defRPr sz="1575" b="1">
-                <a:solidFill>
-                  <a:srgbClr val="071A33"/>
-                </a:solidFill>
-                <a:latin typeface="Aptos"/>
-                <a:ea typeface="Aptos"/>
-                <a:cs typeface="Aptos"/>
-              </a:defRPr>
-            </a:pPr>
-            <a:r>
-              <a:rPr sz="1575" b="1">
-                <a:solidFill>
-                  <a:srgbClr val="071A33"/>
-                </a:solidFill>
-                <a:latin typeface="Aptos"/>
-                <a:ea typeface="Aptos"/>
-                <a:cs typeface="Aptos"/>
-              </a:rPr>
-              <a:t>Social CSV</a:t>
-            </a:r>
-          </a:p>
-        </p:txBody>
-      </p:sp>
-      <p:sp>
-        <p:nvSpPr>
-          <p:cNvPr id="10" name="Rectangle 9">
-            <a:extLst>
-              <a:ext uri="{FF2B5EF4-FFF2-40B4-BE49-F238E27FC236}">
-                <a16:creationId xmlns:a16="http://schemas.microsoft.com/office/drawing/2014/main" id="{E74C4268-08C9-4D5F-9FAA-48868C0E5FCB}"/>
-              </a:ext>
-            </a:extLst>
-          </p:cNvPr>
-          <p:cNvSpPr>
-            <a:spLocks noGrp="1"/>
-          </p:cNvSpPr>
-          <p:nvPr/>
-        </p:nvSpPr>
-        <p:spPr>
-          <a:xfrm>
-            <a:off x="895350" y="4543425"/>
-            <a:ext cx="1314450" cy="190500"/>
-          </a:xfrm>
-          <a:prstGeom prst="rect">
-            <a:avLst/>
-          </a:prstGeom>
-          <a:noFill/>
-          <a:ln w="0">
-            <a:noFill/>
-            <a:prstDash val="solid"/>
-          </a:ln>
-        </p:spPr>
-        <p:txBody>
-          <a:bodyPr wrap="square" lIns="0" tIns="0" rIns="0" bIns="0" anchor="t">
-            <a:normAutofit/>
-          </a:bodyPr>
-          <a:lstStyle>
-            <a:defPPr algn="ctr">
-              <a:defRPr sz="1050" b="0">
-                <a:solidFill>
-                  <a:srgbClr val="53657A"/>
-                </a:solidFill>
-                <a:latin typeface="Aptos"/>
-                <a:ea typeface="Aptos"/>
-                <a:cs typeface="Aptos"/>
-              </a:defRPr>
-            </a:defPPr>
-            <a:lvl1pPr algn="ctr">
-              <a:defRPr sz="1050" b="0">
-                <a:solidFill>
-                  <a:srgbClr val="53657A"/>
-                </a:solidFill>
-                <a:latin typeface="Aptos"/>
-                <a:ea typeface="Aptos"/>
-                <a:cs typeface="Aptos"/>
-              </a:defRPr>
-            </a:lvl1pPr>
-            <a:lvl2pPr algn="ctr">
-              <a:defRPr sz="1050" b="0">
-                <a:solidFill>
-                  <a:srgbClr val="53657A"/>
-                </a:solidFill>
-                <a:latin typeface="Aptos"/>
-                <a:ea typeface="Aptos"/>
-                <a:cs typeface="Aptos"/>
-              </a:defRPr>
-            </a:lvl2pPr>
-            <a:lvl3pPr algn="ctr">
-              <a:defRPr sz="1050" b="0">
-                <a:solidFill>
-                  <a:srgbClr val="53657A"/>
-                </a:solidFill>
-                <a:latin typeface="Aptos"/>
-                <a:ea typeface="Aptos"/>
-                <a:cs typeface="Aptos"/>
-              </a:defRPr>
-            </a:lvl3pPr>
-            <a:lvl4pPr algn="ctr">
-              <a:defRPr sz="1050" b="0">
-                <a:solidFill>
-                  <a:srgbClr val="53657A"/>
-                </a:solidFill>
-                <a:latin typeface="Aptos"/>
-                <a:ea typeface="Aptos"/>
-                <a:cs typeface="Aptos"/>
-              </a:defRPr>
-            </a:lvl4pPr>
-            <a:lvl5pPr algn="ctr">
-              <a:defRPr sz="1050" b="0">
-                <a:solidFill>
-                  <a:srgbClr val="53657A"/>
-                </a:solidFill>
-                <a:latin typeface="Aptos"/>
-                <a:ea typeface="Aptos"/>
-                <a:cs typeface="Aptos"/>
-              </a:defRPr>
-            </a:lvl5pPr>
-            <a:lvl6pPr algn="ctr">
-              <a:defRPr sz="1050" b="0">
-                <a:solidFill>
-                  <a:srgbClr val="53657A"/>
-                </a:solidFill>
-                <a:latin typeface="Aptos"/>
-                <a:ea typeface="Aptos"/>
-                <a:cs typeface="Aptos"/>
-              </a:defRPr>
-            </a:lvl6pPr>
-            <a:lvl7pPr algn="ctr">
-              <a:defRPr sz="1050" b="0">
-                <a:solidFill>
-                  <a:srgbClr val="53657A"/>
-                </a:solidFill>
-                <a:latin typeface="Aptos"/>
-                <a:ea typeface="Aptos"/>
-                <a:cs typeface="Aptos"/>
-              </a:defRPr>
-            </a:lvl7pPr>
-            <a:lvl8pPr algn="ctr">
-              <a:defRPr sz="1050" b="0">
-                <a:solidFill>
-                  <a:srgbClr val="53657A"/>
-                </a:solidFill>
-                <a:latin typeface="Aptos"/>
-                <a:ea typeface="Aptos"/>
-                <a:cs typeface="Aptos"/>
-              </a:defRPr>
-            </a:lvl8pPr>
-            <a:lvl9pPr algn="ctr">
-              <a:defRPr sz="1050" b="0">
-                <a:solidFill>
-                  <a:srgbClr val="53657A"/>
-                </a:solidFill>
-                <a:latin typeface="Aptos"/>
-                <a:ea typeface="Aptos"/>
-                <a:cs typeface="Aptos"/>
-              </a:defRPr>
-            </a:lvl9pPr>
-          </a:lstStyle>
-          <a:p>
-            <a:pPr algn="ctr">
-              <a:lnSpc>
-                <a:spcPct val="105000"/>
-              </a:lnSpc>
-              <a:buNone/>
-              <a:defRPr sz="1050" b="0">
-                <a:solidFill>
-                  <a:srgbClr val="53657A"/>
-                </a:solidFill>
-                <a:latin typeface="Aptos"/>
-                <a:ea typeface="Aptos"/>
-                <a:cs typeface="Aptos"/>
-              </a:defRPr>
-            </a:pPr>
-            <a:r>
-              <a:rPr sz="1050" b="0">
-                <a:solidFill>
-                  <a:srgbClr val="53657A"/>
-                </a:solidFill>
-                <a:latin typeface="Aptos"/>
-                <a:ea typeface="Aptos"/>
-                <a:cs typeface="Aptos"/>
-              </a:rPr>
-              <a:t>Scenario posts</a:t>
-            </a:r>
-          </a:p>
-        </p:txBody>
-      </p:sp>
-      <p:sp>
-        <p:nvSpPr>
-          <p:cNvPr id="11" name="ingestion">
-            <a:extLst>
-              <a:ext uri="{FF2B5EF4-FFF2-40B4-BE49-F238E27FC236}">
-                <a16:creationId xmlns:a16="http://schemas.microsoft.com/office/drawing/2014/main" id="{C7FDA61A-FD1E-4CC4-8BF9-D3E363DD8496}"/>
-              </a:ext>
-            </a:extLst>
-          </p:cNvPr>
-          <p:cNvSpPr>
-            <a:spLocks noGrp="1"/>
-          </p:cNvSpPr>
-          <p:nvPr/>
-        </p:nvSpPr>
-        <p:spPr>
-          <a:xfrm>
-            <a:off x="3105150" y="3333750"/>
-            <a:ext cx="1619250" cy="971550"/>
-          </a:xfrm>
-          <a:prstGeom prst="roundRect">
-            <a:avLst>
-              <a:gd name="adj" fmla="val 13725"/>
-            </a:avLst>
-          </a:prstGeom>
-          <a:solidFill>
-            <a:srgbClr val="DDF6F8"/>
-          </a:solidFill>
-          <a:ln w="9525">
-            <a:solidFill>
-              <a:srgbClr val="A7DFE6"/>
-            </a:solidFill>
-            <a:prstDash val="solid"/>
-          </a:ln>
-        </p:spPr>
-        <p:txBody>
-          <a:bodyPr/>
-          <a:lstStyle/>
-          <a:p>
-            <a:endParaRPr lang="en-IN"/>
-          </a:p>
-        </p:txBody>
-      </p:sp>
-      <p:sp>
-        <p:nvSpPr>
-          <p:cNvPr id="12" name="Rectangle 11">
-            <a:extLst>
-              <a:ext uri="{FF2B5EF4-FFF2-40B4-BE49-F238E27FC236}">
-                <a16:creationId xmlns:a16="http://schemas.microsoft.com/office/drawing/2014/main" id="{DEBF6E2E-1CED-4022-9D1F-3D764A103A26}"/>
-              </a:ext>
-            </a:extLst>
-          </p:cNvPr>
-          <p:cNvSpPr>
-            <a:spLocks noGrp="1"/>
-          </p:cNvSpPr>
-          <p:nvPr/>
-        </p:nvSpPr>
-        <p:spPr>
-          <a:xfrm>
-            <a:off x="3276600" y="3552825"/>
-            <a:ext cx="1276350" cy="228600"/>
-          </a:xfrm>
-          <a:prstGeom prst="rect">
-            <a:avLst/>
-          </a:prstGeom>
-          <a:noFill/>
-          <a:ln w="0">
-            <a:noFill/>
-            <a:prstDash val="solid"/>
-          </a:ln>
-        </p:spPr>
-        <p:txBody>
-          <a:bodyPr wrap="square" lIns="0" tIns="0" rIns="0" bIns="0" anchor="t">
-            <a:normAutofit/>
-          </a:bodyPr>
-          <a:lstStyle>
-            <a:defPPr algn="ctr">
-              <a:defRPr sz="1425" b="1">
-                <a:solidFill>
-                  <a:srgbClr val="071A33"/>
-                </a:solidFill>
-                <a:latin typeface="Aptos"/>
-                <a:ea typeface="Aptos"/>
-                <a:cs typeface="Aptos"/>
-              </a:defRPr>
-            </a:defPPr>
-            <a:lvl1pPr algn="ctr">
-              <a:defRPr sz="1425" b="1">
-                <a:solidFill>
-                  <a:srgbClr val="071A33"/>
-                </a:solidFill>
-                <a:latin typeface="Aptos"/>
-                <a:ea typeface="Aptos"/>
-                <a:cs typeface="Aptos"/>
-              </a:defRPr>
-            </a:lvl1pPr>
-            <a:lvl2pPr algn="ctr">
-              <a:defRPr sz="1425" b="1">
-                <a:solidFill>
-                  <a:srgbClr val="071A33"/>
-                </a:solidFill>
-                <a:latin typeface="Aptos"/>
-                <a:ea typeface="Aptos"/>
-                <a:cs typeface="Aptos"/>
-              </a:defRPr>
-            </a:lvl2pPr>
-            <a:lvl3pPr algn="ctr">
-              <a:defRPr sz="1425" b="1">
-                <a:solidFill>
-                  <a:srgbClr val="071A33"/>
-                </a:solidFill>
-                <a:latin typeface="Aptos"/>
-                <a:ea typeface="Aptos"/>
-                <a:cs typeface="Aptos"/>
-              </a:defRPr>
-            </a:lvl3pPr>
-            <a:lvl4pPr algn="ctr">
-              <a:defRPr sz="1425" b="1">
-                <a:solidFill>
-                  <a:srgbClr val="071A33"/>
-                </a:solidFill>
-                <a:latin typeface="Aptos"/>
-                <a:ea typeface="Aptos"/>
-                <a:cs typeface="Aptos"/>
-              </a:defRPr>
-            </a:lvl4pPr>
-            <a:lvl5pPr algn="ctr">
-              <a:defRPr sz="1425" b="1">
-                <a:solidFill>
-                  <a:srgbClr val="071A33"/>
-                </a:solidFill>
-                <a:latin typeface="Aptos"/>
-                <a:ea typeface="Aptos"/>
-                <a:cs typeface="Aptos"/>
-              </a:defRPr>
-            </a:lvl5pPr>
-            <a:lvl6pPr algn="ctr">
-              <a:defRPr sz="1425" b="1">
-                <a:solidFill>
-                  <a:srgbClr val="071A33"/>
-                </a:solidFill>
-                <a:latin typeface="Aptos"/>
-                <a:ea typeface="Aptos"/>
-                <a:cs typeface="Aptos"/>
-              </a:defRPr>
-            </a:lvl6pPr>
-            <a:lvl7pPr algn="ctr">
-              <a:defRPr sz="1425" b="1">
-                <a:solidFill>
-                  <a:srgbClr val="071A33"/>
-                </a:solidFill>
-                <a:latin typeface="Aptos"/>
-                <a:ea typeface="Aptos"/>
-                <a:cs typeface="Aptos"/>
-              </a:defRPr>
-            </a:lvl7pPr>
-            <a:lvl8pPr algn="ctr">
-              <a:defRPr sz="1425" b="1">
-                <a:solidFill>
-                  <a:srgbClr val="071A33"/>
-                </a:solidFill>
-                <a:latin typeface="Aptos"/>
-                <a:ea typeface="Aptos"/>
-                <a:cs typeface="Aptos"/>
-              </a:defRPr>
-            </a:lvl8pPr>
-            <a:lvl9pPr algn="ctr">
-              <a:defRPr sz="1425" b="1">
-                <a:solidFill>
-                  <a:srgbClr val="071A33"/>
-                </a:solidFill>
-                <a:latin typeface="Aptos"/>
-                <a:ea typeface="Aptos"/>
-                <a:cs typeface="Aptos"/>
-              </a:defRPr>
-            </a:lvl9pPr>
-          </a:lstStyle>
-          <a:p>
-            <a:pPr algn="ctr">
-              <a:lnSpc>
-                <a:spcPct val="105000"/>
-              </a:lnSpc>
-              <a:buNone/>
-              <a:defRPr sz="1425" b="1">
-                <a:solidFill>
-                  <a:srgbClr val="071A33"/>
-                </a:solidFill>
-                <a:latin typeface="Aptos"/>
-                <a:ea typeface="Aptos"/>
-                <a:cs typeface="Aptos"/>
-              </a:defRPr>
-            </a:pPr>
-            <a:r>
-              <a:rPr sz="1425" b="1">
-                <a:solidFill>
-                  <a:srgbClr val="071A33"/>
-                </a:solidFill>
-                <a:latin typeface="Aptos"/>
-                <a:ea typeface="Aptos"/>
-                <a:cs typeface="Aptos"/>
-              </a:rPr>
-              <a:t>Ingestion layer</a:t>
-            </a:r>
-          </a:p>
-        </p:txBody>
-      </p:sp>
-      <p:sp>
-        <p:nvSpPr>
-          <p:cNvPr id="13" name="Rectangle 12">
-            <a:extLst>
-              <a:ext uri="{FF2B5EF4-FFF2-40B4-BE49-F238E27FC236}">
-                <a16:creationId xmlns:a16="http://schemas.microsoft.com/office/drawing/2014/main" id="{ED4C7D66-733A-424C-85CB-BA6F73AE3BE5}"/>
-              </a:ext>
-            </a:extLst>
-          </p:cNvPr>
-          <p:cNvSpPr>
-            <a:spLocks noGrp="1"/>
-          </p:cNvSpPr>
-          <p:nvPr/>
-        </p:nvSpPr>
-        <p:spPr>
-          <a:xfrm>
-            <a:off x="3276600" y="3876675"/>
-            <a:ext cx="1276350" cy="381000"/>
-          </a:xfrm>
-          <a:prstGeom prst="rect">
-            <a:avLst/>
-          </a:prstGeom>
-          <a:noFill/>
-          <a:ln w="0">
-            <a:noFill/>
-            <a:prstDash val="solid"/>
-          </a:ln>
-        </p:spPr>
-        <p:txBody>
-          <a:bodyPr wrap="square" lIns="0" tIns="0" rIns="0" bIns="0" anchor="t">
-            <a:normAutofit/>
-          </a:bodyPr>
-          <a:lstStyle>
-            <a:defPPr algn="ctr">
-              <a:defRPr sz="1050" b="0">
-                <a:solidFill>
-                  <a:srgbClr val="53657A"/>
-                </a:solidFill>
-                <a:latin typeface="Aptos"/>
-                <a:ea typeface="Aptos"/>
-                <a:cs typeface="Aptos"/>
-              </a:defRPr>
-            </a:defPPr>
-            <a:lvl1pPr algn="ctr">
-              <a:defRPr sz="1050" b="0">
-                <a:solidFill>
-                  <a:srgbClr val="53657A"/>
-                </a:solidFill>
-                <a:latin typeface="Aptos"/>
-                <a:ea typeface="Aptos"/>
-                <a:cs typeface="Aptos"/>
-              </a:defRPr>
-            </a:lvl1pPr>
-            <a:lvl2pPr algn="ctr">
-              <a:defRPr sz="1050" b="0">
-                <a:solidFill>
-                  <a:srgbClr val="53657A"/>
-                </a:solidFill>
-                <a:latin typeface="Aptos"/>
-                <a:ea typeface="Aptos"/>
-                <a:cs typeface="Aptos"/>
-              </a:defRPr>
-            </a:lvl2pPr>
-            <a:lvl3pPr algn="ctr">
-              <a:defRPr sz="1050" b="0">
-                <a:solidFill>
-                  <a:srgbClr val="53657A"/>
-                </a:solidFill>
-                <a:latin typeface="Aptos"/>
-                <a:ea typeface="Aptos"/>
-                <a:cs typeface="Aptos"/>
-              </a:defRPr>
-            </a:lvl3pPr>
-            <a:lvl4pPr algn="ctr">
-              <a:defRPr sz="1050" b="0">
-                <a:solidFill>
-                  <a:srgbClr val="53657A"/>
-                </a:solidFill>
-                <a:latin typeface="Aptos"/>
-                <a:ea typeface="Aptos"/>
-                <a:cs typeface="Aptos"/>
-              </a:defRPr>
-            </a:lvl4pPr>
-            <a:lvl5pPr algn="ctr">
-              <a:defRPr sz="1050" b="0">
-                <a:solidFill>
-                  <a:srgbClr val="53657A"/>
-                </a:solidFill>
-                <a:latin typeface="Aptos"/>
-                <a:ea typeface="Aptos"/>
-                <a:cs typeface="Aptos"/>
-              </a:defRPr>
-            </a:lvl5pPr>
-            <a:lvl6pPr algn="ctr">
-              <a:defRPr sz="1050" b="0">
-                <a:solidFill>
-                  <a:srgbClr val="53657A"/>
-                </a:solidFill>
-                <a:latin typeface="Aptos"/>
-                <a:ea typeface="Aptos"/>
-                <a:cs typeface="Aptos"/>
-              </a:defRPr>
-            </a:lvl6pPr>
-            <a:lvl7pPr algn="ctr">
-              <a:defRPr sz="1050" b="0">
-                <a:solidFill>
-                  <a:srgbClr val="53657A"/>
-                </a:solidFill>
-                <a:latin typeface="Aptos"/>
-                <a:ea typeface="Aptos"/>
-                <a:cs typeface="Aptos"/>
-              </a:defRPr>
-            </a:lvl7pPr>
-            <a:lvl8pPr algn="ctr">
-              <a:defRPr sz="1050" b="0">
-                <a:solidFill>
-                  <a:srgbClr val="53657A"/>
-                </a:solidFill>
-                <a:latin typeface="Aptos"/>
-                <a:ea typeface="Aptos"/>
-                <a:cs typeface="Aptos"/>
-              </a:defRPr>
-            </a:lvl8pPr>
-            <a:lvl9pPr algn="ctr">
-              <a:defRPr sz="1050" b="0">
-                <a:solidFill>
-                  <a:srgbClr val="53657A"/>
-                </a:solidFill>
-                <a:latin typeface="Aptos"/>
-                <a:ea typeface="Aptos"/>
-                <a:cs typeface="Aptos"/>
-              </a:defRPr>
-            </a:lvl9pPr>
-          </a:lstStyle>
-          <a:p>
-            <a:pPr algn="ctr">
-              <a:lnSpc>
-                <a:spcPct val="105000"/>
-              </a:lnSpc>
-              <a:buNone/>
-              <a:defRPr sz="1050" b="0">
-                <a:solidFill>
-                  <a:srgbClr val="53657A"/>
-                </a:solidFill>
-                <a:latin typeface="Aptos"/>
-                <a:ea typeface="Aptos"/>
-                <a:cs typeface="Aptos"/>
-              </a:defRPr>
-            </a:pPr>
-            <a:r>
-              <a:rPr sz="1050" b="0">
-                <a:solidFill>
-                  <a:srgbClr val="53657A"/>
-                </a:solidFill>
-                <a:latin typeface="Aptos"/>
-                <a:ea typeface="Aptos"/>
-                <a:cs typeface="Aptos"/>
-              </a:rPr>
-              <a:t>Filter seen news</a:t>
-            </a:r>
-          </a:p>
-          <a:p>
-            <a:pPr algn="ctr">
-              <a:lnSpc>
-                <a:spcPct val="105000"/>
-              </a:lnSpc>
-              <a:buNone/>
-              <a:defRPr sz="1050" b="0">
-                <a:solidFill>
-                  <a:srgbClr val="53657A"/>
-                </a:solidFill>
-                <a:latin typeface="Aptos"/>
-                <a:ea typeface="Aptos"/>
-                <a:cs typeface="Aptos"/>
-              </a:defRPr>
-            </a:pPr>
-            <a:r>
-              <a:rPr sz="1050" b="0">
-                <a:solidFill>
-                  <a:srgbClr val="53657A"/>
-                </a:solidFill>
-                <a:latin typeface="Aptos"/>
-                <a:ea typeface="Aptos"/>
-                <a:cs typeface="Aptos"/>
-              </a:rPr>
-              <a:t>Read social posts</a:t>
-            </a:r>
-          </a:p>
-        </p:txBody>
-      </p:sp>
-      <p:sp>
-        <p:nvSpPr>
-          <p:cNvPr id="14" name="finbert">
-            <a:extLst>
-              <a:ext uri="{FF2B5EF4-FFF2-40B4-BE49-F238E27FC236}">
-                <a16:creationId xmlns:a16="http://schemas.microsoft.com/office/drawing/2014/main" id="{D528595C-075D-4841-8277-79CD6137C87B}"/>
-              </a:ext>
-            </a:extLst>
-          </p:cNvPr>
-          <p:cNvSpPr>
-            <a:spLocks noGrp="1"/>
-          </p:cNvSpPr>
-          <p:nvPr/>
-        </p:nvSpPr>
-        <p:spPr>
-          <a:xfrm>
-            <a:off x="5391150" y="2533650"/>
-            <a:ext cx="1657350" cy="952500"/>
-          </a:xfrm>
-          <a:prstGeom prst="roundRect">
-            <a:avLst>
-              <a:gd name="adj" fmla="val 14000"/>
-            </a:avLst>
-          </a:prstGeom>
-          <a:solidFill>
-            <a:srgbClr val="FFFFFF"/>
-          </a:solidFill>
-          <a:ln w="9525">
-            <a:solidFill>
-              <a:srgbClr val="C9D5E4"/>
-            </a:solidFill>
-            <a:prstDash val="solid"/>
-          </a:ln>
-        </p:spPr>
-        <p:txBody>
-          <a:bodyPr/>
-          <a:lstStyle/>
-          <a:p>
-            <a:endParaRPr lang="en-IN"/>
-          </a:p>
-        </p:txBody>
-      </p:sp>
-      <p:sp>
-        <p:nvSpPr>
-          <p:cNvPr id="15" name="event">
-            <a:extLst>
-              <a:ext uri="{FF2B5EF4-FFF2-40B4-BE49-F238E27FC236}">
-                <a16:creationId xmlns:a16="http://schemas.microsoft.com/office/drawing/2014/main" id="{0FFAE5ED-2B15-4F5E-8FC2-F8B31026579D}"/>
-              </a:ext>
-            </a:extLst>
-          </p:cNvPr>
-          <p:cNvSpPr>
-            <a:spLocks noGrp="1"/>
-          </p:cNvSpPr>
-          <p:nvPr/>
-        </p:nvSpPr>
-        <p:spPr>
-          <a:xfrm>
-            <a:off x="5391150" y="4114800"/>
-            <a:ext cx="1657350" cy="952500"/>
-          </a:xfrm>
-          <a:prstGeom prst="roundRect">
-            <a:avLst>
-              <a:gd name="adj" fmla="val 14000"/>
-            </a:avLst>
-          </a:prstGeom>
-          <a:solidFill>
-            <a:srgbClr val="FFFFFF"/>
-          </a:solidFill>
-          <a:ln w="9525">
-            <a:solidFill>
-              <a:srgbClr val="C9D5E4"/>
-            </a:solidFill>
-            <a:prstDash val="solid"/>
-          </a:ln>
-        </p:spPr>
-        <p:txBody>
-          <a:bodyPr/>
-          <a:lstStyle/>
-          <a:p>
-            <a:endParaRPr lang="en-IN"/>
-          </a:p>
-        </p:txBody>
-      </p:sp>
-      <p:sp>
-        <p:nvSpPr>
-          <p:cNvPr id="16" name="Rectangle 15">
-            <a:extLst>
-              <a:ext uri="{FF2B5EF4-FFF2-40B4-BE49-F238E27FC236}">
-                <a16:creationId xmlns:a16="http://schemas.microsoft.com/office/drawing/2014/main" id="{0970F051-C054-4C71-BDA8-73F645E7C7E2}"/>
-              </a:ext>
-            </a:extLst>
-          </p:cNvPr>
-          <p:cNvSpPr>
-            <a:spLocks noGrp="1"/>
-          </p:cNvSpPr>
-          <p:nvPr/>
-        </p:nvSpPr>
-        <p:spPr>
-          <a:xfrm>
-            <a:off x="5581650" y="2762250"/>
-            <a:ext cx="1276350" cy="228600"/>
-          </a:xfrm>
-          <a:prstGeom prst="rect">
-            <a:avLst/>
-          </a:prstGeom>
-          <a:noFill/>
-          <a:ln w="0">
-            <a:noFill/>
-            <a:prstDash val="solid"/>
-          </a:ln>
-        </p:spPr>
-        <p:txBody>
-          <a:bodyPr wrap="square" lIns="0" tIns="0" rIns="0" bIns="0" anchor="t">
-            <a:normAutofit fontScale="95238"/>
-          </a:bodyPr>
-          <a:lstStyle>
-            <a:defPPr algn="ctr">
-              <a:defRPr sz="1500" b="1">
-                <a:solidFill>
-                  <a:srgbClr val="071A33"/>
-                </a:solidFill>
-                <a:latin typeface="Aptos"/>
-                <a:ea typeface="Aptos"/>
-                <a:cs typeface="Aptos"/>
-              </a:defRPr>
-            </a:defPPr>
-            <a:lvl1pPr algn="ctr">
-              <a:defRPr sz="1500" b="1">
-                <a:solidFill>
-                  <a:srgbClr val="071A33"/>
-                </a:solidFill>
-                <a:latin typeface="Aptos"/>
-                <a:ea typeface="Aptos"/>
-                <a:cs typeface="Aptos"/>
-              </a:defRPr>
-            </a:lvl1pPr>
-            <a:lvl2pPr algn="ctr">
-              <a:defRPr sz="1500" b="1">
-                <a:solidFill>
-                  <a:srgbClr val="071A33"/>
-                </a:solidFill>
-                <a:latin typeface="Aptos"/>
-                <a:ea typeface="Aptos"/>
-                <a:cs typeface="Aptos"/>
-              </a:defRPr>
-            </a:lvl2pPr>
-            <a:lvl3pPr algn="ctr">
-              <a:defRPr sz="1500" b="1">
-                <a:solidFill>
-                  <a:srgbClr val="071A33"/>
-                </a:solidFill>
-                <a:latin typeface="Aptos"/>
-                <a:ea typeface="Aptos"/>
-                <a:cs typeface="Aptos"/>
-              </a:defRPr>
-            </a:lvl3pPr>
-            <a:lvl4pPr algn="ctr">
-              <a:defRPr sz="1500" b="1">
-                <a:solidFill>
-                  <a:srgbClr val="071A33"/>
-                </a:solidFill>
-                <a:latin typeface="Aptos"/>
-                <a:ea typeface="Aptos"/>
-                <a:cs typeface="Aptos"/>
-              </a:defRPr>
-            </a:lvl4pPr>
-            <a:lvl5pPr algn="ctr">
-              <a:defRPr sz="1500" b="1">
-                <a:solidFill>
-                  <a:srgbClr val="071A33"/>
-                </a:solidFill>
-                <a:latin typeface="Aptos"/>
-                <a:ea typeface="Aptos"/>
-                <a:cs typeface="Aptos"/>
-              </a:defRPr>
-            </a:lvl5pPr>
-            <a:lvl6pPr algn="ctr">
-              <a:defRPr sz="1500" b="1">
-                <a:solidFill>
-                  <a:srgbClr val="071A33"/>
-                </a:solidFill>
-                <a:latin typeface="Aptos"/>
-                <a:ea typeface="Aptos"/>
-                <a:cs typeface="Aptos"/>
-              </a:defRPr>
-            </a:lvl6pPr>
-            <a:lvl7pPr algn="ctr">
-              <a:defRPr sz="1500" b="1">
-                <a:solidFill>
-                  <a:srgbClr val="071A33"/>
-                </a:solidFill>
-                <a:latin typeface="Aptos"/>
-                <a:ea typeface="Aptos"/>
-                <a:cs typeface="Aptos"/>
-              </a:defRPr>
-            </a:lvl7pPr>
-            <a:lvl8pPr algn="ctr">
-              <a:defRPr sz="1500" b="1">
-                <a:solidFill>
-                  <a:srgbClr val="071A33"/>
-                </a:solidFill>
-                <a:latin typeface="Aptos"/>
-                <a:ea typeface="Aptos"/>
-                <a:cs typeface="Aptos"/>
-              </a:defRPr>
-            </a:lvl8pPr>
-            <a:lvl9pPr algn="ctr">
-              <a:defRPr sz="1500" b="1">
-                <a:solidFill>
-                  <a:srgbClr val="071A33"/>
-                </a:solidFill>
-                <a:latin typeface="Aptos"/>
-                <a:ea typeface="Aptos"/>
-                <a:cs typeface="Aptos"/>
-              </a:defRPr>
-            </a:lvl9pPr>
-          </a:lstStyle>
-          <a:p>
-            <a:pPr algn="ctr">
-              <a:lnSpc>
-                <a:spcPct val="105000"/>
-              </a:lnSpc>
-              <a:buNone/>
-              <a:defRPr sz="1500" b="1">
-                <a:solidFill>
-                  <a:srgbClr val="071A33"/>
-                </a:solidFill>
-                <a:latin typeface="Aptos"/>
-                <a:ea typeface="Aptos"/>
-                <a:cs typeface="Aptos"/>
-              </a:defRPr>
-            </a:pPr>
-            <a:r>
-              <a:rPr sz="1500" b="1">
-                <a:solidFill>
-                  <a:srgbClr val="071A33"/>
-                </a:solidFill>
-                <a:latin typeface="Aptos"/>
-                <a:ea typeface="Aptos"/>
-                <a:cs typeface="Aptos"/>
-              </a:rPr>
-              <a:t>FinBERT</a:t>
-            </a:r>
-          </a:p>
-        </p:txBody>
-      </p:sp>
-      <p:sp>
-        <p:nvSpPr>
-          <p:cNvPr id="17" name="Rectangle 16">
-            <a:extLst>
-              <a:ext uri="{FF2B5EF4-FFF2-40B4-BE49-F238E27FC236}">
-                <a16:creationId xmlns:a16="http://schemas.microsoft.com/office/drawing/2014/main" id="{3F3C8565-62F4-46AB-B2B8-71AC3AA69093}"/>
-              </a:ext>
-            </a:extLst>
-          </p:cNvPr>
-          <p:cNvSpPr>
-            <a:spLocks noGrp="1"/>
-          </p:cNvSpPr>
-          <p:nvPr/>
-        </p:nvSpPr>
-        <p:spPr>
-          <a:xfrm>
-            <a:off x="5581650" y="3076575"/>
-            <a:ext cx="1276350" cy="361950"/>
-          </a:xfrm>
-          <a:prstGeom prst="rect">
-            <a:avLst/>
-          </a:prstGeom>
-          <a:noFill/>
-          <a:ln w="0">
-            <a:noFill/>
-            <a:prstDash val="solid"/>
-          </a:ln>
-        </p:spPr>
-        <p:txBody>
-          <a:bodyPr wrap="square" lIns="0" tIns="0" rIns="0" bIns="0" anchor="t">
-            <a:normAutofit/>
-          </a:bodyPr>
-          <a:lstStyle>
-            <a:defPPr algn="ctr">
-              <a:defRPr sz="1050" b="0">
-                <a:solidFill>
-                  <a:srgbClr val="53657A"/>
-                </a:solidFill>
-                <a:latin typeface="Aptos"/>
-                <a:ea typeface="Aptos"/>
-                <a:cs typeface="Aptos"/>
-              </a:defRPr>
-            </a:defPPr>
-            <a:lvl1pPr algn="ctr">
-              <a:defRPr sz="1050" b="0">
-                <a:solidFill>
-                  <a:srgbClr val="53657A"/>
-                </a:solidFill>
-                <a:latin typeface="Aptos"/>
-                <a:ea typeface="Aptos"/>
-                <a:cs typeface="Aptos"/>
-              </a:defRPr>
-            </a:lvl1pPr>
-            <a:lvl2pPr algn="ctr">
-              <a:defRPr sz="1050" b="0">
-                <a:solidFill>
-                  <a:srgbClr val="53657A"/>
-                </a:solidFill>
-                <a:latin typeface="Aptos"/>
-                <a:ea typeface="Aptos"/>
-                <a:cs typeface="Aptos"/>
-              </a:defRPr>
-            </a:lvl2pPr>
-            <a:lvl3pPr algn="ctr">
-              <a:defRPr sz="1050" b="0">
-                <a:solidFill>
-                  <a:srgbClr val="53657A"/>
-                </a:solidFill>
-                <a:latin typeface="Aptos"/>
-                <a:ea typeface="Aptos"/>
-                <a:cs typeface="Aptos"/>
-              </a:defRPr>
-            </a:lvl3pPr>
-            <a:lvl4pPr algn="ctr">
-              <a:defRPr sz="1050" b="0">
-                <a:solidFill>
-                  <a:srgbClr val="53657A"/>
-                </a:solidFill>
-                <a:latin typeface="Aptos"/>
-                <a:ea typeface="Aptos"/>
-                <a:cs typeface="Aptos"/>
-              </a:defRPr>
-            </a:lvl4pPr>
-            <a:lvl5pPr algn="ctr">
-              <a:defRPr sz="1050" b="0">
-                <a:solidFill>
-                  <a:srgbClr val="53657A"/>
-                </a:solidFill>
-                <a:latin typeface="Aptos"/>
-                <a:ea typeface="Aptos"/>
-                <a:cs typeface="Aptos"/>
-              </a:defRPr>
-            </a:lvl5pPr>
-            <a:lvl6pPr algn="ctr">
-              <a:defRPr sz="1050" b="0">
-                <a:solidFill>
-                  <a:srgbClr val="53657A"/>
-                </a:solidFill>
-                <a:latin typeface="Aptos"/>
-                <a:ea typeface="Aptos"/>
-                <a:cs typeface="Aptos"/>
-              </a:defRPr>
-            </a:lvl6pPr>
-            <a:lvl7pPr algn="ctr">
-              <a:defRPr sz="1050" b="0">
-                <a:solidFill>
-                  <a:srgbClr val="53657A"/>
-                </a:solidFill>
-                <a:latin typeface="Aptos"/>
-                <a:ea typeface="Aptos"/>
-                <a:cs typeface="Aptos"/>
-              </a:defRPr>
-            </a:lvl7pPr>
-            <a:lvl8pPr algn="ctr">
-              <a:defRPr sz="1050" b="0">
-                <a:solidFill>
-                  <a:srgbClr val="53657A"/>
-                </a:solidFill>
-                <a:latin typeface="Aptos"/>
-                <a:ea typeface="Aptos"/>
-                <a:cs typeface="Aptos"/>
-              </a:defRPr>
-            </a:lvl8pPr>
-            <a:lvl9pPr algn="ctr">
-              <a:defRPr sz="1050" b="0">
-                <a:solidFill>
-                  <a:srgbClr val="53657A"/>
-                </a:solidFill>
-                <a:latin typeface="Aptos"/>
-                <a:ea typeface="Aptos"/>
-                <a:cs typeface="Aptos"/>
-              </a:defRPr>
-            </a:lvl9pPr>
-          </a:lstStyle>
-          <a:p>
-            <a:pPr algn="ctr">
-              <a:lnSpc>
-                <a:spcPct val="105000"/>
-              </a:lnSpc>
-              <a:buNone/>
-              <a:defRPr sz="1050" b="0">
-                <a:solidFill>
-                  <a:srgbClr val="53657A"/>
-                </a:solidFill>
-                <a:latin typeface="Aptos"/>
-                <a:ea typeface="Aptos"/>
-                <a:cs typeface="Aptos"/>
-              </a:defRPr>
-            </a:pPr>
-            <a:r>
-              <a:rPr sz="1050" b="0">
-                <a:solidFill>
-                  <a:srgbClr val="53657A"/>
-                </a:solidFill>
-                <a:latin typeface="Aptos"/>
-                <a:ea typeface="Aptos"/>
-                <a:cs typeface="Aptos"/>
-              </a:rPr>
-              <a:t>Financial sentiment</a:t>
-            </a:r>
-          </a:p>
-          <a:p>
-            <a:pPr algn="ctr">
-              <a:lnSpc>
-                <a:spcPct val="105000"/>
-              </a:lnSpc>
-              <a:buNone/>
-              <a:defRPr sz="1050" b="0">
-                <a:solidFill>
-                  <a:srgbClr val="53657A"/>
-                </a:solidFill>
-                <a:latin typeface="Aptos"/>
-                <a:ea typeface="Aptos"/>
-                <a:cs typeface="Aptos"/>
-              </a:defRPr>
-            </a:pPr>
-            <a:r>
-              <a:rPr sz="1050" b="0">
-                <a:solidFill>
-                  <a:srgbClr val="53657A"/>
-                </a:solidFill>
-                <a:latin typeface="Aptos"/>
-                <a:ea typeface="Aptos"/>
-                <a:cs typeface="Aptos"/>
-              </a:rPr>
-              <a:t>and confidence</a:t>
-            </a:r>
-          </a:p>
-        </p:txBody>
-      </p:sp>
-      <p:sp>
-        <p:nvSpPr>
-          <p:cNvPr id="18" name="Rectangle 17">
-            <a:extLst>
-              <a:ext uri="{FF2B5EF4-FFF2-40B4-BE49-F238E27FC236}">
-                <a16:creationId xmlns:a16="http://schemas.microsoft.com/office/drawing/2014/main" id="{932E6A57-E481-4892-8A50-21999B8E5D2E}"/>
-              </a:ext>
-            </a:extLst>
-          </p:cNvPr>
-          <p:cNvSpPr>
-            <a:spLocks noGrp="1"/>
-          </p:cNvSpPr>
-          <p:nvPr/>
-        </p:nvSpPr>
-        <p:spPr>
-          <a:xfrm>
-            <a:off x="5581650" y="4343400"/>
-            <a:ext cx="1276350" cy="228600"/>
-          </a:xfrm>
-          <a:prstGeom prst="rect">
-            <a:avLst/>
-          </a:prstGeom>
-          <a:noFill/>
-          <a:ln w="0">
-            <a:noFill/>
-            <a:prstDash val="solid"/>
-          </a:ln>
-        </p:spPr>
-        <p:txBody>
-          <a:bodyPr wrap="square" lIns="0" tIns="0" rIns="0" bIns="0" anchor="t">
-            <a:normAutofit fontScale="95238"/>
-          </a:bodyPr>
-          <a:lstStyle>
-            <a:defPPr algn="ctr">
-              <a:defRPr sz="1500" b="1">
-                <a:solidFill>
-                  <a:srgbClr val="071A33"/>
-                </a:solidFill>
-                <a:latin typeface="Aptos"/>
-                <a:ea typeface="Aptos"/>
-                <a:cs typeface="Aptos"/>
-              </a:defRPr>
-            </a:defPPr>
-            <a:lvl1pPr algn="ctr">
-              <a:defRPr sz="1500" b="1">
-                <a:solidFill>
-                  <a:srgbClr val="071A33"/>
-                </a:solidFill>
-                <a:latin typeface="Aptos"/>
-                <a:ea typeface="Aptos"/>
-                <a:cs typeface="Aptos"/>
-              </a:defRPr>
-            </a:lvl1pPr>
-            <a:lvl2pPr algn="ctr">
-              <a:defRPr sz="1500" b="1">
-                <a:solidFill>
-                  <a:srgbClr val="071A33"/>
-                </a:solidFill>
-                <a:latin typeface="Aptos"/>
-                <a:ea typeface="Aptos"/>
-                <a:cs typeface="Aptos"/>
-              </a:defRPr>
-            </a:lvl2pPr>
-            <a:lvl3pPr algn="ctr">
-              <a:defRPr sz="1500" b="1">
-                <a:solidFill>
-                  <a:srgbClr val="071A33"/>
-                </a:solidFill>
-                <a:latin typeface="Aptos"/>
-                <a:ea typeface="Aptos"/>
-                <a:cs typeface="Aptos"/>
-              </a:defRPr>
-            </a:lvl3pPr>
-            <a:lvl4pPr algn="ctr">
-              <a:defRPr sz="1500" b="1">
-                <a:solidFill>
-                  <a:srgbClr val="071A33"/>
-                </a:solidFill>
-                <a:latin typeface="Aptos"/>
-                <a:ea typeface="Aptos"/>
-                <a:cs typeface="Aptos"/>
-              </a:defRPr>
-            </a:lvl4pPr>
-            <a:lvl5pPr algn="ctr">
-              <a:defRPr sz="1500" b="1">
-                <a:solidFill>
-                  <a:srgbClr val="071A33"/>
-                </a:solidFill>
-                <a:latin typeface="Aptos"/>
-                <a:ea typeface="Aptos"/>
-                <a:cs typeface="Aptos"/>
-              </a:defRPr>
-            </a:lvl5pPr>
-            <a:lvl6pPr algn="ctr">
-              <a:defRPr sz="1500" b="1">
-                <a:solidFill>
-                  <a:srgbClr val="071A33"/>
-                </a:solidFill>
-                <a:latin typeface="Aptos"/>
-                <a:ea typeface="Aptos"/>
-                <a:cs typeface="Aptos"/>
-              </a:defRPr>
-            </a:lvl6pPr>
-            <a:lvl7pPr algn="ctr">
-              <a:defRPr sz="1500" b="1">
-                <a:solidFill>
-                  <a:srgbClr val="071A33"/>
-                </a:solidFill>
-                <a:latin typeface="Aptos"/>
-                <a:ea typeface="Aptos"/>
-                <a:cs typeface="Aptos"/>
-              </a:defRPr>
-            </a:lvl7pPr>
-            <a:lvl8pPr algn="ctr">
-              <a:defRPr sz="1500" b="1">
-                <a:solidFill>
-                  <a:srgbClr val="071A33"/>
-                </a:solidFill>
-                <a:latin typeface="Aptos"/>
-                <a:ea typeface="Aptos"/>
-                <a:cs typeface="Aptos"/>
-              </a:defRPr>
-            </a:lvl8pPr>
-            <a:lvl9pPr algn="ctr">
-              <a:defRPr sz="1500" b="1">
-                <a:solidFill>
-                  <a:srgbClr val="071A33"/>
-                </a:solidFill>
-                <a:latin typeface="Aptos"/>
-                <a:ea typeface="Aptos"/>
-                <a:cs typeface="Aptos"/>
-              </a:defRPr>
-            </a:lvl9pPr>
-          </a:lstStyle>
-          <a:p>
-            <a:pPr algn="ctr">
-              <a:lnSpc>
-                <a:spcPct val="105000"/>
-              </a:lnSpc>
-              <a:buNone/>
-              <a:defRPr sz="1500" b="1">
-                <a:solidFill>
-                  <a:srgbClr val="071A33"/>
-                </a:solidFill>
-                <a:latin typeface="Aptos"/>
-                <a:ea typeface="Aptos"/>
-                <a:cs typeface="Aptos"/>
-              </a:defRPr>
-            </a:pPr>
-            <a:r>
-              <a:rPr sz="1500" b="1">
-                <a:solidFill>
-                  <a:srgbClr val="071A33"/>
-                </a:solidFill>
-                <a:latin typeface="Aptos"/>
-                <a:ea typeface="Aptos"/>
-                <a:cs typeface="Aptos"/>
-              </a:rPr>
-              <a:t>Event classifier</a:t>
-            </a:r>
-          </a:p>
-        </p:txBody>
-      </p:sp>
-      <p:sp>
-        <p:nvSpPr>
-          <p:cNvPr id="19" name="Rectangle 18">
-            <a:extLst>
-              <a:ext uri="{FF2B5EF4-FFF2-40B4-BE49-F238E27FC236}">
-                <a16:creationId xmlns:a16="http://schemas.microsoft.com/office/drawing/2014/main" id="{0BDFF6CB-ECBE-4A2A-A2D2-F61C63A1223B}"/>
-              </a:ext>
-            </a:extLst>
-          </p:cNvPr>
-          <p:cNvSpPr>
-            <a:spLocks noGrp="1"/>
-          </p:cNvSpPr>
-          <p:nvPr/>
-        </p:nvSpPr>
-        <p:spPr>
-          <a:xfrm>
-            <a:off x="5581650" y="4657725"/>
-            <a:ext cx="1276350" cy="361950"/>
-          </a:xfrm>
-          <a:prstGeom prst="rect">
-            <a:avLst/>
-          </a:prstGeom>
-          <a:noFill/>
-          <a:ln w="0">
-            <a:noFill/>
-            <a:prstDash val="solid"/>
-          </a:ln>
-        </p:spPr>
-        <p:txBody>
-          <a:bodyPr wrap="square" lIns="0" tIns="0" rIns="0" bIns="0" anchor="t">
-            <a:normAutofit/>
-          </a:bodyPr>
-          <a:lstStyle>
-            <a:defPPr algn="ctr">
-              <a:defRPr sz="1050" b="0">
-                <a:solidFill>
-                  <a:srgbClr val="53657A"/>
-                </a:solidFill>
-                <a:latin typeface="Aptos"/>
-                <a:ea typeface="Aptos"/>
-                <a:cs typeface="Aptos"/>
-              </a:defRPr>
-            </a:defPPr>
-            <a:lvl1pPr algn="ctr">
-              <a:defRPr sz="1050" b="0">
-                <a:solidFill>
-                  <a:srgbClr val="53657A"/>
-                </a:solidFill>
-                <a:latin typeface="Aptos"/>
-                <a:ea typeface="Aptos"/>
-                <a:cs typeface="Aptos"/>
-              </a:defRPr>
-            </a:lvl1pPr>
-            <a:lvl2pPr algn="ctr">
-              <a:defRPr sz="1050" b="0">
-                <a:solidFill>
-                  <a:srgbClr val="53657A"/>
-                </a:solidFill>
-                <a:latin typeface="Aptos"/>
-                <a:ea typeface="Aptos"/>
-                <a:cs typeface="Aptos"/>
-              </a:defRPr>
-            </a:lvl2pPr>
-            <a:lvl3pPr algn="ctr">
-              <a:defRPr sz="1050" b="0">
-                <a:solidFill>
-                  <a:srgbClr val="53657A"/>
-                </a:solidFill>
-                <a:latin typeface="Aptos"/>
-                <a:ea typeface="Aptos"/>
-                <a:cs typeface="Aptos"/>
-              </a:defRPr>
-            </a:lvl3pPr>
-            <a:lvl4pPr algn="ctr">
-              <a:defRPr sz="1050" b="0">
-                <a:solidFill>
-                  <a:srgbClr val="53657A"/>
-                </a:solidFill>
-                <a:latin typeface="Aptos"/>
-                <a:ea typeface="Aptos"/>
-                <a:cs typeface="Aptos"/>
-              </a:defRPr>
-            </a:lvl4pPr>
-            <a:lvl5pPr algn="ctr">
-              <a:defRPr sz="1050" b="0">
-                <a:solidFill>
-                  <a:srgbClr val="53657A"/>
-                </a:solidFill>
-                <a:latin typeface="Aptos"/>
-                <a:ea typeface="Aptos"/>
-                <a:cs typeface="Aptos"/>
-              </a:defRPr>
-            </a:lvl5pPr>
-            <a:lvl6pPr algn="ctr">
-              <a:defRPr sz="1050" b="0">
-                <a:solidFill>
-                  <a:srgbClr val="53657A"/>
-                </a:solidFill>
-                <a:latin typeface="Aptos"/>
-                <a:ea typeface="Aptos"/>
-                <a:cs typeface="Aptos"/>
-              </a:defRPr>
-            </a:lvl6pPr>
-            <a:lvl7pPr algn="ctr">
-              <a:defRPr sz="1050" b="0">
-                <a:solidFill>
-                  <a:srgbClr val="53657A"/>
-                </a:solidFill>
-                <a:latin typeface="Aptos"/>
-                <a:ea typeface="Aptos"/>
-                <a:cs typeface="Aptos"/>
-              </a:defRPr>
-            </a:lvl7pPr>
-            <a:lvl8pPr algn="ctr">
-              <a:defRPr sz="1050" b="0">
-                <a:solidFill>
-                  <a:srgbClr val="53657A"/>
-                </a:solidFill>
-                <a:latin typeface="Aptos"/>
-                <a:ea typeface="Aptos"/>
-                <a:cs typeface="Aptos"/>
-              </a:defRPr>
-            </a:lvl8pPr>
-            <a:lvl9pPr algn="ctr">
-              <a:defRPr sz="1050" b="0">
-                <a:solidFill>
-                  <a:srgbClr val="53657A"/>
-                </a:solidFill>
-                <a:latin typeface="Aptos"/>
-                <a:ea typeface="Aptos"/>
-                <a:cs typeface="Aptos"/>
-              </a:defRPr>
-            </a:lvl9pPr>
-          </a:lstStyle>
-          <a:p>
-            <a:pPr algn="ctr">
-              <a:lnSpc>
-                <a:spcPct val="105000"/>
-              </a:lnSpc>
-              <a:buNone/>
-              <a:defRPr sz="1050" b="0">
-                <a:solidFill>
-                  <a:srgbClr val="53657A"/>
-                </a:solidFill>
-                <a:latin typeface="Aptos"/>
-                <a:ea typeface="Aptos"/>
-                <a:cs typeface="Aptos"/>
-              </a:defRPr>
-            </a:pPr>
-            <a:r>
-              <a:rPr sz="1050" b="0">
-                <a:solidFill>
-                  <a:srgbClr val="53657A"/>
-                </a:solidFill>
-                <a:latin typeface="Aptos"/>
-                <a:ea typeface="Aptos"/>
-                <a:cs typeface="Aptos"/>
-              </a:rPr>
-              <a:t>Zero-shot category</a:t>
-            </a:r>
-          </a:p>
-          <a:p>
-            <a:pPr algn="ctr">
-              <a:lnSpc>
-                <a:spcPct val="105000"/>
-              </a:lnSpc>
-              <a:buNone/>
-              <a:defRPr sz="1050" b="0">
-                <a:solidFill>
-                  <a:srgbClr val="53657A"/>
-                </a:solidFill>
-                <a:latin typeface="Aptos"/>
-                <a:ea typeface="Aptos"/>
-                <a:cs typeface="Aptos"/>
-              </a:defRPr>
-            </a:pPr>
-            <a:r>
-              <a:rPr sz="1050" b="0">
-                <a:solidFill>
-                  <a:srgbClr val="53657A"/>
-                </a:solidFill>
-                <a:latin typeface="Aptos"/>
-                <a:ea typeface="Aptos"/>
-                <a:cs typeface="Aptos"/>
-              </a:rPr>
-              <a:t>and confidence</a:t>
-            </a:r>
-          </a:p>
-        </p:txBody>
-      </p:sp>
-      <p:sp>
-        <p:nvSpPr>
-          <p:cNvPr id="20" name="impact">
-            <a:extLst>
-              <a:ext uri="{FF2B5EF4-FFF2-40B4-BE49-F238E27FC236}">
-                <a16:creationId xmlns:a16="http://schemas.microsoft.com/office/drawing/2014/main" id="{B23A3A13-8E20-4F4D-87E2-A1364923BD87}"/>
-              </a:ext>
-            </a:extLst>
-          </p:cNvPr>
-          <p:cNvSpPr>
-            <a:spLocks noGrp="1"/>
-          </p:cNvSpPr>
-          <p:nvPr/>
-        </p:nvSpPr>
-        <p:spPr>
-          <a:xfrm>
-            <a:off x="7658100" y="3333750"/>
-            <a:ext cx="1657350" cy="971550"/>
-          </a:xfrm>
-          <a:prstGeom prst="roundRect">
-            <a:avLst>
-              <a:gd name="adj" fmla="val 13725"/>
-            </a:avLst>
-          </a:prstGeom>
-          <a:solidFill>
-            <a:srgbClr val="EAE6FF"/>
-          </a:solidFill>
-          <a:ln w="9525">
-            <a:solidFill>
-              <a:srgbClr val="CFC5FF"/>
-            </a:solidFill>
-            <a:prstDash val="solid"/>
-          </a:ln>
-        </p:spPr>
-        <p:txBody>
-          <a:bodyPr/>
-          <a:lstStyle/>
-          <a:p>
-            <a:endParaRPr lang="en-IN"/>
-          </a:p>
-        </p:txBody>
-      </p:sp>
-      <p:sp>
-        <p:nvSpPr>
-          <p:cNvPr id="21" name="Rectangle 20">
-            <a:extLst>
-              <a:ext uri="{FF2B5EF4-FFF2-40B4-BE49-F238E27FC236}">
-                <a16:creationId xmlns:a16="http://schemas.microsoft.com/office/drawing/2014/main" id="{DC06CFBD-F747-40B6-8459-E9331D6324D6}"/>
-              </a:ext>
-            </a:extLst>
-          </p:cNvPr>
-          <p:cNvSpPr>
-            <a:spLocks noGrp="1"/>
-          </p:cNvSpPr>
-          <p:nvPr/>
-        </p:nvSpPr>
-        <p:spPr>
-          <a:xfrm>
-            <a:off x="7848600" y="3552825"/>
-            <a:ext cx="1276350" cy="228600"/>
-          </a:xfrm>
-          <a:prstGeom prst="rect">
-            <a:avLst/>
-          </a:prstGeom>
-          <a:noFill/>
-          <a:ln w="0">
-            <a:noFill/>
-            <a:prstDash val="solid"/>
-          </a:ln>
-        </p:spPr>
-        <p:txBody>
-          <a:bodyPr wrap="square" lIns="0" tIns="0" rIns="0" bIns="0" anchor="t">
-            <a:normAutofit/>
-          </a:bodyPr>
-          <a:lstStyle>
-            <a:defPPr algn="ctr">
-              <a:defRPr sz="1425" b="1">
-                <a:solidFill>
-                  <a:srgbClr val="071A33"/>
-                </a:solidFill>
-                <a:latin typeface="Aptos"/>
-                <a:ea typeface="Aptos"/>
-                <a:cs typeface="Aptos"/>
-              </a:defRPr>
-            </a:defPPr>
-            <a:lvl1pPr algn="ctr">
-              <a:defRPr sz="1425" b="1">
-                <a:solidFill>
-                  <a:srgbClr val="071A33"/>
-                </a:solidFill>
-                <a:latin typeface="Aptos"/>
-                <a:ea typeface="Aptos"/>
-                <a:cs typeface="Aptos"/>
-              </a:defRPr>
-            </a:lvl1pPr>
-            <a:lvl2pPr algn="ctr">
-              <a:defRPr sz="1425" b="1">
-                <a:solidFill>
-                  <a:srgbClr val="071A33"/>
-                </a:solidFill>
-                <a:latin typeface="Aptos"/>
-                <a:ea typeface="Aptos"/>
-                <a:cs typeface="Aptos"/>
-              </a:defRPr>
-            </a:lvl2pPr>
-            <a:lvl3pPr algn="ctr">
-              <a:defRPr sz="1425" b="1">
-                <a:solidFill>
-                  <a:srgbClr val="071A33"/>
-                </a:solidFill>
-                <a:latin typeface="Aptos"/>
-                <a:ea typeface="Aptos"/>
-                <a:cs typeface="Aptos"/>
-              </a:defRPr>
-            </a:lvl3pPr>
-            <a:lvl4pPr algn="ctr">
-              <a:defRPr sz="1425" b="1">
-                <a:solidFill>
-                  <a:srgbClr val="071A33"/>
-                </a:solidFill>
-                <a:latin typeface="Aptos"/>
-                <a:ea typeface="Aptos"/>
-                <a:cs typeface="Aptos"/>
-              </a:defRPr>
-            </a:lvl4pPr>
-            <a:lvl5pPr algn="ctr">
-              <a:defRPr sz="1425" b="1">
-                <a:solidFill>
-                  <a:srgbClr val="071A33"/>
-                </a:solidFill>
-                <a:latin typeface="Aptos"/>
-                <a:ea typeface="Aptos"/>
-                <a:cs typeface="Aptos"/>
-              </a:defRPr>
-            </a:lvl5pPr>
-            <a:lvl6pPr algn="ctr">
-              <a:defRPr sz="1425" b="1">
-                <a:solidFill>
-                  <a:srgbClr val="071A33"/>
-                </a:solidFill>
-                <a:latin typeface="Aptos"/>
-                <a:ea typeface="Aptos"/>
-                <a:cs typeface="Aptos"/>
-              </a:defRPr>
-            </a:lvl6pPr>
-            <a:lvl7pPr algn="ctr">
-              <a:defRPr sz="1425" b="1">
-                <a:solidFill>
-                  <a:srgbClr val="071A33"/>
-                </a:solidFill>
-                <a:latin typeface="Aptos"/>
-                <a:ea typeface="Aptos"/>
-                <a:cs typeface="Aptos"/>
-              </a:defRPr>
-            </a:lvl7pPr>
-            <a:lvl8pPr algn="ctr">
-              <a:defRPr sz="1425" b="1">
-                <a:solidFill>
-                  <a:srgbClr val="071A33"/>
-                </a:solidFill>
-                <a:latin typeface="Aptos"/>
-                <a:ea typeface="Aptos"/>
-                <a:cs typeface="Aptos"/>
-              </a:defRPr>
-            </a:lvl8pPr>
-            <a:lvl9pPr algn="ctr">
-              <a:defRPr sz="1425" b="1">
-                <a:solidFill>
-                  <a:srgbClr val="071A33"/>
-                </a:solidFill>
-                <a:latin typeface="Aptos"/>
-                <a:ea typeface="Aptos"/>
-                <a:cs typeface="Aptos"/>
-              </a:defRPr>
-            </a:lvl9pPr>
-          </a:lstStyle>
-          <a:p>
-            <a:pPr algn="ctr">
-              <a:lnSpc>
-                <a:spcPct val="105000"/>
-              </a:lnSpc>
-              <a:buNone/>
-              <a:defRPr sz="1425" b="1">
-                <a:solidFill>
-                  <a:srgbClr val="071A33"/>
-                </a:solidFill>
-                <a:latin typeface="Aptos"/>
-                <a:ea typeface="Aptos"/>
-                <a:cs typeface="Aptos"/>
-              </a:defRPr>
-            </a:pPr>
-            <a:r>
-              <a:rPr sz="1425" b="1">
-                <a:solidFill>
-                  <a:srgbClr val="071A33"/>
-                </a:solidFill>
-                <a:latin typeface="Aptos"/>
-                <a:ea typeface="Aptos"/>
-                <a:cs typeface="Aptos"/>
-              </a:rPr>
-              <a:t>Impact scoring</a:t>
-            </a:r>
-          </a:p>
-        </p:txBody>
-      </p:sp>
-      <p:sp>
-        <p:nvSpPr>
-          <p:cNvPr id="22" name="Rectangle 21">
-            <a:extLst>
-              <a:ext uri="{FF2B5EF4-FFF2-40B4-BE49-F238E27FC236}">
-                <a16:creationId xmlns:a16="http://schemas.microsoft.com/office/drawing/2014/main" id="{FD5A40FD-FA66-4FFA-9C7B-B6C662CB1C1D}"/>
-              </a:ext>
-            </a:extLst>
-          </p:cNvPr>
-          <p:cNvSpPr>
-            <a:spLocks noGrp="1"/>
-          </p:cNvSpPr>
-          <p:nvPr/>
-        </p:nvSpPr>
-        <p:spPr>
-          <a:xfrm>
-            <a:off x="7848600" y="3876675"/>
-            <a:ext cx="1276350" cy="361950"/>
-          </a:xfrm>
-          <a:prstGeom prst="rect">
-            <a:avLst/>
-          </a:prstGeom>
-          <a:noFill/>
-          <a:ln w="0">
-            <a:noFill/>
-            <a:prstDash val="solid"/>
-          </a:ln>
-        </p:spPr>
-        <p:txBody>
-          <a:bodyPr wrap="square" lIns="0" tIns="0" rIns="0" bIns="0" anchor="t">
-            <a:normAutofit/>
-          </a:bodyPr>
-          <a:lstStyle>
-            <a:defPPr algn="ctr">
-              <a:defRPr sz="1050" b="0">
-                <a:solidFill>
-                  <a:srgbClr val="53657A"/>
-                </a:solidFill>
-                <a:latin typeface="Aptos"/>
-                <a:ea typeface="Aptos"/>
-                <a:cs typeface="Aptos"/>
-              </a:defRPr>
-            </a:defPPr>
-            <a:lvl1pPr algn="ctr">
-              <a:defRPr sz="1050" b="0">
-                <a:solidFill>
-                  <a:srgbClr val="53657A"/>
-                </a:solidFill>
-                <a:latin typeface="Aptos"/>
-                <a:ea typeface="Aptos"/>
-                <a:cs typeface="Aptos"/>
-              </a:defRPr>
-            </a:lvl1pPr>
-            <a:lvl2pPr algn="ctr">
-              <a:defRPr sz="1050" b="0">
-                <a:solidFill>
-                  <a:srgbClr val="53657A"/>
-                </a:solidFill>
-                <a:latin typeface="Aptos"/>
-                <a:ea typeface="Aptos"/>
-                <a:cs typeface="Aptos"/>
-              </a:defRPr>
-            </a:lvl2pPr>
-            <a:lvl3pPr algn="ctr">
-              <a:defRPr sz="1050" b="0">
-                <a:solidFill>
-                  <a:srgbClr val="53657A"/>
-                </a:solidFill>
-                <a:latin typeface="Aptos"/>
-                <a:ea typeface="Aptos"/>
-                <a:cs typeface="Aptos"/>
-              </a:defRPr>
-            </a:lvl3pPr>
-            <a:lvl4pPr algn="ctr">
-              <a:defRPr sz="1050" b="0">
-                <a:solidFill>
-                  <a:srgbClr val="53657A"/>
-                </a:solidFill>
-                <a:latin typeface="Aptos"/>
-                <a:ea typeface="Aptos"/>
-                <a:cs typeface="Aptos"/>
-              </a:defRPr>
-            </a:lvl4pPr>
-            <a:lvl5pPr algn="ctr">
-              <a:defRPr sz="1050" b="0">
-                <a:solidFill>
-                  <a:srgbClr val="53657A"/>
-                </a:solidFill>
-                <a:latin typeface="Aptos"/>
-                <a:ea typeface="Aptos"/>
-                <a:cs typeface="Aptos"/>
-              </a:defRPr>
-            </a:lvl5pPr>
-            <a:lvl6pPr algn="ctr">
-              <a:defRPr sz="1050" b="0">
-                <a:solidFill>
-                  <a:srgbClr val="53657A"/>
-                </a:solidFill>
-                <a:latin typeface="Aptos"/>
-                <a:ea typeface="Aptos"/>
-                <a:cs typeface="Aptos"/>
-              </a:defRPr>
-            </a:lvl6pPr>
-            <a:lvl7pPr algn="ctr">
-              <a:defRPr sz="1050" b="0">
-                <a:solidFill>
-                  <a:srgbClr val="53657A"/>
-                </a:solidFill>
-                <a:latin typeface="Aptos"/>
-                <a:ea typeface="Aptos"/>
-                <a:cs typeface="Aptos"/>
-              </a:defRPr>
-            </a:lvl7pPr>
-            <a:lvl8pPr algn="ctr">
-              <a:defRPr sz="1050" b="0">
-                <a:solidFill>
-                  <a:srgbClr val="53657A"/>
-                </a:solidFill>
-                <a:latin typeface="Aptos"/>
-                <a:ea typeface="Aptos"/>
-                <a:cs typeface="Aptos"/>
-              </a:defRPr>
-            </a:lvl8pPr>
-            <a:lvl9pPr algn="ctr">
-              <a:defRPr sz="1050" b="0">
-                <a:solidFill>
-                  <a:srgbClr val="53657A"/>
-                </a:solidFill>
-                <a:latin typeface="Aptos"/>
-                <a:ea typeface="Aptos"/>
-                <a:cs typeface="Aptos"/>
-              </a:defRPr>
-            </a:lvl9pPr>
-          </a:lstStyle>
-          <a:p>
-            <a:pPr algn="ctr">
-              <a:lnSpc>
-                <a:spcPct val="105000"/>
-              </a:lnSpc>
-              <a:buNone/>
-              <a:defRPr sz="1050" b="0">
-                <a:solidFill>
-                  <a:srgbClr val="53657A"/>
-                </a:solidFill>
-                <a:latin typeface="Aptos"/>
-                <a:ea typeface="Aptos"/>
-                <a:cs typeface="Aptos"/>
-              </a:defRPr>
-            </a:pPr>
-            <a:r>
-              <a:rPr sz="1050" b="0">
-                <a:solidFill>
-                  <a:srgbClr val="53657A"/>
-                </a:solidFill>
-                <a:latin typeface="Aptos"/>
-                <a:ea typeface="Aptos"/>
-                <a:cs typeface="Aptos"/>
-              </a:rPr>
-              <a:t>Structured risk</a:t>
-            </a:r>
-          </a:p>
-          <a:p>
-            <a:pPr algn="ctr">
-              <a:lnSpc>
-                <a:spcPct val="105000"/>
-              </a:lnSpc>
-              <a:buNone/>
-              <a:defRPr sz="1050" b="0">
-                <a:solidFill>
-                  <a:srgbClr val="53657A"/>
-                </a:solidFill>
-                <a:latin typeface="Aptos"/>
-                <a:ea typeface="Aptos"/>
-                <a:cs typeface="Aptos"/>
-              </a:defRPr>
-            </a:pPr>
-            <a:r>
-              <a:rPr sz="1050" b="0">
-                <a:solidFill>
-                  <a:srgbClr val="53657A"/>
-                </a:solidFill>
-                <a:latin typeface="Aptos"/>
-                <a:ea typeface="Aptos"/>
-                <a:cs typeface="Aptos"/>
-              </a:rPr>
-              <a:t>signal</a:t>
-            </a:r>
-          </a:p>
-        </p:txBody>
-      </p:sp>
-      <p:sp>
-        <p:nvSpPr>
-          <p:cNvPr id="23" name="rebalancer">
-            <a:extLst>
-              <a:ext uri="{FF2B5EF4-FFF2-40B4-BE49-F238E27FC236}">
-                <a16:creationId xmlns:a16="http://schemas.microsoft.com/office/drawing/2014/main" id="{1E8C9C8D-17D2-4A95-B663-1F0D622B0FF1}"/>
-              </a:ext>
-            </a:extLst>
-          </p:cNvPr>
-          <p:cNvSpPr>
-            <a:spLocks noGrp="1"/>
-          </p:cNvSpPr>
-          <p:nvPr/>
-        </p:nvSpPr>
-        <p:spPr>
-          <a:xfrm>
-            <a:off x="9925050" y="3333750"/>
-            <a:ext cx="1524000" cy="971550"/>
-          </a:xfrm>
-          <a:prstGeom prst="roundRect">
-            <a:avLst>
-              <a:gd name="adj" fmla="val 13725"/>
-            </a:avLst>
-          </a:prstGeom>
-          <a:solidFill>
-            <a:srgbClr val="071A33"/>
-          </a:solidFill>
-          <a:ln w="9525">
-            <a:solidFill>
-              <a:srgbClr val="071A33"/>
-            </a:solidFill>
-            <a:prstDash val="solid"/>
-          </a:ln>
-        </p:spPr>
-        <p:txBody>
-          <a:bodyPr/>
-          <a:lstStyle/>
-          <a:p>
-            <a:endParaRPr lang="en-IN"/>
-          </a:p>
-        </p:txBody>
-      </p:sp>
-      <p:sp>
-        <p:nvSpPr>
-          <p:cNvPr id="24" name="Rectangle 23">
-            <a:extLst>
-              <a:ext uri="{FF2B5EF4-FFF2-40B4-BE49-F238E27FC236}">
-                <a16:creationId xmlns:a16="http://schemas.microsoft.com/office/drawing/2014/main" id="{EC1718EB-A4CB-4DA4-B844-46515FCD7C12}"/>
-              </a:ext>
-            </a:extLst>
-          </p:cNvPr>
-          <p:cNvSpPr>
-            <a:spLocks noGrp="1"/>
-          </p:cNvSpPr>
-          <p:nvPr/>
-        </p:nvSpPr>
-        <p:spPr>
-          <a:xfrm>
-            <a:off x="10096500" y="3552825"/>
-            <a:ext cx="1181100" cy="228600"/>
-          </a:xfrm>
-          <a:prstGeom prst="rect">
-            <a:avLst/>
-          </a:prstGeom>
-          <a:noFill/>
-          <a:ln w="0">
-            <a:noFill/>
-            <a:prstDash val="solid"/>
-          </a:ln>
-        </p:spPr>
-        <p:txBody>
-          <a:bodyPr wrap="square" lIns="0" tIns="0" rIns="0" bIns="0" anchor="t">
-            <a:normAutofit/>
-          </a:bodyPr>
-          <a:lstStyle>
-            <a:defPPr algn="ctr">
-              <a:defRPr sz="1425" b="1">
-                <a:solidFill>
-                  <a:srgbClr val="FFFFFF"/>
-                </a:solidFill>
-                <a:latin typeface="Aptos"/>
-                <a:ea typeface="Aptos"/>
-                <a:cs typeface="Aptos"/>
-              </a:defRPr>
-            </a:defPPr>
-            <a:lvl1pPr algn="ctr">
-              <a:defRPr sz="1425" b="1">
-                <a:solidFill>
-                  <a:srgbClr val="FFFFFF"/>
-                </a:solidFill>
-                <a:latin typeface="Aptos"/>
-                <a:ea typeface="Aptos"/>
-                <a:cs typeface="Aptos"/>
-              </a:defRPr>
-            </a:lvl1pPr>
-            <a:lvl2pPr algn="ctr">
-              <a:defRPr sz="1425" b="1">
-                <a:solidFill>
-                  <a:srgbClr val="FFFFFF"/>
-                </a:solidFill>
-                <a:latin typeface="Aptos"/>
-                <a:ea typeface="Aptos"/>
-                <a:cs typeface="Aptos"/>
-              </a:defRPr>
-            </a:lvl2pPr>
-            <a:lvl3pPr algn="ctr">
-              <a:defRPr sz="1425" b="1">
-                <a:solidFill>
-                  <a:srgbClr val="FFFFFF"/>
-                </a:solidFill>
-                <a:latin typeface="Aptos"/>
-                <a:ea typeface="Aptos"/>
-                <a:cs typeface="Aptos"/>
-              </a:defRPr>
-            </a:lvl3pPr>
-            <a:lvl4pPr algn="ctr">
-              <a:defRPr sz="1425" b="1">
-                <a:solidFill>
-                  <a:srgbClr val="FFFFFF"/>
-                </a:solidFill>
-                <a:latin typeface="Aptos"/>
-                <a:ea typeface="Aptos"/>
-                <a:cs typeface="Aptos"/>
-              </a:defRPr>
-            </a:lvl4pPr>
-            <a:lvl5pPr algn="ctr">
-              <a:defRPr sz="1425" b="1">
-                <a:solidFill>
-                  <a:srgbClr val="FFFFFF"/>
-                </a:solidFill>
-                <a:latin typeface="Aptos"/>
-                <a:ea typeface="Aptos"/>
-                <a:cs typeface="Aptos"/>
-              </a:defRPr>
-            </a:lvl5pPr>
-            <a:lvl6pPr algn="ctr">
-              <a:defRPr sz="1425" b="1">
-                <a:solidFill>
-                  <a:srgbClr val="FFFFFF"/>
-                </a:solidFill>
-                <a:latin typeface="Aptos"/>
-                <a:ea typeface="Aptos"/>
-                <a:cs typeface="Aptos"/>
-              </a:defRPr>
-            </a:lvl6pPr>
-            <a:lvl7pPr algn="ctr">
-              <a:defRPr sz="1425" b="1">
-                <a:solidFill>
-                  <a:srgbClr val="FFFFFF"/>
-                </a:solidFill>
-                <a:latin typeface="Aptos"/>
-                <a:ea typeface="Aptos"/>
-                <a:cs typeface="Aptos"/>
-              </a:defRPr>
-            </a:lvl7pPr>
-            <a:lvl8pPr algn="ctr">
-              <a:defRPr sz="1425" b="1">
-                <a:solidFill>
-                  <a:srgbClr val="FFFFFF"/>
-                </a:solidFill>
-                <a:latin typeface="Aptos"/>
-                <a:ea typeface="Aptos"/>
-                <a:cs typeface="Aptos"/>
-              </a:defRPr>
-            </a:lvl8pPr>
-            <a:lvl9pPr algn="ctr">
-              <a:defRPr sz="1425" b="1">
-                <a:solidFill>
-                  <a:srgbClr val="FFFFFF"/>
-                </a:solidFill>
-                <a:latin typeface="Aptos"/>
-                <a:ea typeface="Aptos"/>
-                <a:cs typeface="Aptos"/>
-              </a:defRPr>
-            </a:lvl9pPr>
-          </a:lstStyle>
-          <a:p>
-            <a:pPr algn="ctr">
-              <a:lnSpc>
-                <a:spcPct val="105000"/>
-              </a:lnSpc>
-              <a:buNone/>
-              <a:defRPr sz="1425" b="1">
-                <a:solidFill>
-                  <a:srgbClr val="FFFFFF"/>
-                </a:solidFill>
-                <a:latin typeface="Aptos"/>
-                <a:ea typeface="Aptos"/>
-                <a:cs typeface="Aptos"/>
-              </a:defRPr>
-            </a:pPr>
-            <a:r>
-              <a:rPr sz="1425" b="1">
-                <a:solidFill>
-                  <a:srgbClr val="FFFFFF"/>
-                </a:solidFill>
-                <a:latin typeface="Aptos"/>
-                <a:ea typeface="Aptos"/>
-                <a:cs typeface="Aptos"/>
-              </a:rPr>
-              <a:t>Rebalancer</a:t>
-            </a:r>
-          </a:p>
-        </p:txBody>
-      </p:sp>
-      <p:sp>
-        <p:nvSpPr>
-          <p:cNvPr id="25" name="Rectangle 24">
-            <a:extLst>
-              <a:ext uri="{FF2B5EF4-FFF2-40B4-BE49-F238E27FC236}">
-                <a16:creationId xmlns:a16="http://schemas.microsoft.com/office/drawing/2014/main" id="{D300B68A-FD0B-4CF2-A5CF-4894CD65C406}"/>
-              </a:ext>
-            </a:extLst>
-          </p:cNvPr>
-          <p:cNvSpPr>
-            <a:spLocks noGrp="1"/>
-          </p:cNvSpPr>
-          <p:nvPr/>
-        </p:nvSpPr>
-        <p:spPr>
-          <a:xfrm>
-            <a:off x="10096500" y="3876675"/>
-            <a:ext cx="1181100" cy="361950"/>
-          </a:xfrm>
-          <a:prstGeom prst="rect">
-            <a:avLst/>
-          </a:prstGeom>
-          <a:noFill/>
-          <a:ln w="0">
-            <a:noFill/>
-            <a:prstDash val="solid"/>
-          </a:ln>
-        </p:spPr>
-        <p:txBody>
-          <a:bodyPr wrap="square" lIns="0" tIns="0" rIns="0" bIns="0" anchor="t">
-            <a:normAutofit/>
-          </a:bodyPr>
-          <a:lstStyle>
-            <a:defPPr algn="ctr">
-              <a:defRPr sz="1050" b="0">
-                <a:solidFill>
-                  <a:srgbClr val="C9D9E9"/>
-                </a:solidFill>
-                <a:latin typeface="Aptos"/>
-                <a:ea typeface="Aptos"/>
-                <a:cs typeface="Aptos"/>
-              </a:defRPr>
-            </a:defPPr>
-            <a:lvl1pPr algn="ctr">
-              <a:defRPr sz="1050" b="0">
-                <a:solidFill>
-                  <a:srgbClr val="C9D9E9"/>
-                </a:solidFill>
-                <a:latin typeface="Aptos"/>
-                <a:ea typeface="Aptos"/>
-                <a:cs typeface="Aptos"/>
-              </a:defRPr>
-            </a:lvl1pPr>
-            <a:lvl2pPr algn="ctr">
-              <a:defRPr sz="1050" b="0">
-                <a:solidFill>
-                  <a:srgbClr val="C9D9E9"/>
-                </a:solidFill>
-                <a:latin typeface="Aptos"/>
-                <a:ea typeface="Aptos"/>
-                <a:cs typeface="Aptos"/>
-              </a:defRPr>
-            </a:lvl2pPr>
-            <a:lvl3pPr algn="ctr">
-              <a:defRPr sz="1050" b="0">
-                <a:solidFill>
-                  <a:srgbClr val="C9D9E9"/>
-                </a:solidFill>
-                <a:latin typeface="Aptos"/>
-                <a:ea typeface="Aptos"/>
-                <a:cs typeface="Aptos"/>
-              </a:defRPr>
-            </a:lvl3pPr>
-            <a:lvl4pPr algn="ctr">
-              <a:defRPr sz="1050" b="0">
-                <a:solidFill>
-                  <a:srgbClr val="C9D9E9"/>
-                </a:solidFill>
-                <a:latin typeface="Aptos"/>
-                <a:ea typeface="Aptos"/>
-                <a:cs typeface="Aptos"/>
-              </a:defRPr>
-            </a:lvl4pPr>
-            <a:lvl5pPr algn="ctr">
-              <a:defRPr sz="1050" b="0">
-                <a:solidFill>
-                  <a:srgbClr val="C9D9E9"/>
-                </a:solidFill>
-                <a:latin typeface="Aptos"/>
-                <a:ea typeface="Aptos"/>
-                <a:cs typeface="Aptos"/>
-              </a:defRPr>
-            </a:lvl5pPr>
-            <a:lvl6pPr algn="ctr">
-              <a:defRPr sz="1050" b="0">
-                <a:solidFill>
-                  <a:srgbClr val="C9D9E9"/>
-                </a:solidFill>
-                <a:latin typeface="Aptos"/>
-                <a:ea typeface="Aptos"/>
-                <a:cs typeface="Aptos"/>
-              </a:defRPr>
-            </a:lvl6pPr>
-            <a:lvl7pPr algn="ctr">
-              <a:defRPr sz="1050" b="0">
-                <a:solidFill>
-                  <a:srgbClr val="C9D9E9"/>
-                </a:solidFill>
-                <a:latin typeface="Aptos"/>
-                <a:ea typeface="Aptos"/>
-                <a:cs typeface="Aptos"/>
-              </a:defRPr>
-            </a:lvl7pPr>
-            <a:lvl8pPr algn="ctr">
-              <a:defRPr sz="1050" b="0">
-                <a:solidFill>
-                  <a:srgbClr val="C9D9E9"/>
-                </a:solidFill>
-                <a:latin typeface="Aptos"/>
-                <a:ea typeface="Aptos"/>
-                <a:cs typeface="Aptos"/>
-              </a:defRPr>
-            </a:lvl8pPr>
-            <a:lvl9pPr algn="ctr">
-              <a:defRPr sz="1050" b="0">
-                <a:solidFill>
-                  <a:srgbClr val="C9D9E9"/>
-                </a:solidFill>
-                <a:latin typeface="Aptos"/>
-                <a:ea typeface="Aptos"/>
-                <a:cs typeface="Aptos"/>
-              </a:defRPr>
-            </a:lvl9pPr>
-          </a:lstStyle>
-          <a:p>
-            <a:pPr algn="ctr">
-              <a:lnSpc>
-                <a:spcPct val="105000"/>
-              </a:lnSpc>
-              <a:buNone/>
-              <a:defRPr sz="1050" b="0">
-                <a:solidFill>
-                  <a:srgbClr val="C9D9E9"/>
-                </a:solidFill>
-                <a:latin typeface="Aptos"/>
-                <a:ea typeface="Aptos"/>
-                <a:cs typeface="Aptos"/>
-              </a:defRPr>
-            </a:pPr>
-            <a:r>
-              <a:rPr sz="1050" b="0">
-                <a:solidFill>
-                  <a:srgbClr val="C9D9E9"/>
-                </a:solidFill>
-                <a:latin typeface="Aptos"/>
-                <a:ea typeface="Aptos"/>
-                <a:cs typeface="Aptos"/>
-              </a:rPr>
-              <a:t>FastAPI +</a:t>
-            </a:r>
-          </a:p>
-          <a:p>
-            <a:pPr algn="ctr">
-              <a:lnSpc>
-                <a:spcPct val="105000"/>
-              </a:lnSpc>
-              <a:buNone/>
-              <a:defRPr sz="1050" b="0">
-                <a:solidFill>
-                  <a:srgbClr val="C9D9E9"/>
-                </a:solidFill>
-                <a:latin typeface="Aptos"/>
-                <a:ea typeface="Aptos"/>
-                <a:cs typeface="Aptos"/>
-              </a:defRPr>
-            </a:pPr>
-            <a:r>
-              <a:rPr sz="1050" b="0">
-                <a:solidFill>
-                  <a:srgbClr val="C9D9E9"/>
-                </a:solidFill>
-                <a:latin typeface="Aptos"/>
-                <a:ea typeface="Aptos"/>
-                <a:cs typeface="Aptos"/>
-              </a:rPr>
-              <a:t>Streamlit</a:t>
-            </a:r>
           </a:p>
         </p:txBody>
       </p:sp>
@@ -13415,6 +10471,2912 @@
                 <a:cs typeface="Aptos"/>
               </a:rPr>
               <a:t>03</a:t>
+            </a:r>
+          </a:p>
+        </p:txBody>
+      </p:sp>
+      <p:cxnSp>
+        <p:nvCxnSpPr>
+          <p:cNvPr id="38" name="Straight Arrow Connector 37">
+            <a:extLst>
+              <a:ext uri="{FF2B5EF4-FFF2-40B4-BE49-F238E27FC236}">
+                <a16:creationId xmlns:a16="http://schemas.microsoft.com/office/drawing/2014/main" id="{7BA13637-0E69-5DD3-D2AD-F4E530156E53}"/>
+              </a:ext>
+            </a:extLst>
+          </p:cNvPr>
+          <p:cNvCxnSpPr>
+            <a:stCxn id="60" idx="3"/>
+            <a:endCxn id="63" idx="1"/>
+          </p:cNvCxnSpPr>
+          <p:nvPr/>
+        </p:nvCxnSpPr>
+        <p:spPr>
+          <a:xfrm>
+            <a:off x="9315450" y="3819525"/>
+            <a:ext cx="609600" cy="0"/>
+          </a:xfrm>
+          <a:prstGeom prst="straightConnector1">
+            <a:avLst/>
+          </a:prstGeom>
+          <a:ln w="19050">
+            <a:solidFill>
+              <a:srgbClr val="0F8D9B"/>
+            </a:solidFill>
+            <a:prstDash val="solid"/>
+            <a:tailEnd type="arrow" w="sm" len="sm"/>
+          </a:ln>
+        </p:spPr>
+      </p:cxnSp>
+      <p:cxnSp>
+        <p:nvCxnSpPr>
+          <p:cNvPr id="39" name="Connector: Elbow 38">
+            <a:extLst>
+              <a:ext uri="{FF2B5EF4-FFF2-40B4-BE49-F238E27FC236}">
+                <a16:creationId xmlns:a16="http://schemas.microsoft.com/office/drawing/2014/main" id="{8FFBDD43-D329-0363-B93C-484A9BD4AE70}"/>
+              </a:ext>
+            </a:extLst>
+          </p:cNvPr>
+          <p:cNvCxnSpPr>
+            <a:stCxn id="55" idx="3"/>
+            <a:endCxn id="60" idx="1"/>
+          </p:cNvCxnSpPr>
+          <p:nvPr/>
+        </p:nvCxnSpPr>
+        <p:spPr>
+          <a:xfrm flipV="1">
+            <a:off x="7048500" y="3819525"/>
+            <a:ext cx="609600" cy="771525"/>
+          </a:xfrm>
+          <a:prstGeom prst="bentConnector3">
+            <a:avLst>
+              <a:gd name="adj1" fmla="val 50000"/>
+            </a:avLst>
+          </a:prstGeom>
+          <a:ln w="19050">
+            <a:solidFill>
+              <a:srgbClr val="0F8D9B"/>
+            </a:solidFill>
+            <a:prstDash val="solid"/>
+            <a:tailEnd type="arrow" w="sm" len="sm"/>
+          </a:ln>
+        </p:spPr>
+      </p:cxnSp>
+      <p:cxnSp>
+        <p:nvCxnSpPr>
+          <p:cNvPr id="40" name="Connector: Elbow 39">
+            <a:extLst>
+              <a:ext uri="{FF2B5EF4-FFF2-40B4-BE49-F238E27FC236}">
+                <a16:creationId xmlns:a16="http://schemas.microsoft.com/office/drawing/2014/main" id="{05F6B151-2906-11E0-10EE-47723F738863}"/>
+              </a:ext>
+            </a:extLst>
+          </p:cNvPr>
+          <p:cNvCxnSpPr>
+            <a:stCxn id="54" idx="3"/>
+            <a:endCxn id="60" idx="1"/>
+          </p:cNvCxnSpPr>
+          <p:nvPr/>
+        </p:nvCxnSpPr>
+        <p:spPr>
+          <a:xfrm>
+            <a:off x="7048500" y="3009900"/>
+            <a:ext cx="609600" cy="809625"/>
+          </a:xfrm>
+          <a:prstGeom prst="bentConnector3">
+            <a:avLst>
+              <a:gd name="adj1" fmla="val 50000"/>
+            </a:avLst>
+          </a:prstGeom>
+          <a:ln w="19050">
+            <a:solidFill>
+              <a:srgbClr val="0F8D9B"/>
+            </a:solidFill>
+            <a:prstDash val="solid"/>
+            <a:tailEnd type="arrow" w="sm" len="sm"/>
+          </a:ln>
+        </p:spPr>
+      </p:cxnSp>
+      <p:cxnSp>
+        <p:nvCxnSpPr>
+          <p:cNvPr id="41" name="Connector: Elbow 40">
+            <a:extLst>
+              <a:ext uri="{FF2B5EF4-FFF2-40B4-BE49-F238E27FC236}">
+                <a16:creationId xmlns:a16="http://schemas.microsoft.com/office/drawing/2014/main" id="{7E5DA4C8-23C4-9E69-5A31-837891C71E98}"/>
+              </a:ext>
+            </a:extLst>
+          </p:cNvPr>
+          <p:cNvCxnSpPr>
+            <a:stCxn id="51" idx="3"/>
+            <a:endCxn id="55" idx="1"/>
+          </p:cNvCxnSpPr>
+          <p:nvPr/>
+        </p:nvCxnSpPr>
+        <p:spPr>
+          <a:xfrm>
+            <a:off x="4724400" y="3819525"/>
+            <a:ext cx="666750" cy="771525"/>
+          </a:xfrm>
+          <a:prstGeom prst="bentConnector3">
+            <a:avLst>
+              <a:gd name="adj1" fmla="val 50000"/>
+            </a:avLst>
+          </a:prstGeom>
+          <a:ln w="19050">
+            <a:solidFill>
+              <a:srgbClr val="0F8D9B"/>
+            </a:solidFill>
+            <a:prstDash val="solid"/>
+            <a:tailEnd type="arrow" w="sm" len="sm"/>
+          </a:ln>
+        </p:spPr>
+      </p:cxnSp>
+      <p:cxnSp>
+        <p:nvCxnSpPr>
+          <p:cNvPr id="42" name="Connector: Elbow 41">
+            <a:extLst>
+              <a:ext uri="{FF2B5EF4-FFF2-40B4-BE49-F238E27FC236}">
+                <a16:creationId xmlns:a16="http://schemas.microsoft.com/office/drawing/2014/main" id="{BD1CFCAC-3DFD-47E9-D211-6D85A16C2948}"/>
+              </a:ext>
+            </a:extLst>
+          </p:cNvPr>
+          <p:cNvCxnSpPr>
+            <a:stCxn id="51" idx="3"/>
+            <a:endCxn id="54" idx="1"/>
+          </p:cNvCxnSpPr>
+          <p:nvPr/>
+        </p:nvCxnSpPr>
+        <p:spPr>
+          <a:xfrm flipV="1">
+            <a:off x="4724400" y="3009900"/>
+            <a:ext cx="666750" cy="809625"/>
+          </a:xfrm>
+          <a:prstGeom prst="bentConnector3">
+            <a:avLst>
+              <a:gd name="adj1" fmla="val 50000"/>
+            </a:avLst>
+          </a:prstGeom>
+          <a:ln w="19050">
+            <a:solidFill>
+              <a:srgbClr val="0F8D9B"/>
+            </a:solidFill>
+            <a:prstDash val="solid"/>
+            <a:tailEnd type="arrow" w="sm" len="sm"/>
+          </a:ln>
+        </p:spPr>
+      </p:cxnSp>
+      <p:cxnSp>
+        <p:nvCxnSpPr>
+          <p:cNvPr id="43" name="Connector: Elbow 42">
+            <a:extLst>
+              <a:ext uri="{FF2B5EF4-FFF2-40B4-BE49-F238E27FC236}">
+                <a16:creationId xmlns:a16="http://schemas.microsoft.com/office/drawing/2014/main" id="{43DAF161-FEA6-D04A-0D54-60B87A481BDD}"/>
+              </a:ext>
+            </a:extLst>
+          </p:cNvPr>
+          <p:cNvCxnSpPr>
+            <a:stCxn id="46" idx="3"/>
+            <a:endCxn id="51" idx="1"/>
+          </p:cNvCxnSpPr>
+          <p:nvPr/>
+        </p:nvCxnSpPr>
+        <p:spPr>
+          <a:xfrm flipV="1">
+            <a:off x="2419350" y="3819525"/>
+            <a:ext cx="685800" cy="676275"/>
+          </a:xfrm>
+          <a:prstGeom prst="bentConnector3">
+            <a:avLst>
+              <a:gd name="adj1" fmla="val 50000"/>
+            </a:avLst>
+          </a:prstGeom>
+          <a:ln w="19050">
+            <a:solidFill>
+              <a:srgbClr val="0F8D9B"/>
+            </a:solidFill>
+            <a:prstDash val="solid"/>
+            <a:tailEnd type="arrow" w="sm" len="sm"/>
+          </a:ln>
+        </p:spPr>
+      </p:cxnSp>
+      <p:cxnSp>
+        <p:nvCxnSpPr>
+          <p:cNvPr id="44" name="Connector: Elbow 43">
+            <a:extLst>
+              <a:ext uri="{FF2B5EF4-FFF2-40B4-BE49-F238E27FC236}">
+                <a16:creationId xmlns:a16="http://schemas.microsoft.com/office/drawing/2014/main" id="{9C630C80-7588-BABB-69CB-7253C7194C0A}"/>
+              </a:ext>
+            </a:extLst>
+          </p:cNvPr>
+          <p:cNvCxnSpPr>
+            <a:stCxn id="45" idx="3"/>
+            <a:endCxn id="51" idx="1"/>
+          </p:cNvCxnSpPr>
+          <p:nvPr/>
+        </p:nvCxnSpPr>
+        <p:spPr>
+          <a:xfrm>
+            <a:off x="2495550" y="3133725"/>
+            <a:ext cx="609600" cy="685800"/>
+          </a:xfrm>
+          <a:prstGeom prst="bentConnector3">
+            <a:avLst>
+              <a:gd name="adj1" fmla="val 50000"/>
+            </a:avLst>
+          </a:prstGeom>
+          <a:ln w="19050">
+            <a:solidFill>
+              <a:srgbClr val="0F8D9B"/>
+            </a:solidFill>
+            <a:prstDash val="solid"/>
+            <a:tailEnd type="arrow" w="sm" len="sm"/>
+          </a:ln>
+        </p:spPr>
+      </p:cxnSp>
+      <p:sp>
+        <p:nvSpPr>
+          <p:cNvPr id="45" name="newsapi">
+            <a:extLst>
+              <a:ext uri="{FF2B5EF4-FFF2-40B4-BE49-F238E27FC236}">
+                <a16:creationId xmlns:a16="http://schemas.microsoft.com/office/drawing/2014/main" id="{DCC9265B-DC00-6A48-02CA-29AB1B4B5C64}"/>
+              </a:ext>
+            </a:extLst>
+          </p:cNvPr>
+          <p:cNvSpPr>
+            <a:spLocks noGrp="1"/>
+          </p:cNvSpPr>
+          <p:nvPr/>
+        </p:nvSpPr>
+        <p:spPr>
+          <a:xfrm>
+            <a:off x="800100" y="2676525"/>
+            <a:ext cx="1695450" cy="914400"/>
+          </a:xfrm>
+          <a:prstGeom prst="roundRect">
+            <a:avLst>
+              <a:gd name="adj" fmla="val 14583"/>
+            </a:avLst>
+          </a:prstGeom>
+          <a:solidFill>
+            <a:srgbClr val="FFFFFF"/>
+          </a:solidFill>
+          <a:ln w="9525">
+            <a:solidFill>
+              <a:srgbClr val="C9D5E4"/>
+            </a:solidFill>
+            <a:prstDash val="solid"/>
+          </a:ln>
+        </p:spPr>
+      </p:sp>
+      <p:sp>
+        <p:nvSpPr>
+          <p:cNvPr id="46" name="socialcsv">
+            <a:extLst>
+              <a:ext uri="{FF2B5EF4-FFF2-40B4-BE49-F238E27FC236}">
+                <a16:creationId xmlns:a16="http://schemas.microsoft.com/office/drawing/2014/main" id="{C5087106-A223-86B3-6574-72916CC4207B}"/>
+              </a:ext>
+            </a:extLst>
+          </p:cNvPr>
+          <p:cNvSpPr>
+            <a:spLocks noGrp="1"/>
+          </p:cNvSpPr>
+          <p:nvPr/>
+        </p:nvSpPr>
+        <p:spPr>
+          <a:xfrm>
+            <a:off x="723900" y="4038600"/>
+            <a:ext cx="1695450" cy="914400"/>
+          </a:xfrm>
+          <a:prstGeom prst="roundRect">
+            <a:avLst>
+              <a:gd name="adj" fmla="val 14583"/>
+            </a:avLst>
+          </a:prstGeom>
+          <a:solidFill>
+            <a:srgbClr val="FFFFFF"/>
+          </a:solidFill>
+          <a:ln w="9525">
+            <a:solidFill>
+              <a:srgbClr val="C9D5E4"/>
+            </a:solidFill>
+            <a:prstDash val="solid"/>
+          </a:ln>
+        </p:spPr>
+      </p:sp>
+      <p:sp>
+        <p:nvSpPr>
+          <p:cNvPr id="47" name="Rectangle 46">
+            <a:extLst>
+              <a:ext uri="{FF2B5EF4-FFF2-40B4-BE49-F238E27FC236}">
+                <a16:creationId xmlns:a16="http://schemas.microsoft.com/office/drawing/2014/main" id="{B20CB60E-3039-A45B-C72D-A10239BB9250}"/>
+              </a:ext>
+            </a:extLst>
+          </p:cNvPr>
+          <p:cNvSpPr>
+            <a:spLocks noGrp="1"/>
+          </p:cNvSpPr>
+          <p:nvPr/>
+        </p:nvSpPr>
+        <p:spPr>
+          <a:xfrm>
+            <a:off x="895350" y="2857500"/>
+            <a:ext cx="1314450" cy="228600"/>
+          </a:xfrm>
+          <a:prstGeom prst="rect">
+            <a:avLst/>
+          </a:prstGeom>
+          <a:noFill/>
+          <a:ln w="0">
+            <a:noFill/>
+            <a:prstDash val="solid"/>
+          </a:ln>
+        </p:spPr>
+        <p:txBody>
+          <a:bodyPr wrap="square" lIns="0" tIns="0" rIns="0" bIns="0" anchor="t">
+            <a:normAutofit fontScale="98203" lnSpcReduction="10000"/>
+          </a:bodyPr>
+          <a:lstStyle>
+            <a:defPPr algn="ctr">
+              <a:defRPr sz="1575" b="1">
+                <a:solidFill>
+                  <a:srgbClr val="071A33"/>
+                </a:solidFill>
+                <a:latin typeface="Aptos"/>
+                <a:ea typeface="Aptos"/>
+                <a:cs typeface="Aptos"/>
+              </a:defRPr>
+            </a:defPPr>
+            <a:lvl1pPr algn="ctr">
+              <a:defRPr sz="1575" b="1">
+                <a:solidFill>
+                  <a:srgbClr val="071A33"/>
+                </a:solidFill>
+                <a:latin typeface="Aptos"/>
+                <a:ea typeface="Aptos"/>
+                <a:cs typeface="Aptos"/>
+              </a:defRPr>
+            </a:lvl1pPr>
+            <a:lvl2pPr algn="ctr">
+              <a:defRPr sz="1575" b="1">
+                <a:solidFill>
+                  <a:srgbClr val="071A33"/>
+                </a:solidFill>
+                <a:latin typeface="Aptos"/>
+                <a:ea typeface="Aptos"/>
+                <a:cs typeface="Aptos"/>
+              </a:defRPr>
+            </a:lvl2pPr>
+            <a:lvl3pPr algn="ctr">
+              <a:defRPr sz="1575" b="1">
+                <a:solidFill>
+                  <a:srgbClr val="071A33"/>
+                </a:solidFill>
+                <a:latin typeface="Aptos"/>
+                <a:ea typeface="Aptos"/>
+                <a:cs typeface="Aptos"/>
+              </a:defRPr>
+            </a:lvl3pPr>
+            <a:lvl4pPr algn="ctr">
+              <a:defRPr sz="1575" b="1">
+                <a:solidFill>
+                  <a:srgbClr val="071A33"/>
+                </a:solidFill>
+                <a:latin typeface="Aptos"/>
+                <a:ea typeface="Aptos"/>
+                <a:cs typeface="Aptos"/>
+              </a:defRPr>
+            </a:lvl4pPr>
+            <a:lvl5pPr algn="ctr">
+              <a:defRPr sz="1575" b="1">
+                <a:solidFill>
+                  <a:srgbClr val="071A33"/>
+                </a:solidFill>
+                <a:latin typeface="Aptos"/>
+                <a:ea typeface="Aptos"/>
+                <a:cs typeface="Aptos"/>
+              </a:defRPr>
+            </a:lvl5pPr>
+            <a:lvl6pPr algn="ctr">
+              <a:defRPr sz="1575" b="1">
+                <a:solidFill>
+                  <a:srgbClr val="071A33"/>
+                </a:solidFill>
+                <a:latin typeface="Aptos"/>
+                <a:ea typeface="Aptos"/>
+                <a:cs typeface="Aptos"/>
+              </a:defRPr>
+            </a:lvl6pPr>
+            <a:lvl7pPr algn="ctr">
+              <a:defRPr sz="1575" b="1">
+                <a:solidFill>
+                  <a:srgbClr val="071A33"/>
+                </a:solidFill>
+                <a:latin typeface="Aptos"/>
+                <a:ea typeface="Aptos"/>
+                <a:cs typeface="Aptos"/>
+              </a:defRPr>
+            </a:lvl7pPr>
+            <a:lvl8pPr algn="ctr">
+              <a:defRPr sz="1575" b="1">
+                <a:solidFill>
+                  <a:srgbClr val="071A33"/>
+                </a:solidFill>
+                <a:latin typeface="Aptos"/>
+                <a:ea typeface="Aptos"/>
+                <a:cs typeface="Aptos"/>
+              </a:defRPr>
+            </a:lvl8pPr>
+            <a:lvl9pPr algn="ctr">
+              <a:defRPr sz="1575" b="1">
+                <a:solidFill>
+                  <a:srgbClr val="071A33"/>
+                </a:solidFill>
+                <a:latin typeface="Aptos"/>
+                <a:ea typeface="Aptos"/>
+                <a:cs typeface="Aptos"/>
+              </a:defRPr>
+            </a:lvl9pPr>
+          </a:lstStyle>
+          <a:p>
+            <a:pPr algn="ctr">
+              <a:lnSpc>
+                <a:spcPct val="105000"/>
+              </a:lnSpc>
+              <a:buNone/>
+              <a:defRPr sz="1575" b="1">
+                <a:solidFill>
+                  <a:srgbClr val="071A33"/>
+                </a:solidFill>
+                <a:latin typeface="Aptos"/>
+                <a:ea typeface="Aptos"/>
+                <a:cs typeface="Aptos"/>
+              </a:defRPr>
+            </a:pPr>
+            <a:r>
+              <a:rPr sz="1575" b="1" dirty="0" err="1">
+                <a:solidFill>
+                  <a:srgbClr val="071A33"/>
+                </a:solidFill>
+                <a:latin typeface="Aptos"/>
+                <a:ea typeface="Aptos"/>
+                <a:cs typeface="Aptos"/>
+              </a:rPr>
+              <a:t>NewsAPI</a:t>
+            </a:r>
+            <a:endParaRPr sz="1575" b="1" dirty="0">
+              <a:solidFill>
+                <a:srgbClr val="071A33"/>
+              </a:solidFill>
+              <a:latin typeface="Aptos"/>
+              <a:ea typeface="Aptos"/>
+              <a:cs typeface="Aptos"/>
+            </a:endParaRPr>
+          </a:p>
+        </p:txBody>
+      </p:sp>
+      <p:sp>
+        <p:nvSpPr>
+          <p:cNvPr id="48" name="Rectangle 47">
+            <a:extLst>
+              <a:ext uri="{FF2B5EF4-FFF2-40B4-BE49-F238E27FC236}">
+                <a16:creationId xmlns:a16="http://schemas.microsoft.com/office/drawing/2014/main" id="{9F139A28-0624-DF92-4420-E00B502C41BF}"/>
+              </a:ext>
+            </a:extLst>
+          </p:cNvPr>
+          <p:cNvSpPr>
+            <a:spLocks noGrp="1"/>
+          </p:cNvSpPr>
+          <p:nvPr/>
+        </p:nvSpPr>
+        <p:spPr>
+          <a:xfrm>
+            <a:off x="895350" y="3171825"/>
+            <a:ext cx="1314450" cy="190500"/>
+          </a:xfrm>
+          <a:prstGeom prst="rect">
+            <a:avLst/>
+          </a:prstGeom>
+          <a:noFill/>
+          <a:ln w="0">
+            <a:noFill/>
+            <a:prstDash val="solid"/>
+          </a:ln>
+        </p:spPr>
+        <p:txBody>
+          <a:bodyPr wrap="square" lIns="0" tIns="0" rIns="0" bIns="0" anchor="t">
+            <a:normAutofit/>
+          </a:bodyPr>
+          <a:lstStyle>
+            <a:defPPr algn="ctr">
+              <a:defRPr sz="1050" b="0">
+                <a:solidFill>
+                  <a:srgbClr val="53657A"/>
+                </a:solidFill>
+                <a:latin typeface="Aptos"/>
+                <a:ea typeface="Aptos"/>
+                <a:cs typeface="Aptos"/>
+              </a:defRPr>
+            </a:defPPr>
+            <a:lvl1pPr algn="ctr">
+              <a:defRPr sz="1050" b="0">
+                <a:solidFill>
+                  <a:srgbClr val="53657A"/>
+                </a:solidFill>
+                <a:latin typeface="Aptos"/>
+                <a:ea typeface="Aptos"/>
+                <a:cs typeface="Aptos"/>
+              </a:defRPr>
+            </a:lvl1pPr>
+            <a:lvl2pPr algn="ctr">
+              <a:defRPr sz="1050" b="0">
+                <a:solidFill>
+                  <a:srgbClr val="53657A"/>
+                </a:solidFill>
+                <a:latin typeface="Aptos"/>
+                <a:ea typeface="Aptos"/>
+                <a:cs typeface="Aptos"/>
+              </a:defRPr>
+            </a:lvl2pPr>
+            <a:lvl3pPr algn="ctr">
+              <a:defRPr sz="1050" b="0">
+                <a:solidFill>
+                  <a:srgbClr val="53657A"/>
+                </a:solidFill>
+                <a:latin typeface="Aptos"/>
+                <a:ea typeface="Aptos"/>
+                <a:cs typeface="Aptos"/>
+              </a:defRPr>
+            </a:lvl3pPr>
+            <a:lvl4pPr algn="ctr">
+              <a:defRPr sz="1050" b="0">
+                <a:solidFill>
+                  <a:srgbClr val="53657A"/>
+                </a:solidFill>
+                <a:latin typeface="Aptos"/>
+                <a:ea typeface="Aptos"/>
+                <a:cs typeface="Aptos"/>
+              </a:defRPr>
+            </a:lvl4pPr>
+            <a:lvl5pPr algn="ctr">
+              <a:defRPr sz="1050" b="0">
+                <a:solidFill>
+                  <a:srgbClr val="53657A"/>
+                </a:solidFill>
+                <a:latin typeface="Aptos"/>
+                <a:ea typeface="Aptos"/>
+                <a:cs typeface="Aptos"/>
+              </a:defRPr>
+            </a:lvl5pPr>
+            <a:lvl6pPr algn="ctr">
+              <a:defRPr sz="1050" b="0">
+                <a:solidFill>
+                  <a:srgbClr val="53657A"/>
+                </a:solidFill>
+                <a:latin typeface="Aptos"/>
+                <a:ea typeface="Aptos"/>
+                <a:cs typeface="Aptos"/>
+              </a:defRPr>
+            </a:lvl6pPr>
+            <a:lvl7pPr algn="ctr">
+              <a:defRPr sz="1050" b="0">
+                <a:solidFill>
+                  <a:srgbClr val="53657A"/>
+                </a:solidFill>
+                <a:latin typeface="Aptos"/>
+                <a:ea typeface="Aptos"/>
+                <a:cs typeface="Aptos"/>
+              </a:defRPr>
+            </a:lvl7pPr>
+            <a:lvl8pPr algn="ctr">
+              <a:defRPr sz="1050" b="0">
+                <a:solidFill>
+                  <a:srgbClr val="53657A"/>
+                </a:solidFill>
+                <a:latin typeface="Aptos"/>
+                <a:ea typeface="Aptos"/>
+                <a:cs typeface="Aptos"/>
+              </a:defRPr>
+            </a:lvl8pPr>
+            <a:lvl9pPr algn="ctr">
+              <a:defRPr sz="1050" b="0">
+                <a:solidFill>
+                  <a:srgbClr val="53657A"/>
+                </a:solidFill>
+                <a:latin typeface="Aptos"/>
+                <a:ea typeface="Aptos"/>
+                <a:cs typeface="Aptos"/>
+              </a:defRPr>
+            </a:lvl9pPr>
+          </a:lstStyle>
+          <a:p>
+            <a:pPr algn="ctr">
+              <a:lnSpc>
+                <a:spcPct val="105000"/>
+              </a:lnSpc>
+              <a:buNone/>
+              <a:defRPr sz="1050" b="0">
+                <a:solidFill>
+                  <a:srgbClr val="53657A"/>
+                </a:solidFill>
+                <a:latin typeface="Aptos"/>
+                <a:ea typeface="Aptos"/>
+                <a:cs typeface="Aptos"/>
+              </a:defRPr>
+            </a:pPr>
+            <a:r>
+              <a:rPr sz="1050" b="0">
+                <a:solidFill>
+                  <a:srgbClr val="53657A"/>
+                </a:solidFill>
+                <a:latin typeface="Aptos"/>
+                <a:ea typeface="Aptos"/>
+                <a:cs typeface="Aptos"/>
+              </a:rPr>
+              <a:t>Live company news</a:t>
+            </a:r>
+          </a:p>
+        </p:txBody>
+      </p:sp>
+      <p:sp>
+        <p:nvSpPr>
+          <p:cNvPr id="49" name="Rectangle 48">
+            <a:extLst>
+              <a:ext uri="{FF2B5EF4-FFF2-40B4-BE49-F238E27FC236}">
+                <a16:creationId xmlns:a16="http://schemas.microsoft.com/office/drawing/2014/main" id="{C5ACF43E-D427-8761-3C9E-FC9D4FCEA41B}"/>
+              </a:ext>
+            </a:extLst>
+          </p:cNvPr>
+          <p:cNvSpPr>
+            <a:spLocks noGrp="1"/>
+          </p:cNvSpPr>
+          <p:nvPr/>
+        </p:nvSpPr>
+        <p:spPr>
+          <a:xfrm>
+            <a:off x="895350" y="4229100"/>
+            <a:ext cx="1314450" cy="228600"/>
+          </a:xfrm>
+          <a:prstGeom prst="rect">
+            <a:avLst/>
+          </a:prstGeom>
+          <a:noFill/>
+          <a:ln w="0">
+            <a:noFill/>
+            <a:prstDash val="solid"/>
+          </a:ln>
+        </p:spPr>
+        <p:txBody>
+          <a:bodyPr wrap="square" lIns="0" tIns="0" rIns="0" bIns="0" anchor="t">
+            <a:normAutofit fontScale="98203" lnSpcReduction="10000"/>
+          </a:bodyPr>
+          <a:lstStyle>
+            <a:defPPr algn="ctr">
+              <a:defRPr sz="1575" b="1">
+                <a:solidFill>
+                  <a:srgbClr val="071A33"/>
+                </a:solidFill>
+                <a:latin typeface="Aptos"/>
+                <a:ea typeface="Aptos"/>
+                <a:cs typeface="Aptos"/>
+              </a:defRPr>
+            </a:defPPr>
+            <a:lvl1pPr algn="ctr">
+              <a:defRPr sz="1575" b="1">
+                <a:solidFill>
+                  <a:srgbClr val="071A33"/>
+                </a:solidFill>
+                <a:latin typeface="Aptos"/>
+                <a:ea typeface="Aptos"/>
+                <a:cs typeface="Aptos"/>
+              </a:defRPr>
+            </a:lvl1pPr>
+            <a:lvl2pPr algn="ctr">
+              <a:defRPr sz="1575" b="1">
+                <a:solidFill>
+                  <a:srgbClr val="071A33"/>
+                </a:solidFill>
+                <a:latin typeface="Aptos"/>
+                <a:ea typeface="Aptos"/>
+                <a:cs typeface="Aptos"/>
+              </a:defRPr>
+            </a:lvl2pPr>
+            <a:lvl3pPr algn="ctr">
+              <a:defRPr sz="1575" b="1">
+                <a:solidFill>
+                  <a:srgbClr val="071A33"/>
+                </a:solidFill>
+                <a:latin typeface="Aptos"/>
+                <a:ea typeface="Aptos"/>
+                <a:cs typeface="Aptos"/>
+              </a:defRPr>
+            </a:lvl3pPr>
+            <a:lvl4pPr algn="ctr">
+              <a:defRPr sz="1575" b="1">
+                <a:solidFill>
+                  <a:srgbClr val="071A33"/>
+                </a:solidFill>
+                <a:latin typeface="Aptos"/>
+                <a:ea typeface="Aptos"/>
+                <a:cs typeface="Aptos"/>
+              </a:defRPr>
+            </a:lvl4pPr>
+            <a:lvl5pPr algn="ctr">
+              <a:defRPr sz="1575" b="1">
+                <a:solidFill>
+                  <a:srgbClr val="071A33"/>
+                </a:solidFill>
+                <a:latin typeface="Aptos"/>
+                <a:ea typeface="Aptos"/>
+                <a:cs typeface="Aptos"/>
+              </a:defRPr>
+            </a:lvl5pPr>
+            <a:lvl6pPr algn="ctr">
+              <a:defRPr sz="1575" b="1">
+                <a:solidFill>
+                  <a:srgbClr val="071A33"/>
+                </a:solidFill>
+                <a:latin typeface="Aptos"/>
+                <a:ea typeface="Aptos"/>
+                <a:cs typeface="Aptos"/>
+              </a:defRPr>
+            </a:lvl6pPr>
+            <a:lvl7pPr algn="ctr">
+              <a:defRPr sz="1575" b="1">
+                <a:solidFill>
+                  <a:srgbClr val="071A33"/>
+                </a:solidFill>
+                <a:latin typeface="Aptos"/>
+                <a:ea typeface="Aptos"/>
+                <a:cs typeface="Aptos"/>
+              </a:defRPr>
+            </a:lvl7pPr>
+            <a:lvl8pPr algn="ctr">
+              <a:defRPr sz="1575" b="1">
+                <a:solidFill>
+                  <a:srgbClr val="071A33"/>
+                </a:solidFill>
+                <a:latin typeface="Aptos"/>
+                <a:ea typeface="Aptos"/>
+                <a:cs typeface="Aptos"/>
+              </a:defRPr>
+            </a:lvl8pPr>
+            <a:lvl9pPr algn="ctr">
+              <a:defRPr sz="1575" b="1">
+                <a:solidFill>
+                  <a:srgbClr val="071A33"/>
+                </a:solidFill>
+                <a:latin typeface="Aptos"/>
+                <a:ea typeface="Aptos"/>
+                <a:cs typeface="Aptos"/>
+              </a:defRPr>
+            </a:lvl9pPr>
+          </a:lstStyle>
+          <a:p>
+            <a:pPr algn="ctr">
+              <a:lnSpc>
+                <a:spcPct val="105000"/>
+              </a:lnSpc>
+              <a:buNone/>
+              <a:defRPr sz="1575" b="1">
+                <a:solidFill>
+                  <a:srgbClr val="071A33"/>
+                </a:solidFill>
+                <a:latin typeface="Aptos"/>
+                <a:ea typeface="Aptos"/>
+                <a:cs typeface="Aptos"/>
+              </a:defRPr>
+            </a:pPr>
+            <a:r>
+              <a:rPr sz="1575" b="1">
+                <a:solidFill>
+                  <a:srgbClr val="071A33"/>
+                </a:solidFill>
+                <a:latin typeface="Aptos"/>
+                <a:ea typeface="Aptos"/>
+                <a:cs typeface="Aptos"/>
+              </a:rPr>
+              <a:t>Social CSV</a:t>
+            </a:r>
+          </a:p>
+        </p:txBody>
+      </p:sp>
+      <p:sp>
+        <p:nvSpPr>
+          <p:cNvPr id="50" name="Rectangle 49">
+            <a:extLst>
+              <a:ext uri="{FF2B5EF4-FFF2-40B4-BE49-F238E27FC236}">
+                <a16:creationId xmlns:a16="http://schemas.microsoft.com/office/drawing/2014/main" id="{59857361-FB15-28FC-7DBF-2C0B6A984C3A}"/>
+              </a:ext>
+            </a:extLst>
+          </p:cNvPr>
+          <p:cNvSpPr>
+            <a:spLocks noGrp="1"/>
+          </p:cNvSpPr>
+          <p:nvPr/>
+        </p:nvSpPr>
+        <p:spPr>
+          <a:xfrm>
+            <a:off x="895350" y="4543425"/>
+            <a:ext cx="1314450" cy="190500"/>
+          </a:xfrm>
+          <a:prstGeom prst="rect">
+            <a:avLst/>
+          </a:prstGeom>
+          <a:noFill/>
+          <a:ln w="0">
+            <a:noFill/>
+            <a:prstDash val="solid"/>
+          </a:ln>
+        </p:spPr>
+        <p:txBody>
+          <a:bodyPr wrap="square" lIns="0" tIns="0" rIns="0" bIns="0" anchor="t">
+            <a:normAutofit/>
+          </a:bodyPr>
+          <a:lstStyle>
+            <a:defPPr algn="ctr">
+              <a:defRPr sz="1050" b="0">
+                <a:solidFill>
+                  <a:srgbClr val="53657A"/>
+                </a:solidFill>
+                <a:latin typeface="Aptos"/>
+                <a:ea typeface="Aptos"/>
+                <a:cs typeface="Aptos"/>
+              </a:defRPr>
+            </a:defPPr>
+            <a:lvl1pPr algn="ctr">
+              <a:defRPr sz="1050" b="0">
+                <a:solidFill>
+                  <a:srgbClr val="53657A"/>
+                </a:solidFill>
+                <a:latin typeface="Aptos"/>
+                <a:ea typeface="Aptos"/>
+                <a:cs typeface="Aptos"/>
+              </a:defRPr>
+            </a:lvl1pPr>
+            <a:lvl2pPr algn="ctr">
+              <a:defRPr sz="1050" b="0">
+                <a:solidFill>
+                  <a:srgbClr val="53657A"/>
+                </a:solidFill>
+                <a:latin typeface="Aptos"/>
+                <a:ea typeface="Aptos"/>
+                <a:cs typeface="Aptos"/>
+              </a:defRPr>
+            </a:lvl2pPr>
+            <a:lvl3pPr algn="ctr">
+              <a:defRPr sz="1050" b="0">
+                <a:solidFill>
+                  <a:srgbClr val="53657A"/>
+                </a:solidFill>
+                <a:latin typeface="Aptos"/>
+                <a:ea typeface="Aptos"/>
+                <a:cs typeface="Aptos"/>
+              </a:defRPr>
+            </a:lvl3pPr>
+            <a:lvl4pPr algn="ctr">
+              <a:defRPr sz="1050" b="0">
+                <a:solidFill>
+                  <a:srgbClr val="53657A"/>
+                </a:solidFill>
+                <a:latin typeface="Aptos"/>
+                <a:ea typeface="Aptos"/>
+                <a:cs typeface="Aptos"/>
+              </a:defRPr>
+            </a:lvl4pPr>
+            <a:lvl5pPr algn="ctr">
+              <a:defRPr sz="1050" b="0">
+                <a:solidFill>
+                  <a:srgbClr val="53657A"/>
+                </a:solidFill>
+                <a:latin typeface="Aptos"/>
+                <a:ea typeface="Aptos"/>
+                <a:cs typeface="Aptos"/>
+              </a:defRPr>
+            </a:lvl5pPr>
+            <a:lvl6pPr algn="ctr">
+              <a:defRPr sz="1050" b="0">
+                <a:solidFill>
+                  <a:srgbClr val="53657A"/>
+                </a:solidFill>
+                <a:latin typeface="Aptos"/>
+                <a:ea typeface="Aptos"/>
+                <a:cs typeface="Aptos"/>
+              </a:defRPr>
+            </a:lvl6pPr>
+            <a:lvl7pPr algn="ctr">
+              <a:defRPr sz="1050" b="0">
+                <a:solidFill>
+                  <a:srgbClr val="53657A"/>
+                </a:solidFill>
+                <a:latin typeface="Aptos"/>
+                <a:ea typeface="Aptos"/>
+                <a:cs typeface="Aptos"/>
+              </a:defRPr>
+            </a:lvl7pPr>
+            <a:lvl8pPr algn="ctr">
+              <a:defRPr sz="1050" b="0">
+                <a:solidFill>
+                  <a:srgbClr val="53657A"/>
+                </a:solidFill>
+                <a:latin typeface="Aptos"/>
+                <a:ea typeface="Aptos"/>
+                <a:cs typeface="Aptos"/>
+              </a:defRPr>
+            </a:lvl8pPr>
+            <a:lvl9pPr algn="ctr">
+              <a:defRPr sz="1050" b="0">
+                <a:solidFill>
+                  <a:srgbClr val="53657A"/>
+                </a:solidFill>
+                <a:latin typeface="Aptos"/>
+                <a:ea typeface="Aptos"/>
+                <a:cs typeface="Aptos"/>
+              </a:defRPr>
+            </a:lvl9pPr>
+          </a:lstStyle>
+          <a:p>
+            <a:pPr algn="ctr">
+              <a:lnSpc>
+                <a:spcPct val="105000"/>
+              </a:lnSpc>
+              <a:buNone/>
+              <a:defRPr sz="1050" b="0">
+                <a:solidFill>
+                  <a:srgbClr val="53657A"/>
+                </a:solidFill>
+                <a:latin typeface="Aptos"/>
+                <a:ea typeface="Aptos"/>
+                <a:cs typeface="Aptos"/>
+              </a:defRPr>
+            </a:pPr>
+            <a:r>
+              <a:rPr sz="1050" b="0">
+                <a:solidFill>
+                  <a:srgbClr val="53657A"/>
+                </a:solidFill>
+                <a:latin typeface="Aptos"/>
+                <a:ea typeface="Aptos"/>
+                <a:cs typeface="Aptos"/>
+              </a:rPr>
+              <a:t>Scenario posts</a:t>
+            </a:r>
+          </a:p>
+        </p:txBody>
+      </p:sp>
+      <p:sp>
+        <p:nvSpPr>
+          <p:cNvPr id="51" name="ingestion">
+            <a:extLst>
+              <a:ext uri="{FF2B5EF4-FFF2-40B4-BE49-F238E27FC236}">
+                <a16:creationId xmlns:a16="http://schemas.microsoft.com/office/drawing/2014/main" id="{C2ECAEBA-60C6-8497-E8C6-7A7283613F9A}"/>
+              </a:ext>
+            </a:extLst>
+          </p:cNvPr>
+          <p:cNvSpPr>
+            <a:spLocks noGrp="1"/>
+          </p:cNvSpPr>
+          <p:nvPr/>
+        </p:nvSpPr>
+        <p:spPr>
+          <a:xfrm>
+            <a:off x="3105150" y="3333750"/>
+            <a:ext cx="1619250" cy="971550"/>
+          </a:xfrm>
+          <a:prstGeom prst="roundRect">
+            <a:avLst>
+              <a:gd name="adj" fmla="val 13725"/>
+            </a:avLst>
+          </a:prstGeom>
+          <a:solidFill>
+            <a:srgbClr val="DDF6F8"/>
+          </a:solidFill>
+          <a:ln w="9525">
+            <a:solidFill>
+              <a:srgbClr val="A7DFE6"/>
+            </a:solidFill>
+            <a:prstDash val="solid"/>
+          </a:ln>
+        </p:spPr>
+      </p:sp>
+      <p:sp>
+        <p:nvSpPr>
+          <p:cNvPr id="52" name="Rectangle 51">
+            <a:extLst>
+              <a:ext uri="{FF2B5EF4-FFF2-40B4-BE49-F238E27FC236}">
+                <a16:creationId xmlns:a16="http://schemas.microsoft.com/office/drawing/2014/main" id="{09194022-4C74-D856-B4AD-060C810A5285}"/>
+              </a:ext>
+            </a:extLst>
+          </p:cNvPr>
+          <p:cNvSpPr>
+            <a:spLocks noGrp="1"/>
+          </p:cNvSpPr>
+          <p:nvPr/>
+        </p:nvSpPr>
+        <p:spPr>
+          <a:xfrm>
+            <a:off x="3276600" y="3552825"/>
+            <a:ext cx="1276350" cy="228600"/>
+          </a:xfrm>
+          <a:prstGeom prst="rect">
+            <a:avLst/>
+          </a:prstGeom>
+          <a:noFill/>
+          <a:ln w="0">
+            <a:noFill/>
+            <a:prstDash val="solid"/>
+          </a:ln>
+        </p:spPr>
+        <p:txBody>
+          <a:bodyPr wrap="square" lIns="0" tIns="0" rIns="0" bIns="0" anchor="t">
+            <a:normAutofit/>
+          </a:bodyPr>
+          <a:lstStyle>
+            <a:defPPr algn="ctr">
+              <a:defRPr sz="1425" b="1">
+                <a:solidFill>
+                  <a:srgbClr val="071A33"/>
+                </a:solidFill>
+                <a:latin typeface="Aptos"/>
+                <a:ea typeface="Aptos"/>
+                <a:cs typeface="Aptos"/>
+              </a:defRPr>
+            </a:defPPr>
+            <a:lvl1pPr algn="ctr">
+              <a:defRPr sz="1425" b="1">
+                <a:solidFill>
+                  <a:srgbClr val="071A33"/>
+                </a:solidFill>
+                <a:latin typeface="Aptos"/>
+                <a:ea typeface="Aptos"/>
+                <a:cs typeface="Aptos"/>
+              </a:defRPr>
+            </a:lvl1pPr>
+            <a:lvl2pPr algn="ctr">
+              <a:defRPr sz="1425" b="1">
+                <a:solidFill>
+                  <a:srgbClr val="071A33"/>
+                </a:solidFill>
+                <a:latin typeface="Aptos"/>
+                <a:ea typeface="Aptos"/>
+                <a:cs typeface="Aptos"/>
+              </a:defRPr>
+            </a:lvl2pPr>
+            <a:lvl3pPr algn="ctr">
+              <a:defRPr sz="1425" b="1">
+                <a:solidFill>
+                  <a:srgbClr val="071A33"/>
+                </a:solidFill>
+                <a:latin typeface="Aptos"/>
+                <a:ea typeface="Aptos"/>
+                <a:cs typeface="Aptos"/>
+              </a:defRPr>
+            </a:lvl3pPr>
+            <a:lvl4pPr algn="ctr">
+              <a:defRPr sz="1425" b="1">
+                <a:solidFill>
+                  <a:srgbClr val="071A33"/>
+                </a:solidFill>
+                <a:latin typeface="Aptos"/>
+                <a:ea typeface="Aptos"/>
+                <a:cs typeface="Aptos"/>
+              </a:defRPr>
+            </a:lvl4pPr>
+            <a:lvl5pPr algn="ctr">
+              <a:defRPr sz="1425" b="1">
+                <a:solidFill>
+                  <a:srgbClr val="071A33"/>
+                </a:solidFill>
+                <a:latin typeface="Aptos"/>
+                <a:ea typeface="Aptos"/>
+                <a:cs typeface="Aptos"/>
+              </a:defRPr>
+            </a:lvl5pPr>
+            <a:lvl6pPr algn="ctr">
+              <a:defRPr sz="1425" b="1">
+                <a:solidFill>
+                  <a:srgbClr val="071A33"/>
+                </a:solidFill>
+                <a:latin typeface="Aptos"/>
+                <a:ea typeface="Aptos"/>
+                <a:cs typeface="Aptos"/>
+              </a:defRPr>
+            </a:lvl6pPr>
+            <a:lvl7pPr algn="ctr">
+              <a:defRPr sz="1425" b="1">
+                <a:solidFill>
+                  <a:srgbClr val="071A33"/>
+                </a:solidFill>
+                <a:latin typeface="Aptos"/>
+                <a:ea typeface="Aptos"/>
+                <a:cs typeface="Aptos"/>
+              </a:defRPr>
+            </a:lvl7pPr>
+            <a:lvl8pPr algn="ctr">
+              <a:defRPr sz="1425" b="1">
+                <a:solidFill>
+                  <a:srgbClr val="071A33"/>
+                </a:solidFill>
+                <a:latin typeface="Aptos"/>
+                <a:ea typeface="Aptos"/>
+                <a:cs typeface="Aptos"/>
+              </a:defRPr>
+            </a:lvl8pPr>
+            <a:lvl9pPr algn="ctr">
+              <a:defRPr sz="1425" b="1">
+                <a:solidFill>
+                  <a:srgbClr val="071A33"/>
+                </a:solidFill>
+                <a:latin typeface="Aptos"/>
+                <a:ea typeface="Aptos"/>
+                <a:cs typeface="Aptos"/>
+              </a:defRPr>
+            </a:lvl9pPr>
+          </a:lstStyle>
+          <a:p>
+            <a:pPr algn="ctr">
+              <a:lnSpc>
+                <a:spcPct val="105000"/>
+              </a:lnSpc>
+              <a:buNone/>
+              <a:defRPr sz="1425" b="1">
+                <a:solidFill>
+                  <a:srgbClr val="071A33"/>
+                </a:solidFill>
+                <a:latin typeface="Aptos"/>
+                <a:ea typeface="Aptos"/>
+                <a:cs typeface="Aptos"/>
+              </a:defRPr>
+            </a:pPr>
+            <a:r>
+              <a:rPr sz="1425" b="1">
+                <a:solidFill>
+                  <a:srgbClr val="071A33"/>
+                </a:solidFill>
+                <a:latin typeface="Aptos"/>
+                <a:ea typeface="Aptos"/>
+                <a:cs typeface="Aptos"/>
+              </a:rPr>
+              <a:t>Ingestion layer</a:t>
+            </a:r>
+          </a:p>
+        </p:txBody>
+      </p:sp>
+      <p:sp>
+        <p:nvSpPr>
+          <p:cNvPr id="53" name="Rectangle 52">
+            <a:extLst>
+              <a:ext uri="{FF2B5EF4-FFF2-40B4-BE49-F238E27FC236}">
+                <a16:creationId xmlns:a16="http://schemas.microsoft.com/office/drawing/2014/main" id="{0872B988-66EA-6254-D941-9F2284234CAB}"/>
+              </a:ext>
+            </a:extLst>
+          </p:cNvPr>
+          <p:cNvSpPr>
+            <a:spLocks noGrp="1"/>
+          </p:cNvSpPr>
+          <p:nvPr/>
+        </p:nvSpPr>
+        <p:spPr>
+          <a:xfrm>
+            <a:off x="3276600" y="3876675"/>
+            <a:ext cx="1276350" cy="381000"/>
+          </a:xfrm>
+          <a:prstGeom prst="rect">
+            <a:avLst/>
+          </a:prstGeom>
+          <a:noFill/>
+          <a:ln w="0">
+            <a:noFill/>
+            <a:prstDash val="solid"/>
+          </a:ln>
+        </p:spPr>
+        <p:txBody>
+          <a:bodyPr wrap="square" lIns="0" tIns="0" rIns="0" bIns="0" anchor="t">
+            <a:normAutofit/>
+          </a:bodyPr>
+          <a:lstStyle>
+            <a:defPPr algn="ctr">
+              <a:defRPr sz="1050" b="0">
+                <a:solidFill>
+                  <a:srgbClr val="53657A"/>
+                </a:solidFill>
+                <a:latin typeface="Aptos"/>
+                <a:ea typeface="Aptos"/>
+                <a:cs typeface="Aptos"/>
+              </a:defRPr>
+            </a:defPPr>
+            <a:lvl1pPr algn="ctr">
+              <a:defRPr sz="1050" b="0">
+                <a:solidFill>
+                  <a:srgbClr val="53657A"/>
+                </a:solidFill>
+                <a:latin typeface="Aptos"/>
+                <a:ea typeface="Aptos"/>
+                <a:cs typeface="Aptos"/>
+              </a:defRPr>
+            </a:lvl1pPr>
+            <a:lvl2pPr algn="ctr">
+              <a:defRPr sz="1050" b="0">
+                <a:solidFill>
+                  <a:srgbClr val="53657A"/>
+                </a:solidFill>
+                <a:latin typeface="Aptos"/>
+                <a:ea typeface="Aptos"/>
+                <a:cs typeface="Aptos"/>
+              </a:defRPr>
+            </a:lvl2pPr>
+            <a:lvl3pPr algn="ctr">
+              <a:defRPr sz="1050" b="0">
+                <a:solidFill>
+                  <a:srgbClr val="53657A"/>
+                </a:solidFill>
+                <a:latin typeface="Aptos"/>
+                <a:ea typeface="Aptos"/>
+                <a:cs typeface="Aptos"/>
+              </a:defRPr>
+            </a:lvl3pPr>
+            <a:lvl4pPr algn="ctr">
+              <a:defRPr sz="1050" b="0">
+                <a:solidFill>
+                  <a:srgbClr val="53657A"/>
+                </a:solidFill>
+                <a:latin typeface="Aptos"/>
+                <a:ea typeface="Aptos"/>
+                <a:cs typeface="Aptos"/>
+              </a:defRPr>
+            </a:lvl4pPr>
+            <a:lvl5pPr algn="ctr">
+              <a:defRPr sz="1050" b="0">
+                <a:solidFill>
+                  <a:srgbClr val="53657A"/>
+                </a:solidFill>
+                <a:latin typeface="Aptos"/>
+                <a:ea typeface="Aptos"/>
+                <a:cs typeface="Aptos"/>
+              </a:defRPr>
+            </a:lvl5pPr>
+            <a:lvl6pPr algn="ctr">
+              <a:defRPr sz="1050" b="0">
+                <a:solidFill>
+                  <a:srgbClr val="53657A"/>
+                </a:solidFill>
+                <a:latin typeface="Aptos"/>
+                <a:ea typeface="Aptos"/>
+                <a:cs typeface="Aptos"/>
+              </a:defRPr>
+            </a:lvl6pPr>
+            <a:lvl7pPr algn="ctr">
+              <a:defRPr sz="1050" b="0">
+                <a:solidFill>
+                  <a:srgbClr val="53657A"/>
+                </a:solidFill>
+                <a:latin typeface="Aptos"/>
+                <a:ea typeface="Aptos"/>
+                <a:cs typeface="Aptos"/>
+              </a:defRPr>
+            </a:lvl7pPr>
+            <a:lvl8pPr algn="ctr">
+              <a:defRPr sz="1050" b="0">
+                <a:solidFill>
+                  <a:srgbClr val="53657A"/>
+                </a:solidFill>
+                <a:latin typeface="Aptos"/>
+                <a:ea typeface="Aptos"/>
+                <a:cs typeface="Aptos"/>
+              </a:defRPr>
+            </a:lvl8pPr>
+            <a:lvl9pPr algn="ctr">
+              <a:defRPr sz="1050" b="0">
+                <a:solidFill>
+                  <a:srgbClr val="53657A"/>
+                </a:solidFill>
+                <a:latin typeface="Aptos"/>
+                <a:ea typeface="Aptos"/>
+                <a:cs typeface="Aptos"/>
+              </a:defRPr>
+            </a:lvl9pPr>
+          </a:lstStyle>
+          <a:p>
+            <a:pPr algn="ctr">
+              <a:lnSpc>
+                <a:spcPct val="105000"/>
+              </a:lnSpc>
+              <a:buNone/>
+              <a:defRPr sz="1050" b="0">
+                <a:solidFill>
+                  <a:srgbClr val="53657A"/>
+                </a:solidFill>
+                <a:latin typeface="Aptos"/>
+                <a:ea typeface="Aptos"/>
+                <a:cs typeface="Aptos"/>
+              </a:defRPr>
+            </a:pPr>
+            <a:r>
+              <a:rPr sz="1050" b="0">
+                <a:solidFill>
+                  <a:srgbClr val="53657A"/>
+                </a:solidFill>
+                <a:latin typeface="Aptos"/>
+                <a:ea typeface="Aptos"/>
+                <a:cs typeface="Aptos"/>
+              </a:rPr>
+              <a:t>Filter seen news</a:t>
+            </a:r>
+          </a:p>
+          <a:p>
+            <a:pPr algn="ctr">
+              <a:lnSpc>
+                <a:spcPct val="105000"/>
+              </a:lnSpc>
+              <a:buNone/>
+              <a:defRPr sz="1050" b="0">
+                <a:solidFill>
+                  <a:srgbClr val="53657A"/>
+                </a:solidFill>
+                <a:latin typeface="Aptos"/>
+                <a:ea typeface="Aptos"/>
+                <a:cs typeface="Aptos"/>
+              </a:defRPr>
+            </a:pPr>
+            <a:r>
+              <a:rPr sz="1050" b="0">
+                <a:solidFill>
+                  <a:srgbClr val="53657A"/>
+                </a:solidFill>
+                <a:latin typeface="Aptos"/>
+                <a:ea typeface="Aptos"/>
+                <a:cs typeface="Aptos"/>
+              </a:rPr>
+              <a:t>Read social posts</a:t>
+            </a:r>
+          </a:p>
+        </p:txBody>
+      </p:sp>
+      <p:sp>
+        <p:nvSpPr>
+          <p:cNvPr id="54" name="finbert">
+            <a:extLst>
+              <a:ext uri="{FF2B5EF4-FFF2-40B4-BE49-F238E27FC236}">
+                <a16:creationId xmlns:a16="http://schemas.microsoft.com/office/drawing/2014/main" id="{0E7C3611-25F9-C109-0E6B-EA77C786DB72}"/>
+              </a:ext>
+            </a:extLst>
+          </p:cNvPr>
+          <p:cNvSpPr>
+            <a:spLocks noGrp="1"/>
+          </p:cNvSpPr>
+          <p:nvPr/>
+        </p:nvSpPr>
+        <p:spPr>
+          <a:xfrm>
+            <a:off x="5391150" y="2533650"/>
+            <a:ext cx="1657350" cy="952500"/>
+          </a:xfrm>
+          <a:prstGeom prst="roundRect">
+            <a:avLst>
+              <a:gd name="adj" fmla="val 14000"/>
+            </a:avLst>
+          </a:prstGeom>
+          <a:solidFill>
+            <a:srgbClr val="FFFFFF"/>
+          </a:solidFill>
+          <a:ln w="9525">
+            <a:solidFill>
+              <a:srgbClr val="C9D5E4"/>
+            </a:solidFill>
+            <a:prstDash val="solid"/>
+          </a:ln>
+        </p:spPr>
+      </p:sp>
+      <p:sp>
+        <p:nvSpPr>
+          <p:cNvPr id="55" name="event">
+            <a:extLst>
+              <a:ext uri="{FF2B5EF4-FFF2-40B4-BE49-F238E27FC236}">
+                <a16:creationId xmlns:a16="http://schemas.microsoft.com/office/drawing/2014/main" id="{35E6E6CF-81E6-513E-A8D1-D4E247A2928D}"/>
+              </a:ext>
+            </a:extLst>
+          </p:cNvPr>
+          <p:cNvSpPr>
+            <a:spLocks noGrp="1"/>
+          </p:cNvSpPr>
+          <p:nvPr/>
+        </p:nvSpPr>
+        <p:spPr>
+          <a:xfrm>
+            <a:off x="5391150" y="4114800"/>
+            <a:ext cx="1657350" cy="952500"/>
+          </a:xfrm>
+          <a:prstGeom prst="roundRect">
+            <a:avLst>
+              <a:gd name="adj" fmla="val 14000"/>
+            </a:avLst>
+          </a:prstGeom>
+          <a:solidFill>
+            <a:srgbClr val="FFFFFF"/>
+          </a:solidFill>
+          <a:ln w="9525">
+            <a:solidFill>
+              <a:srgbClr val="C9D5E4"/>
+            </a:solidFill>
+            <a:prstDash val="solid"/>
+          </a:ln>
+        </p:spPr>
+      </p:sp>
+      <p:sp>
+        <p:nvSpPr>
+          <p:cNvPr id="56" name="Rectangle 55">
+            <a:extLst>
+              <a:ext uri="{FF2B5EF4-FFF2-40B4-BE49-F238E27FC236}">
+                <a16:creationId xmlns:a16="http://schemas.microsoft.com/office/drawing/2014/main" id="{82A24655-794C-041F-B34A-5F94B8E5201F}"/>
+              </a:ext>
+            </a:extLst>
+          </p:cNvPr>
+          <p:cNvSpPr>
+            <a:spLocks noGrp="1"/>
+          </p:cNvSpPr>
+          <p:nvPr/>
+        </p:nvSpPr>
+        <p:spPr>
+          <a:xfrm>
+            <a:off x="5581650" y="2762250"/>
+            <a:ext cx="1276350" cy="228600"/>
+          </a:xfrm>
+          <a:prstGeom prst="rect">
+            <a:avLst/>
+          </a:prstGeom>
+          <a:noFill/>
+          <a:ln w="0">
+            <a:noFill/>
+            <a:prstDash val="solid"/>
+          </a:ln>
+        </p:spPr>
+        <p:txBody>
+          <a:bodyPr wrap="square" lIns="0" tIns="0" rIns="0" bIns="0" anchor="t">
+            <a:normAutofit fontScale="95238"/>
+          </a:bodyPr>
+          <a:lstStyle>
+            <a:defPPr algn="ctr">
+              <a:defRPr sz="1500" b="1">
+                <a:solidFill>
+                  <a:srgbClr val="071A33"/>
+                </a:solidFill>
+                <a:latin typeface="Aptos"/>
+                <a:ea typeface="Aptos"/>
+                <a:cs typeface="Aptos"/>
+              </a:defRPr>
+            </a:defPPr>
+            <a:lvl1pPr algn="ctr">
+              <a:defRPr sz="1500" b="1">
+                <a:solidFill>
+                  <a:srgbClr val="071A33"/>
+                </a:solidFill>
+                <a:latin typeface="Aptos"/>
+                <a:ea typeface="Aptos"/>
+                <a:cs typeface="Aptos"/>
+              </a:defRPr>
+            </a:lvl1pPr>
+            <a:lvl2pPr algn="ctr">
+              <a:defRPr sz="1500" b="1">
+                <a:solidFill>
+                  <a:srgbClr val="071A33"/>
+                </a:solidFill>
+                <a:latin typeface="Aptos"/>
+                <a:ea typeface="Aptos"/>
+                <a:cs typeface="Aptos"/>
+              </a:defRPr>
+            </a:lvl2pPr>
+            <a:lvl3pPr algn="ctr">
+              <a:defRPr sz="1500" b="1">
+                <a:solidFill>
+                  <a:srgbClr val="071A33"/>
+                </a:solidFill>
+                <a:latin typeface="Aptos"/>
+                <a:ea typeface="Aptos"/>
+                <a:cs typeface="Aptos"/>
+              </a:defRPr>
+            </a:lvl3pPr>
+            <a:lvl4pPr algn="ctr">
+              <a:defRPr sz="1500" b="1">
+                <a:solidFill>
+                  <a:srgbClr val="071A33"/>
+                </a:solidFill>
+                <a:latin typeface="Aptos"/>
+                <a:ea typeface="Aptos"/>
+                <a:cs typeface="Aptos"/>
+              </a:defRPr>
+            </a:lvl4pPr>
+            <a:lvl5pPr algn="ctr">
+              <a:defRPr sz="1500" b="1">
+                <a:solidFill>
+                  <a:srgbClr val="071A33"/>
+                </a:solidFill>
+                <a:latin typeface="Aptos"/>
+                <a:ea typeface="Aptos"/>
+                <a:cs typeface="Aptos"/>
+              </a:defRPr>
+            </a:lvl5pPr>
+            <a:lvl6pPr algn="ctr">
+              <a:defRPr sz="1500" b="1">
+                <a:solidFill>
+                  <a:srgbClr val="071A33"/>
+                </a:solidFill>
+                <a:latin typeface="Aptos"/>
+                <a:ea typeface="Aptos"/>
+                <a:cs typeface="Aptos"/>
+              </a:defRPr>
+            </a:lvl6pPr>
+            <a:lvl7pPr algn="ctr">
+              <a:defRPr sz="1500" b="1">
+                <a:solidFill>
+                  <a:srgbClr val="071A33"/>
+                </a:solidFill>
+                <a:latin typeface="Aptos"/>
+                <a:ea typeface="Aptos"/>
+                <a:cs typeface="Aptos"/>
+              </a:defRPr>
+            </a:lvl7pPr>
+            <a:lvl8pPr algn="ctr">
+              <a:defRPr sz="1500" b="1">
+                <a:solidFill>
+                  <a:srgbClr val="071A33"/>
+                </a:solidFill>
+                <a:latin typeface="Aptos"/>
+                <a:ea typeface="Aptos"/>
+                <a:cs typeface="Aptos"/>
+              </a:defRPr>
+            </a:lvl8pPr>
+            <a:lvl9pPr algn="ctr">
+              <a:defRPr sz="1500" b="1">
+                <a:solidFill>
+                  <a:srgbClr val="071A33"/>
+                </a:solidFill>
+                <a:latin typeface="Aptos"/>
+                <a:ea typeface="Aptos"/>
+                <a:cs typeface="Aptos"/>
+              </a:defRPr>
+            </a:lvl9pPr>
+          </a:lstStyle>
+          <a:p>
+            <a:pPr algn="ctr">
+              <a:lnSpc>
+                <a:spcPct val="105000"/>
+              </a:lnSpc>
+              <a:buNone/>
+              <a:defRPr sz="1500" b="1">
+                <a:solidFill>
+                  <a:srgbClr val="071A33"/>
+                </a:solidFill>
+                <a:latin typeface="Aptos"/>
+                <a:ea typeface="Aptos"/>
+                <a:cs typeface="Aptos"/>
+              </a:defRPr>
+            </a:pPr>
+            <a:r>
+              <a:rPr sz="1500" b="1">
+                <a:solidFill>
+                  <a:srgbClr val="071A33"/>
+                </a:solidFill>
+                <a:latin typeface="Aptos"/>
+                <a:ea typeface="Aptos"/>
+                <a:cs typeface="Aptos"/>
+              </a:rPr>
+              <a:t>FinBERT</a:t>
+            </a:r>
+          </a:p>
+        </p:txBody>
+      </p:sp>
+      <p:sp>
+        <p:nvSpPr>
+          <p:cNvPr id="57" name="Rectangle 56">
+            <a:extLst>
+              <a:ext uri="{FF2B5EF4-FFF2-40B4-BE49-F238E27FC236}">
+                <a16:creationId xmlns:a16="http://schemas.microsoft.com/office/drawing/2014/main" id="{00578C3A-F374-3F07-1AF4-65CB7D6C5291}"/>
+              </a:ext>
+            </a:extLst>
+          </p:cNvPr>
+          <p:cNvSpPr>
+            <a:spLocks noGrp="1"/>
+          </p:cNvSpPr>
+          <p:nvPr/>
+        </p:nvSpPr>
+        <p:spPr>
+          <a:xfrm>
+            <a:off x="5581650" y="3076575"/>
+            <a:ext cx="1276350" cy="361950"/>
+          </a:xfrm>
+          <a:prstGeom prst="rect">
+            <a:avLst/>
+          </a:prstGeom>
+          <a:noFill/>
+          <a:ln w="0">
+            <a:noFill/>
+            <a:prstDash val="solid"/>
+          </a:ln>
+        </p:spPr>
+        <p:txBody>
+          <a:bodyPr wrap="square" lIns="0" tIns="0" rIns="0" bIns="0" anchor="t">
+            <a:normAutofit/>
+          </a:bodyPr>
+          <a:lstStyle>
+            <a:defPPr algn="ctr">
+              <a:defRPr sz="1050" b="0">
+                <a:solidFill>
+                  <a:srgbClr val="53657A"/>
+                </a:solidFill>
+                <a:latin typeface="Aptos"/>
+                <a:ea typeface="Aptos"/>
+                <a:cs typeface="Aptos"/>
+              </a:defRPr>
+            </a:defPPr>
+            <a:lvl1pPr algn="ctr">
+              <a:defRPr sz="1050" b="0">
+                <a:solidFill>
+                  <a:srgbClr val="53657A"/>
+                </a:solidFill>
+                <a:latin typeface="Aptos"/>
+                <a:ea typeface="Aptos"/>
+                <a:cs typeface="Aptos"/>
+              </a:defRPr>
+            </a:lvl1pPr>
+            <a:lvl2pPr algn="ctr">
+              <a:defRPr sz="1050" b="0">
+                <a:solidFill>
+                  <a:srgbClr val="53657A"/>
+                </a:solidFill>
+                <a:latin typeface="Aptos"/>
+                <a:ea typeface="Aptos"/>
+                <a:cs typeface="Aptos"/>
+              </a:defRPr>
+            </a:lvl2pPr>
+            <a:lvl3pPr algn="ctr">
+              <a:defRPr sz="1050" b="0">
+                <a:solidFill>
+                  <a:srgbClr val="53657A"/>
+                </a:solidFill>
+                <a:latin typeface="Aptos"/>
+                <a:ea typeface="Aptos"/>
+                <a:cs typeface="Aptos"/>
+              </a:defRPr>
+            </a:lvl3pPr>
+            <a:lvl4pPr algn="ctr">
+              <a:defRPr sz="1050" b="0">
+                <a:solidFill>
+                  <a:srgbClr val="53657A"/>
+                </a:solidFill>
+                <a:latin typeface="Aptos"/>
+                <a:ea typeface="Aptos"/>
+                <a:cs typeface="Aptos"/>
+              </a:defRPr>
+            </a:lvl4pPr>
+            <a:lvl5pPr algn="ctr">
+              <a:defRPr sz="1050" b="0">
+                <a:solidFill>
+                  <a:srgbClr val="53657A"/>
+                </a:solidFill>
+                <a:latin typeface="Aptos"/>
+                <a:ea typeface="Aptos"/>
+                <a:cs typeface="Aptos"/>
+              </a:defRPr>
+            </a:lvl5pPr>
+            <a:lvl6pPr algn="ctr">
+              <a:defRPr sz="1050" b="0">
+                <a:solidFill>
+                  <a:srgbClr val="53657A"/>
+                </a:solidFill>
+                <a:latin typeface="Aptos"/>
+                <a:ea typeface="Aptos"/>
+                <a:cs typeface="Aptos"/>
+              </a:defRPr>
+            </a:lvl6pPr>
+            <a:lvl7pPr algn="ctr">
+              <a:defRPr sz="1050" b="0">
+                <a:solidFill>
+                  <a:srgbClr val="53657A"/>
+                </a:solidFill>
+                <a:latin typeface="Aptos"/>
+                <a:ea typeface="Aptos"/>
+                <a:cs typeface="Aptos"/>
+              </a:defRPr>
+            </a:lvl7pPr>
+            <a:lvl8pPr algn="ctr">
+              <a:defRPr sz="1050" b="0">
+                <a:solidFill>
+                  <a:srgbClr val="53657A"/>
+                </a:solidFill>
+                <a:latin typeface="Aptos"/>
+                <a:ea typeface="Aptos"/>
+                <a:cs typeface="Aptos"/>
+              </a:defRPr>
+            </a:lvl8pPr>
+            <a:lvl9pPr algn="ctr">
+              <a:defRPr sz="1050" b="0">
+                <a:solidFill>
+                  <a:srgbClr val="53657A"/>
+                </a:solidFill>
+                <a:latin typeface="Aptos"/>
+                <a:ea typeface="Aptos"/>
+                <a:cs typeface="Aptos"/>
+              </a:defRPr>
+            </a:lvl9pPr>
+          </a:lstStyle>
+          <a:p>
+            <a:pPr algn="ctr">
+              <a:lnSpc>
+                <a:spcPct val="105000"/>
+              </a:lnSpc>
+              <a:buNone/>
+              <a:defRPr sz="1050" b="0">
+                <a:solidFill>
+                  <a:srgbClr val="53657A"/>
+                </a:solidFill>
+                <a:latin typeface="Aptos"/>
+                <a:ea typeface="Aptos"/>
+                <a:cs typeface="Aptos"/>
+              </a:defRPr>
+            </a:pPr>
+            <a:r>
+              <a:rPr sz="1050" b="0">
+                <a:solidFill>
+                  <a:srgbClr val="53657A"/>
+                </a:solidFill>
+                <a:latin typeface="Aptos"/>
+                <a:ea typeface="Aptos"/>
+                <a:cs typeface="Aptos"/>
+              </a:rPr>
+              <a:t>Financial sentiment</a:t>
+            </a:r>
+          </a:p>
+          <a:p>
+            <a:pPr algn="ctr">
+              <a:lnSpc>
+                <a:spcPct val="105000"/>
+              </a:lnSpc>
+              <a:buNone/>
+              <a:defRPr sz="1050" b="0">
+                <a:solidFill>
+                  <a:srgbClr val="53657A"/>
+                </a:solidFill>
+                <a:latin typeface="Aptos"/>
+                <a:ea typeface="Aptos"/>
+                <a:cs typeface="Aptos"/>
+              </a:defRPr>
+            </a:pPr>
+            <a:r>
+              <a:rPr sz="1050" b="0">
+                <a:solidFill>
+                  <a:srgbClr val="53657A"/>
+                </a:solidFill>
+                <a:latin typeface="Aptos"/>
+                <a:ea typeface="Aptos"/>
+                <a:cs typeface="Aptos"/>
+              </a:rPr>
+              <a:t>and confidence</a:t>
+            </a:r>
+          </a:p>
+        </p:txBody>
+      </p:sp>
+      <p:sp>
+        <p:nvSpPr>
+          <p:cNvPr id="58" name="Rectangle 57">
+            <a:extLst>
+              <a:ext uri="{FF2B5EF4-FFF2-40B4-BE49-F238E27FC236}">
+                <a16:creationId xmlns:a16="http://schemas.microsoft.com/office/drawing/2014/main" id="{37C41B9F-967D-68B0-C50A-811196D9B656}"/>
+              </a:ext>
+            </a:extLst>
+          </p:cNvPr>
+          <p:cNvSpPr>
+            <a:spLocks noGrp="1"/>
+          </p:cNvSpPr>
+          <p:nvPr/>
+        </p:nvSpPr>
+        <p:spPr>
+          <a:xfrm>
+            <a:off x="5581650" y="4343400"/>
+            <a:ext cx="1276350" cy="228600"/>
+          </a:xfrm>
+          <a:prstGeom prst="rect">
+            <a:avLst/>
+          </a:prstGeom>
+          <a:noFill/>
+          <a:ln w="0">
+            <a:noFill/>
+            <a:prstDash val="solid"/>
+          </a:ln>
+        </p:spPr>
+        <p:txBody>
+          <a:bodyPr wrap="square" lIns="0" tIns="0" rIns="0" bIns="0" anchor="t">
+            <a:normAutofit fontScale="95238"/>
+          </a:bodyPr>
+          <a:lstStyle>
+            <a:defPPr algn="ctr">
+              <a:defRPr sz="1500" b="1">
+                <a:solidFill>
+                  <a:srgbClr val="071A33"/>
+                </a:solidFill>
+                <a:latin typeface="Aptos"/>
+                <a:ea typeface="Aptos"/>
+                <a:cs typeface="Aptos"/>
+              </a:defRPr>
+            </a:defPPr>
+            <a:lvl1pPr algn="ctr">
+              <a:defRPr sz="1500" b="1">
+                <a:solidFill>
+                  <a:srgbClr val="071A33"/>
+                </a:solidFill>
+                <a:latin typeface="Aptos"/>
+                <a:ea typeface="Aptos"/>
+                <a:cs typeface="Aptos"/>
+              </a:defRPr>
+            </a:lvl1pPr>
+            <a:lvl2pPr algn="ctr">
+              <a:defRPr sz="1500" b="1">
+                <a:solidFill>
+                  <a:srgbClr val="071A33"/>
+                </a:solidFill>
+                <a:latin typeface="Aptos"/>
+                <a:ea typeface="Aptos"/>
+                <a:cs typeface="Aptos"/>
+              </a:defRPr>
+            </a:lvl2pPr>
+            <a:lvl3pPr algn="ctr">
+              <a:defRPr sz="1500" b="1">
+                <a:solidFill>
+                  <a:srgbClr val="071A33"/>
+                </a:solidFill>
+                <a:latin typeface="Aptos"/>
+                <a:ea typeface="Aptos"/>
+                <a:cs typeface="Aptos"/>
+              </a:defRPr>
+            </a:lvl3pPr>
+            <a:lvl4pPr algn="ctr">
+              <a:defRPr sz="1500" b="1">
+                <a:solidFill>
+                  <a:srgbClr val="071A33"/>
+                </a:solidFill>
+                <a:latin typeface="Aptos"/>
+                <a:ea typeface="Aptos"/>
+                <a:cs typeface="Aptos"/>
+              </a:defRPr>
+            </a:lvl4pPr>
+            <a:lvl5pPr algn="ctr">
+              <a:defRPr sz="1500" b="1">
+                <a:solidFill>
+                  <a:srgbClr val="071A33"/>
+                </a:solidFill>
+                <a:latin typeface="Aptos"/>
+                <a:ea typeface="Aptos"/>
+                <a:cs typeface="Aptos"/>
+              </a:defRPr>
+            </a:lvl5pPr>
+            <a:lvl6pPr algn="ctr">
+              <a:defRPr sz="1500" b="1">
+                <a:solidFill>
+                  <a:srgbClr val="071A33"/>
+                </a:solidFill>
+                <a:latin typeface="Aptos"/>
+                <a:ea typeface="Aptos"/>
+                <a:cs typeface="Aptos"/>
+              </a:defRPr>
+            </a:lvl6pPr>
+            <a:lvl7pPr algn="ctr">
+              <a:defRPr sz="1500" b="1">
+                <a:solidFill>
+                  <a:srgbClr val="071A33"/>
+                </a:solidFill>
+                <a:latin typeface="Aptos"/>
+                <a:ea typeface="Aptos"/>
+                <a:cs typeface="Aptos"/>
+              </a:defRPr>
+            </a:lvl7pPr>
+            <a:lvl8pPr algn="ctr">
+              <a:defRPr sz="1500" b="1">
+                <a:solidFill>
+                  <a:srgbClr val="071A33"/>
+                </a:solidFill>
+                <a:latin typeface="Aptos"/>
+                <a:ea typeface="Aptos"/>
+                <a:cs typeface="Aptos"/>
+              </a:defRPr>
+            </a:lvl8pPr>
+            <a:lvl9pPr algn="ctr">
+              <a:defRPr sz="1500" b="1">
+                <a:solidFill>
+                  <a:srgbClr val="071A33"/>
+                </a:solidFill>
+                <a:latin typeface="Aptos"/>
+                <a:ea typeface="Aptos"/>
+                <a:cs typeface="Aptos"/>
+              </a:defRPr>
+            </a:lvl9pPr>
+          </a:lstStyle>
+          <a:p>
+            <a:pPr algn="ctr">
+              <a:lnSpc>
+                <a:spcPct val="105000"/>
+              </a:lnSpc>
+              <a:buNone/>
+              <a:defRPr sz="1500" b="1">
+                <a:solidFill>
+                  <a:srgbClr val="071A33"/>
+                </a:solidFill>
+                <a:latin typeface="Aptos"/>
+                <a:ea typeface="Aptos"/>
+                <a:cs typeface="Aptos"/>
+              </a:defRPr>
+            </a:pPr>
+            <a:r>
+              <a:rPr sz="1500" b="1">
+                <a:solidFill>
+                  <a:srgbClr val="071A33"/>
+                </a:solidFill>
+                <a:latin typeface="Aptos"/>
+                <a:ea typeface="Aptos"/>
+                <a:cs typeface="Aptos"/>
+              </a:rPr>
+              <a:t>Event classifier</a:t>
+            </a:r>
+          </a:p>
+        </p:txBody>
+      </p:sp>
+      <p:sp>
+        <p:nvSpPr>
+          <p:cNvPr id="59" name="Rectangle 58">
+            <a:extLst>
+              <a:ext uri="{FF2B5EF4-FFF2-40B4-BE49-F238E27FC236}">
+                <a16:creationId xmlns:a16="http://schemas.microsoft.com/office/drawing/2014/main" id="{F840A766-6AD4-DFED-8390-CA2B1D7BA752}"/>
+              </a:ext>
+            </a:extLst>
+          </p:cNvPr>
+          <p:cNvSpPr>
+            <a:spLocks noGrp="1"/>
+          </p:cNvSpPr>
+          <p:nvPr/>
+        </p:nvSpPr>
+        <p:spPr>
+          <a:xfrm>
+            <a:off x="5581650" y="4657725"/>
+            <a:ext cx="1276350" cy="361950"/>
+          </a:xfrm>
+          <a:prstGeom prst="rect">
+            <a:avLst/>
+          </a:prstGeom>
+          <a:noFill/>
+          <a:ln w="0">
+            <a:noFill/>
+            <a:prstDash val="solid"/>
+          </a:ln>
+        </p:spPr>
+        <p:txBody>
+          <a:bodyPr wrap="square" lIns="0" tIns="0" rIns="0" bIns="0" anchor="t">
+            <a:normAutofit/>
+          </a:bodyPr>
+          <a:lstStyle>
+            <a:defPPr algn="ctr">
+              <a:defRPr sz="1050" b="0">
+                <a:solidFill>
+                  <a:srgbClr val="53657A"/>
+                </a:solidFill>
+                <a:latin typeface="Aptos"/>
+                <a:ea typeface="Aptos"/>
+                <a:cs typeface="Aptos"/>
+              </a:defRPr>
+            </a:defPPr>
+            <a:lvl1pPr algn="ctr">
+              <a:defRPr sz="1050" b="0">
+                <a:solidFill>
+                  <a:srgbClr val="53657A"/>
+                </a:solidFill>
+                <a:latin typeface="Aptos"/>
+                <a:ea typeface="Aptos"/>
+                <a:cs typeface="Aptos"/>
+              </a:defRPr>
+            </a:lvl1pPr>
+            <a:lvl2pPr algn="ctr">
+              <a:defRPr sz="1050" b="0">
+                <a:solidFill>
+                  <a:srgbClr val="53657A"/>
+                </a:solidFill>
+                <a:latin typeface="Aptos"/>
+                <a:ea typeface="Aptos"/>
+                <a:cs typeface="Aptos"/>
+              </a:defRPr>
+            </a:lvl2pPr>
+            <a:lvl3pPr algn="ctr">
+              <a:defRPr sz="1050" b="0">
+                <a:solidFill>
+                  <a:srgbClr val="53657A"/>
+                </a:solidFill>
+                <a:latin typeface="Aptos"/>
+                <a:ea typeface="Aptos"/>
+                <a:cs typeface="Aptos"/>
+              </a:defRPr>
+            </a:lvl3pPr>
+            <a:lvl4pPr algn="ctr">
+              <a:defRPr sz="1050" b="0">
+                <a:solidFill>
+                  <a:srgbClr val="53657A"/>
+                </a:solidFill>
+                <a:latin typeface="Aptos"/>
+                <a:ea typeface="Aptos"/>
+                <a:cs typeface="Aptos"/>
+              </a:defRPr>
+            </a:lvl4pPr>
+            <a:lvl5pPr algn="ctr">
+              <a:defRPr sz="1050" b="0">
+                <a:solidFill>
+                  <a:srgbClr val="53657A"/>
+                </a:solidFill>
+                <a:latin typeface="Aptos"/>
+                <a:ea typeface="Aptos"/>
+                <a:cs typeface="Aptos"/>
+              </a:defRPr>
+            </a:lvl5pPr>
+            <a:lvl6pPr algn="ctr">
+              <a:defRPr sz="1050" b="0">
+                <a:solidFill>
+                  <a:srgbClr val="53657A"/>
+                </a:solidFill>
+                <a:latin typeface="Aptos"/>
+                <a:ea typeface="Aptos"/>
+                <a:cs typeface="Aptos"/>
+              </a:defRPr>
+            </a:lvl6pPr>
+            <a:lvl7pPr algn="ctr">
+              <a:defRPr sz="1050" b="0">
+                <a:solidFill>
+                  <a:srgbClr val="53657A"/>
+                </a:solidFill>
+                <a:latin typeface="Aptos"/>
+                <a:ea typeface="Aptos"/>
+                <a:cs typeface="Aptos"/>
+              </a:defRPr>
+            </a:lvl7pPr>
+            <a:lvl8pPr algn="ctr">
+              <a:defRPr sz="1050" b="0">
+                <a:solidFill>
+                  <a:srgbClr val="53657A"/>
+                </a:solidFill>
+                <a:latin typeface="Aptos"/>
+                <a:ea typeface="Aptos"/>
+                <a:cs typeface="Aptos"/>
+              </a:defRPr>
+            </a:lvl8pPr>
+            <a:lvl9pPr algn="ctr">
+              <a:defRPr sz="1050" b="0">
+                <a:solidFill>
+                  <a:srgbClr val="53657A"/>
+                </a:solidFill>
+                <a:latin typeface="Aptos"/>
+                <a:ea typeface="Aptos"/>
+                <a:cs typeface="Aptos"/>
+              </a:defRPr>
+            </a:lvl9pPr>
+          </a:lstStyle>
+          <a:p>
+            <a:pPr algn="ctr">
+              <a:lnSpc>
+                <a:spcPct val="105000"/>
+              </a:lnSpc>
+              <a:buNone/>
+              <a:defRPr sz="1050" b="0">
+                <a:solidFill>
+                  <a:srgbClr val="53657A"/>
+                </a:solidFill>
+                <a:latin typeface="Aptos"/>
+                <a:ea typeface="Aptos"/>
+                <a:cs typeface="Aptos"/>
+              </a:defRPr>
+            </a:pPr>
+            <a:r>
+              <a:rPr sz="1050" b="0">
+                <a:solidFill>
+                  <a:srgbClr val="53657A"/>
+                </a:solidFill>
+                <a:latin typeface="Aptos"/>
+                <a:ea typeface="Aptos"/>
+                <a:cs typeface="Aptos"/>
+              </a:rPr>
+              <a:t>Zero-shot category</a:t>
+            </a:r>
+          </a:p>
+          <a:p>
+            <a:pPr algn="ctr">
+              <a:lnSpc>
+                <a:spcPct val="105000"/>
+              </a:lnSpc>
+              <a:buNone/>
+              <a:defRPr sz="1050" b="0">
+                <a:solidFill>
+                  <a:srgbClr val="53657A"/>
+                </a:solidFill>
+                <a:latin typeface="Aptos"/>
+                <a:ea typeface="Aptos"/>
+                <a:cs typeface="Aptos"/>
+              </a:defRPr>
+            </a:pPr>
+            <a:r>
+              <a:rPr sz="1050" b="0">
+                <a:solidFill>
+                  <a:srgbClr val="53657A"/>
+                </a:solidFill>
+                <a:latin typeface="Aptos"/>
+                <a:ea typeface="Aptos"/>
+                <a:cs typeface="Aptos"/>
+              </a:rPr>
+              <a:t>and confidence</a:t>
+            </a:r>
+          </a:p>
+        </p:txBody>
+      </p:sp>
+      <p:sp>
+        <p:nvSpPr>
+          <p:cNvPr id="60" name="impact">
+            <a:extLst>
+              <a:ext uri="{FF2B5EF4-FFF2-40B4-BE49-F238E27FC236}">
+                <a16:creationId xmlns:a16="http://schemas.microsoft.com/office/drawing/2014/main" id="{58DF53CB-49D7-E371-AEE3-1486A66FDA4C}"/>
+              </a:ext>
+            </a:extLst>
+          </p:cNvPr>
+          <p:cNvSpPr>
+            <a:spLocks noGrp="1"/>
+          </p:cNvSpPr>
+          <p:nvPr/>
+        </p:nvSpPr>
+        <p:spPr>
+          <a:xfrm>
+            <a:off x="7658100" y="3333750"/>
+            <a:ext cx="1657350" cy="971550"/>
+          </a:xfrm>
+          <a:prstGeom prst="roundRect">
+            <a:avLst>
+              <a:gd name="adj" fmla="val 13725"/>
+            </a:avLst>
+          </a:prstGeom>
+          <a:solidFill>
+            <a:srgbClr val="EAE6FF"/>
+          </a:solidFill>
+          <a:ln w="9525">
+            <a:solidFill>
+              <a:srgbClr val="CFC5FF"/>
+            </a:solidFill>
+            <a:prstDash val="solid"/>
+          </a:ln>
+        </p:spPr>
+      </p:sp>
+      <p:sp>
+        <p:nvSpPr>
+          <p:cNvPr id="61" name="Rectangle 60">
+            <a:extLst>
+              <a:ext uri="{FF2B5EF4-FFF2-40B4-BE49-F238E27FC236}">
+                <a16:creationId xmlns:a16="http://schemas.microsoft.com/office/drawing/2014/main" id="{672A6BB9-23B8-49EC-702A-22A695EF5DC3}"/>
+              </a:ext>
+            </a:extLst>
+          </p:cNvPr>
+          <p:cNvSpPr>
+            <a:spLocks noGrp="1"/>
+          </p:cNvSpPr>
+          <p:nvPr/>
+        </p:nvSpPr>
+        <p:spPr>
+          <a:xfrm>
+            <a:off x="7848600" y="3552825"/>
+            <a:ext cx="1276350" cy="228600"/>
+          </a:xfrm>
+          <a:prstGeom prst="rect">
+            <a:avLst/>
+          </a:prstGeom>
+          <a:noFill/>
+          <a:ln w="0">
+            <a:noFill/>
+            <a:prstDash val="solid"/>
+          </a:ln>
+        </p:spPr>
+        <p:txBody>
+          <a:bodyPr wrap="square" lIns="0" tIns="0" rIns="0" bIns="0" anchor="t">
+            <a:normAutofit/>
+          </a:bodyPr>
+          <a:lstStyle>
+            <a:defPPr algn="ctr">
+              <a:defRPr sz="1425" b="1">
+                <a:solidFill>
+                  <a:srgbClr val="071A33"/>
+                </a:solidFill>
+                <a:latin typeface="Aptos"/>
+                <a:ea typeface="Aptos"/>
+                <a:cs typeface="Aptos"/>
+              </a:defRPr>
+            </a:defPPr>
+            <a:lvl1pPr algn="ctr">
+              <a:defRPr sz="1425" b="1">
+                <a:solidFill>
+                  <a:srgbClr val="071A33"/>
+                </a:solidFill>
+                <a:latin typeface="Aptos"/>
+                <a:ea typeface="Aptos"/>
+                <a:cs typeface="Aptos"/>
+              </a:defRPr>
+            </a:lvl1pPr>
+            <a:lvl2pPr algn="ctr">
+              <a:defRPr sz="1425" b="1">
+                <a:solidFill>
+                  <a:srgbClr val="071A33"/>
+                </a:solidFill>
+                <a:latin typeface="Aptos"/>
+                <a:ea typeface="Aptos"/>
+                <a:cs typeface="Aptos"/>
+              </a:defRPr>
+            </a:lvl2pPr>
+            <a:lvl3pPr algn="ctr">
+              <a:defRPr sz="1425" b="1">
+                <a:solidFill>
+                  <a:srgbClr val="071A33"/>
+                </a:solidFill>
+                <a:latin typeface="Aptos"/>
+                <a:ea typeface="Aptos"/>
+                <a:cs typeface="Aptos"/>
+              </a:defRPr>
+            </a:lvl3pPr>
+            <a:lvl4pPr algn="ctr">
+              <a:defRPr sz="1425" b="1">
+                <a:solidFill>
+                  <a:srgbClr val="071A33"/>
+                </a:solidFill>
+                <a:latin typeface="Aptos"/>
+                <a:ea typeface="Aptos"/>
+                <a:cs typeface="Aptos"/>
+              </a:defRPr>
+            </a:lvl4pPr>
+            <a:lvl5pPr algn="ctr">
+              <a:defRPr sz="1425" b="1">
+                <a:solidFill>
+                  <a:srgbClr val="071A33"/>
+                </a:solidFill>
+                <a:latin typeface="Aptos"/>
+                <a:ea typeface="Aptos"/>
+                <a:cs typeface="Aptos"/>
+              </a:defRPr>
+            </a:lvl5pPr>
+            <a:lvl6pPr algn="ctr">
+              <a:defRPr sz="1425" b="1">
+                <a:solidFill>
+                  <a:srgbClr val="071A33"/>
+                </a:solidFill>
+                <a:latin typeface="Aptos"/>
+                <a:ea typeface="Aptos"/>
+                <a:cs typeface="Aptos"/>
+              </a:defRPr>
+            </a:lvl6pPr>
+            <a:lvl7pPr algn="ctr">
+              <a:defRPr sz="1425" b="1">
+                <a:solidFill>
+                  <a:srgbClr val="071A33"/>
+                </a:solidFill>
+                <a:latin typeface="Aptos"/>
+                <a:ea typeface="Aptos"/>
+                <a:cs typeface="Aptos"/>
+              </a:defRPr>
+            </a:lvl7pPr>
+            <a:lvl8pPr algn="ctr">
+              <a:defRPr sz="1425" b="1">
+                <a:solidFill>
+                  <a:srgbClr val="071A33"/>
+                </a:solidFill>
+                <a:latin typeface="Aptos"/>
+                <a:ea typeface="Aptos"/>
+                <a:cs typeface="Aptos"/>
+              </a:defRPr>
+            </a:lvl8pPr>
+            <a:lvl9pPr algn="ctr">
+              <a:defRPr sz="1425" b="1">
+                <a:solidFill>
+                  <a:srgbClr val="071A33"/>
+                </a:solidFill>
+                <a:latin typeface="Aptos"/>
+                <a:ea typeface="Aptos"/>
+                <a:cs typeface="Aptos"/>
+              </a:defRPr>
+            </a:lvl9pPr>
+          </a:lstStyle>
+          <a:p>
+            <a:pPr algn="ctr">
+              <a:lnSpc>
+                <a:spcPct val="105000"/>
+              </a:lnSpc>
+              <a:buNone/>
+              <a:defRPr sz="1425" b="1">
+                <a:solidFill>
+                  <a:srgbClr val="071A33"/>
+                </a:solidFill>
+                <a:latin typeface="Aptos"/>
+                <a:ea typeface="Aptos"/>
+                <a:cs typeface="Aptos"/>
+              </a:defRPr>
+            </a:pPr>
+            <a:r>
+              <a:rPr sz="1425" b="1">
+                <a:solidFill>
+                  <a:srgbClr val="071A33"/>
+                </a:solidFill>
+                <a:latin typeface="Aptos"/>
+                <a:ea typeface="Aptos"/>
+                <a:cs typeface="Aptos"/>
+              </a:rPr>
+              <a:t>Impact scoring</a:t>
+            </a:r>
+          </a:p>
+        </p:txBody>
+      </p:sp>
+      <p:sp>
+        <p:nvSpPr>
+          <p:cNvPr id="62" name="Rectangle 61">
+            <a:extLst>
+              <a:ext uri="{FF2B5EF4-FFF2-40B4-BE49-F238E27FC236}">
+                <a16:creationId xmlns:a16="http://schemas.microsoft.com/office/drawing/2014/main" id="{A171E654-87A5-6A94-062C-974709805EE8}"/>
+              </a:ext>
+            </a:extLst>
+          </p:cNvPr>
+          <p:cNvSpPr>
+            <a:spLocks noGrp="1"/>
+          </p:cNvSpPr>
+          <p:nvPr/>
+        </p:nvSpPr>
+        <p:spPr>
+          <a:xfrm>
+            <a:off x="7848600" y="3876675"/>
+            <a:ext cx="1276350" cy="361950"/>
+          </a:xfrm>
+          <a:prstGeom prst="rect">
+            <a:avLst/>
+          </a:prstGeom>
+          <a:noFill/>
+          <a:ln w="0">
+            <a:noFill/>
+            <a:prstDash val="solid"/>
+          </a:ln>
+        </p:spPr>
+        <p:txBody>
+          <a:bodyPr wrap="square" lIns="0" tIns="0" rIns="0" bIns="0" anchor="t">
+            <a:normAutofit/>
+          </a:bodyPr>
+          <a:lstStyle>
+            <a:defPPr algn="ctr">
+              <a:defRPr sz="1050" b="0">
+                <a:solidFill>
+                  <a:srgbClr val="53657A"/>
+                </a:solidFill>
+                <a:latin typeface="Aptos"/>
+                <a:ea typeface="Aptos"/>
+                <a:cs typeface="Aptos"/>
+              </a:defRPr>
+            </a:defPPr>
+            <a:lvl1pPr algn="ctr">
+              <a:defRPr sz="1050" b="0">
+                <a:solidFill>
+                  <a:srgbClr val="53657A"/>
+                </a:solidFill>
+                <a:latin typeface="Aptos"/>
+                <a:ea typeface="Aptos"/>
+                <a:cs typeface="Aptos"/>
+              </a:defRPr>
+            </a:lvl1pPr>
+            <a:lvl2pPr algn="ctr">
+              <a:defRPr sz="1050" b="0">
+                <a:solidFill>
+                  <a:srgbClr val="53657A"/>
+                </a:solidFill>
+                <a:latin typeface="Aptos"/>
+                <a:ea typeface="Aptos"/>
+                <a:cs typeface="Aptos"/>
+              </a:defRPr>
+            </a:lvl2pPr>
+            <a:lvl3pPr algn="ctr">
+              <a:defRPr sz="1050" b="0">
+                <a:solidFill>
+                  <a:srgbClr val="53657A"/>
+                </a:solidFill>
+                <a:latin typeface="Aptos"/>
+                <a:ea typeface="Aptos"/>
+                <a:cs typeface="Aptos"/>
+              </a:defRPr>
+            </a:lvl3pPr>
+            <a:lvl4pPr algn="ctr">
+              <a:defRPr sz="1050" b="0">
+                <a:solidFill>
+                  <a:srgbClr val="53657A"/>
+                </a:solidFill>
+                <a:latin typeface="Aptos"/>
+                <a:ea typeface="Aptos"/>
+                <a:cs typeface="Aptos"/>
+              </a:defRPr>
+            </a:lvl4pPr>
+            <a:lvl5pPr algn="ctr">
+              <a:defRPr sz="1050" b="0">
+                <a:solidFill>
+                  <a:srgbClr val="53657A"/>
+                </a:solidFill>
+                <a:latin typeface="Aptos"/>
+                <a:ea typeface="Aptos"/>
+                <a:cs typeface="Aptos"/>
+              </a:defRPr>
+            </a:lvl5pPr>
+            <a:lvl6pPr algn="ctr">
+              <a:defRPr sz="1050" b="0">
+                <a:solidFill>
+                  <a:srgbClr val="53657A"/>
+                </a:solidFill>
+                <a:latin typeface="Aptos"/>
+                <a:ea typeface="Aptos"/>
+                <a:cs typeface="Aptos"/>
+              </a:defRPr>
+            </a:lvl6pPr>
+            <a:lvl7pPr algn="ctr">
+              <a:defRPr sz="1050" b="0">
+                <a:solidFill>
+                  <a:srgbClr val="53657A"/>
+                </a:solidFill>
+                <a:latin typeface="Aptos"/>
+                <a:ea typeface="Aptos"/>
+                <a:cs typeface="Aptos"/>
+              </a:defRPr>
+            </a:lvl7pPr>
+            <a:lvl8pPr algn="ctr">
+              <a:defRPr sz="1050" b="0">
+                <a:solidFill>
+                  <a:srgbClr val="53657A"/>
+                </a:solidFill>
+                <a:latin typeface="Aptos"/>
+                <a:ea typeface="Aptos"/>
+                <a:cs typeface="Aptos"/>
+              </a:defRPr>
+            </a:lvl8pPr>
+            <a:lvl9pPr algn="ctr">
+              <a:defRPr sz="1050" b="0">
+                <a:solidFill>
+                  <a:srgbClr val="53657A"/>
+                </a:solidFill>
+                <a:latin typeface="Aptos"/>
+                <a:ea typeface="Aptos"/>
+                <a:cs typeface="Aptos"/>
+              </a:defRPr>
+            </a:lvl9pPr>
+          </a:lstStyle>
+          <a:p>
+            <a:pPr algn="ctr">
+              <a:lnSpc>
+                <a:spcPct val="105000"/>
+              </a:lnSpc>
+              <a:buNone/>
+              <a:defRPr sz="1050" b="0">
+                <a:solidFill>
+                  <a:srgbClr val="53657A"/>
+                </a:solidFill>
+                <a:latin typeface="Aptos"/>
+                <a:ea typeface="Aptos"/>
+                <a:cs typeface="Aptos"/>
+              </a:defRPr>
+            </a:pPr>
+            <a:r>
+              <a:rPr sz="1050" b="0">
+                <a:solidFill>
+                  <a:srgbClr val="53657A"/>
+                </a:solidFill>
+                <a:latin typeface="Aptos"/>
+                <a:ea typeface="Aptos"/>
+                <a:cs typeface="Aptos"/>
+              </a:rPr>
+              <a:t>Structured risk</a:t>
+            </a:r>
+          </a:p>
+          <a:p>
+            <a:pPr algn="ctr">
+              <a:lnSpc>
+                <a:spcPct val="105000"/>
+              </a:lnSpc>
+              <a:buNone/>
+              <a:defRPr sz="1050" b="0">
+                <a:solidFill>
+                  <a:srgbClr val="53657A"/>
+                </a:solidFill>
+                <a:latin typeface="Aptos"/>
+                <a:ea typeface="Aptos"/>
+                <a:cs typeface="Aptos"/>
+              </a:defRPr>
+            </a:pPr>
+            <a:r>
+              <a:rPr sz="1050" b="0">
+                <a:solidFill>
+                  <a:srgbClr val="53657A"/>
+                </a:solidFill>
+                <a:latin typeface="Aptos"/>
+                <a:ea typeface="Aptos"/>
+                <a:cs typeface="Aptos"/>
+              </a:rPr>
+              <a:t>signal</a:t>
+            </a:r>
+          </a:p>
+        </p:txBody>
+      </p:sp>
+      <p:sp>
+        <p:nvSpPr>
+          <p:cNvPr id="63" name="rebalancer">
+            <a:extLst>
+              <a:ext uri="{FF2B5EF4-FFF2-40B4-BE49-F238E27FC236}">
+                <a16:creationId xmlns:a16="http://schemas.microsoft.com/office/drawing/2014/main" id="{6901DFA6-7CCB-21D4-7318-3D34DEAECBB1}"/>
+              </a:ext>
+            </a:extLst>
+          </p:cNvPr>
+          <p:cNvSpPr>
+            <a:spLocks noGrp="1"/>
+          </p:cNvSpPr>
+          <p:nvPr/>
+        </p:nvSpPr>
+        <p:spPr>
+          <a:xfrm>
+            <a:off x="9925050" y="3333750"/>
+            <a:ext cx="1524000" cy="971550"/>
+          </a:xfrm>
+          <a:prstGeom prst="roundRect">
+            <a:avLst>
+              <a:gd name="adj" fmla="val 13725"/>
+            </a:avLst>
+          </a:prstGeom>
+          <a:solidFill>
+            <a:srgbClr val="071A33"/>
+          </a:solidFill>
+          <a:ln w="9525">
+            <a:solidFill>
+              <a:srgbClr val="071A33"/>
+            </a:solidFill>
+            <a:prstDash val="solid"/>
+          </a:ln>
+        </p:spPr>
+      </p:sp>
+      <p:sp>
+        <p:nvSpPr>
+          <p:cNvPr id="64" name="Rectangle 63">
+            <a:extLst>
+              <a:ext uri="{FF2B5EF4-FFF2-40B4-BE49-F238E27FC236}">
+                <a16:creationId xmlns:a16="http://schemas.microsoft.com/office/drawing/2014/main" id="{3352B50A-E0B2-13A8-EC4A-A8DC587B2AA2}"/>
+              </a:ext>
+            </a:extLst>
+          </p:cNvPr>
+          <p:cNvSpPr>
+            <a:spLocks noGrp="1"/>
+          </p:cNvSpPr>
+          <p:nvPr/>
+        </p:nvSpPr>
+        <p:spPr>
+          <a:xfrm>
+            <a:off x="10096500" y="3552825"/>
+            <a:ext cx="1181100" cy="228600"/>
+          </a:xfrm>
+          <a:prstGeom prst="rect">
+            <a:avLst/>
+          </a:prstGeom>
+          <a:noFill/>
+          <a:ln w="0">
+            <a:noFill/>
+            <a:prstDash val="solid"/>
+          </a:ln>
+        </p:spPr>
+        <p:txBody>
+          <a:bodyPr wrap="square" lIns="0" tIns="0" rIns="0" bIns="0" anchor="t">
+            <a:normAutofit/>
+          </a:bodyPr>
+          <a:lstStyle>
+            <a:defPPr algn="ctr">
+              <a:defRPr sz="1425" b="1">
+                <a:solidFill>
+                  <a:srgbClr val="FFFFFF"/>
+                </a:solidFill>
+                <a:latin typeface="Aptos"/>
+                <a:ea typeface="Aptos"/>
+                <a:cs typeface="Aptos"/>
+              </a:defRPr>
+            </a:defPPr>
+            <a:lvl1pPr algn="ctr">
+              <a:defRPr sz="1425" b="1">
+                <a:solidFill>
+                  <a:srgbClr val="FFFFFF"/>
+                </a:solidFill>
+                <a:latin typeface="Aptos"/>
+                <a:ea typeface="Aptos"/>
+                <a:cs typeface="Aptos"/>
+              </a:defRPr>
+            </a:lvl1pPr>
+            <a:lvl2pPr algn="ctr">
+              <a:defRPr sz="1425" b="1">
+                <a:solidFill>
+                  <a:srgbClr val="FFFFFF"/>
+                </a:solidFill>
+                <a:latin typeface="Aptos"/>
+                <a:ea typeface="Aptos"/>
+                <a:cs typeface="Aptos"/>
+              </a:defRPr>
+            </a:lvl2pPr>
+            <a:lvl3pPr algn="ctr">
+              <a:defRPr sz="1425" b="1">
+                <a:solidFill>
+                  <a:srgbClr val="FFFFFF"/>
+                </a:solidFill>
+                <a:latin typeface="Aptos"/>
+                <a:ea typeface="Aptos"/>
+                <a:cs typeface="Aptos"/>
+              </a:defRPr>
+            </a:lvl3pPr>
+            <a:lvl4pPr algn="ctr">
+              <a:defRPr sz="1425" b="1">
+                <a:solidFill>
+                  <a:srgbClr val="FFFFFF"/>
+                </a:solidFill>
+                <a:latin typeface="Aptos"/>
+                <a:ea typeface="Aptos"/>
+                <a:cs typeface="Aptos"/>
+              </a:defRPr>
+            </a:lvl4pPr>
+            <a:lvl5pPr algn="ctr">
+              <a:defRPr sz="1425" b="1">
+                <a:solidFill>
+                  <a:srgbClr val="FFFFFF"/>
+                </a:solidFill>
+                <a:latin typeface="Aptos"/>
+                <a:ea typeface="Aptos"/>
+                <a:cs typeface="Aptos"/>
+              </a:defRPr>
+            </a:lvl5pPr>
+            <a:lvl6pPr algn="ctr">
+              <a:defRPr sz="1425" b="1">
+                <a:solidFill>
+                  <a:srgbClr val="FFFFFF"/>
+                </a:solidFill>
+                <a:latin typeface="Aptos"/>
+                <a:ea typeface="Aptos"/>
+                <a:cs typeface="Aptos"/>
+              </a:defRPr>
+            </a:lvl6pPr>
+            <a:lvl7pPr algn="ctr">
+              <a:defRPr sz="1425" b="1">
+                <a:solidFill>
+                  <a:srgbClr val="FFFFFF"/>
+                </a:solidFill>
+                <a:latin typeface="Aptos"/>
+                <a:ea typeface="Aptos"/>
+                <a:cs typeface="Aptos"/>
+              </a:defRPr>
+            </a:lvl7pPr>
+            <a:lvl8pPr algn="ctr">
+              <a:defRPr sz="1425" b="1">
+                <a:solidFill>
+                  <a:srgbClr val="FFFFFF"/>
+                </a:solidFill>
+                <a:latin typeface="Aptos"/>
+                <a:ea typeface="Aptos"/>
+                <a:cs typeface="Aptos"/>
+              </a:defRPr>
+            </a:lvl8pPr>
+            <a:lvl9pPr algn="ctr">
+              <a:defRPr sz="1425" b="1">
+                <a:solidFill>
+                  <a:srgbClr val="FFFFFF"/>
+                </a:solidFill>
+                <a:latin typeface="Aptos"/>
+                <a:ea typeface="Aptos"/>
+                <a:cs typeface="Aptos"/>
+              </a:defRPr>
+            </a:lvl9pPr>
+          </a:lstStyle>
+          <a:p>
+            <a:pPr algn="ctr">
+              <a:lnSpc>
+                <a:spcPct val="105000"/>
+              </a:lnSpc>
+              <a:buNone/>
+              <a:defRPr sz="1425" b="1">
+                <a:solidFill>
+                  <a:srgbClr val="FFFFFF"/>
+                </a:solidFill>
+                <a:latin typeface="Aptos"/>
+                <a:ea typeface="Aptos"/>
+                <a:cs typeface="Aptos"/>
+              </a:defRPr>
+            </a:pPr>
+            <a:r>
+              <a:rPr sz="1425" b="1">
+                <a:solidFill>
+                  <a:srgbClr val="FFFFFF"/>
+                </a:solidFill>
+                <a:latin typeface="Aptos"/>
+                <a:ea typeface="Aptos"/>
+                <a:cs typeface="Aptos"/>
+              </a:rPr>
+              <a:t>Rebalancer</a:t>
+            </a:r>
+          </a:p>
+        </p:txBody>
+      </p:sp>
+      <p:sp>
+        <p:nvSpPr>
+          <p:cNvPr id="65" name="Rectangle 64">
+            <a:extLst>
+              <a:ext uri="{FF2B5EF4-FFF2-40B4-BE49-F238E27FC236}">
+                <a16:creationId xmlns:a16="http://schemas.microsoft.com/office/drawing/2014/main" id="{BCF8902F-E5B3-AE8D-9BC6-3ED336A21B9E}"/>
+              </a:ext>
+            </a:extLst>
+          </p:cNvPr>
+          <p:cNvSpPr>
+            <a:spLocks noGrp="1"/>
+          </p:cNvSpPr>
+          <p:nvPr/>
+        </p:nvSpPr>
+        <p:spPr>
+          <a:xfrm>
+            <a:off x="10096500" y="3876675"/>
+            <a:ext cx="1181100" cy="361950"/>
+          </a:xfrm>
+          <a:prstGeom prst="rect">
+            <a:avLst/>
+          </a:prstGeom>
+          <a:noFill/>
+          <a:ln w="0">
+            <a:noFill/>
+            <a:prstDash val="solid"/>
+          </a:ln>
+        </p:spPr>
+        <p:txBody>
+          <a:bodyPr wrap="square" lIns="0" tIns="0" rIns="0" bIns="0" anchor="t">
+            <a:normAutofit/>
+          </a:bodyPr>
+          <a:lstStyle>
+            <a:defPPr algn="ctr">
+              <a:defRPr sz="1050" b="0">
+                <a:solidFill>
+                  <a:srgbClr val="C9D9E9"/>
+                </a:solidFill>
+                <a:latin typeface="Aptos"/>
+                <a:ea typeface="Aptos"/>
+                <a:cs typeface="Aptos"/>
+              </a:defRPr>
+            </a:defPPr>
+            <a:lvl1pPr algn="ctr">
+              <a:defRPr sz="1050" b="0">
+                <a:solidFill>
+                  <a:srgbClr val="C9D9E9"/>
+                </a:solidFill>
+                <a:latin typeface="Aptos"/>
+                <a:ea typeface="Aptos"/>
+                <a:cs typeface="Aptos"/>
+              </a:defRPr>
+            </a:lvl1pPr>
+            <a:lvl2pPr algn="ctr">
+              <a:defRPr sz="1050" b="0">
+                <a:solidFill>
+                  <a:srgbClr val="C9D9E9"/>
+                </a:solidFill>
+                <a:latin typeface="Aptos"/>
+                <a:ea typeface="Aptos"/>
+                <a:cs typeface="Aptos"/>
+              </a:defRPr>
+            </a:lvl2pPr>
+            <a:lvl3pPr algn="ctr">
+              <a:defRPr sz="1050" b="0">
+                <a:solidFill>
+                  <a:srgbClr val="C9D9E9"/>
+                </a:solidFill>
+                <a:latin typeface="Aptos"/>
+                <a:ea typeface="Aptos"/>
+                <a:cs typeface="Aptos"/>
+              </a:defRPr>
+            </a:lvl3pPr>
+            <a:lvl4pPr algn="ctr">
+              <a:defRPr sz="1050" b="0">
+                <a:solidFill>
+                  <a:srgbClr val="C9D9E9"/>
+                </a:solidFill>
+                <a:latin typeface="Aptos"/>
+                <a:ea typeface="Aptos"/>
+                <a:cs typeface="Aptos"/>
+              </a:defRPr>
+            </a:lvl4pPr>
+            <a:lvl5pPr algn="ctr">
+              <a:defRPr sz="1050" b="0">
+                <a:solidFill>
+                  <a:srgbClr val="C9D9E9"/>
+                </a:solidFill>
+                <a:latin typeface="Aptos"/>
+                <a:ea typeface="Aptos"/>
+                <a:cs typeface="Aptos"/>
+              </a:defRPr>
+            </a:lvl5pPr>
+            <a:lvl6pPr algn="ctr">
+              <a:defRPr sz="1050" b="0">
+                <a:solidFill>
+                  <a:srgbClr val="C9D9E9"/>
+                </a:solidFill>
+                <a:latin typeface="Aptos"/>
+                <a:ea typeface="Aptos"/>
+                <a:cs typeface="Aptos"/>
+              </a:defRPr>
+            </a:lvl6pPr>
+            <a:lvl7pPr algn="ctr">
+              <a:defRPr sz="1050" b="0">
+                <a:solidFill>
+                  <a:srgbClr val="C9D9E9"/>
+                </a:solidFill>
+                <a:latin typeface="Aptos"/>
+                <a:ea typeface="Aptos"/>
+                <a:cs typeface="Aptos"/>
+              </a:defRPr>
+            </a:lvl7pPr>
+            <a:lvl8pPr algn="ctr">
+              <a:defRPr sz="1050" b="0">
+                <a:solidFill>
+                  <a:srgbClr val="C9D9E9"/>
+                </a:solidFill>
+                <a:latin typeface="Aptos"/>
+                <a:ea typeface="Aptos"/>
+                <a:cs typeface="Aptos"/>
+              </a:defRPr>
+            </a:lvl8pPr>
+            <a:lvl9pPr algn="ctr">
+              <a:defRPr sz="1050" b="0">
+                <a:solidFill>
+                  <a:srgbClr val="C9D9E9"/>
+                </a:solidFill>
+                <a:latin typeface="Aptos"/>
+                <a:ea typeface="Aptos"/>
+                <a:cs typeface="Aptos"/>
+              </a:defRPr>
+            </a:lvl9pPr>
+          </a:lstStyle>
+          <a:p>
+            <a:pPr algn="ctr">
+              <a:lnSpc>
+                <a:spcPct val="105000"/>
+              </a:lnSpc>
+              <a:buNone/>
+              <a:defRPr sz="1050" b="0">
+                <a:solidFill>
+                  <a:srgbClr val="C9D9E9"/>
+                </a:solidFill>
+                <a:latin typeface="Aptos"/>
+                <a:ea typeface="Aptos"/>
+                <a:cs typeface="Aptos"/>
+              </a:defRPr>
+            </a:pPr>
+            <a:r>
+              <a:rPr sz="1050" b="0">
+                <a:solidFill>
+                  <a:srgbClr val="C9D9E9"/>
+                </a:solidFill>
+                <a:latin typeface="Aptos"/>
+                <a:ea typeface="Aptos"/>
+                <a:cs typeface="Aptos"/>
+              </a:rPr>
+              <a:t>FastAPI +</a:t>
+            </a:r>
+          </a:p>
+          <a:p>
+            <a:pPr algn="ctr">
+              <a:lnSpc>
+                <a:spcPct val="105000"/>
+              </a:lnSpc>
+              <a:buNone/>
+              <a:defRPr sz="1050" b="0">
+                <a:solidFill>
+                  <a:srgbClr val="C9D9E9"/>
+                </a:solidFill>
+                <a:latin typeface="Aptos"/>
+                <a:ea typeface="Aptos"/>
+                <a:cs typeface="Aptos"/>
+              </a:defRPr>
+            </a:pPr>
+            <a:r>
+              <a:rPr sz="1050" b="0">
+                <a:solidFill>
+                  <a:srgbClr val="C9D9E9"/>
+                </a:solidFill>
+                <a:latin typeface="Aptos"/>
+                <a:ea typeface="Aptos"/>
+                <a:cs typeface="Aptos"/>
+              </a:rPr>
+              <a:t>Streamlit</a:t>
             </a:r>
           </a:p>
         </p:txBody>
